--- a/templates/office/Phase5_사업완료보고서_준공보고.pptx
+++ b/templates/office/Phase5_사업완료보고서_준공보고.pptx
@@ -8,6 +8,11 @@
     <p:sldId id="256" r:id="rId7"/>
     <p:sldId id="257" r:id="rId8"/>
     <p:sldId id="258" r:id="rId9"/>
+    <p:sldId id="259" r:id="rId10"/>
+    <p:sldId id="260" r:id="rId11"/>
+    <p:sldId id="261" r:id="rId12"/>
+    <p:sldId id="262" r:id="rId13"/>
+    <p:sldId id="263" r:id="rId14"/>
   </p:sldIdLst>
   <p:sldSz cx="12191695" cy="6858000" type="screen4x3"/>
   <p:notesSz cx="6858000" cy="9144000"/>
@@ -3105,7 +3110,7 @@
             <a:avLst/>
           </a:prstGeom>
           <a:solidFill>
-            <a:srgbClr val="1E293B"/>
+            <a:srgbClr val="0F172A"/>
           </a:solidFill>
           <a:ln>
             <a:noFill/>
@@ -3141,8 +3146,8 @@
         </p:nvSpPr>
         <p:spPr>
           <a:xfrm>
-            <a:off x="1371600" y="2011680"/>
-            <a:ext cx="9448495" cy="2743200"/>
+            <a:off x="1097280" y="1645920"/>
+            <a:ext cx="9966960" cy="2743200"/>
           </a:xfrm>
           <a:prstGeom prst="rect">
             <a:avLst/>
@@ -3150,37 +3155,35 @@
           <a:noFill/>
         </p:spPr>
         <p:txBody>
-          <a:bodyPr wrap="square">
+          <a:bodyPr wrap="none">
             <a:spAutoFit/>
           </a:bodyPr>
           <a:lstStyle/>
           <a:p>
             <a:pPr>
-              <a:defRPr sz="1600">
-                <a:solidFill>
-                  <a:srgbClr val="38BDF8"/>
-                </a:solidFill>
-                <a:latin typeface="Malgun Gothic"/>
-              </a:defRPr>
-            </a:pPr>
-            <a:r>
-              <a:t>엠파시 사업 및 개발 방법론 표준 템플릿</a:t>
+              <a:defRPr sz="1400" b="1">
+                <a:solidFill>
+                  <a:srgbClr val="60A5FA"/>
+                </a:solidFill>
+              </a:defRPr>
+            </a:pPr>
+            <a:r>
+              <a:t>HANBIT GLOBAL SyncGuard AI</a:t>
             </a:r>
           </a:p>
           <a:p>
             <a:pPr>
               <a:spcBef>
-                <a:spcPts val="1400"/>
+                <a:spcPts val="1200"/>
               </a:spcBef>
               <a:defRPr sz="3600" b="1">
                 <a:solidFill>
                   <a:srgbClr val="FFFFFF"/>
                 </a:solidFill>
-                <a:latin typeface="Malgun Gothic"/>
-              </a:defRPr>
-            </a:pPr>
-            <a:r>
-              <a:t>[준공보고회] 사업 완료 최종 보고서</a:t>
+              </a:defRPr>
+            </a:pPr>
+            <a:r>
+              <a:t>사업 완료보고서 (Final Completion Report)</a:t>
             </a:r>
           </a:p>
           <a:p>
@@ -3188,31 +3191,118 @@
               <a:spcBef>
                 <a:spcPts val="1000"/>
               </a:spcBef>
-              <a:defRPr sz="1800">
+              <a:defRPr sz="1600">
                 <a:solidFill>
                   <a:srgbClr val="CBD5E1"/>
                 </a:solidFill>
-                <a:latin typeface="Malgun Gothic"/>
-              </a:defRPr>
-            </a:pPr>
-            <a:r>
-              <a:t>[프로젝트명] 구축 완료, WBS 달성 실적 및 향후 운영 계획 보고</a:t>
-            </a:r>
-          </a:p>
+              </a:defRPr>
+            </a:pPr>
+            <a:r>
+              <a:t>한빛글로벌 엔터프라이즈 AI 콘텐츠·규제 심의 자동화 시스템(SyncGuard AI) 구축 완수 보고</a:t>
+            </a:r>
+          </a:p>
+        </p:txBody>
+      </p:sp>
+      <p:sp>
+        <p:nvSpPr>
+          <p:cNvPr id="4" name="Rounded Rectangle 3"/>
+          <p:cNvSpPr/>
+          <p:nvPr/>
+        </p:nvSpPr>
+        <p:spPr>
+          <a:xfrm>
+            <a:off x="1097280" y="4572000"/>
+            <a:ext cx="9966960" cy="1371600"/>
+          </a:xfrm>
+          <a:prstGeom prst="roundRect">
+            <a:avLst/>
+          </a:prstGeom>
+          <a:solidFill>
+            <a:srgbClr val="1E293B"/>
+          </a:solidFill>
+          <a:ln>
+            <a:solidFill>
+              <a:srgbClr val="334155"/>
+            </a:solidFill>
+          </a:ln>
+        </p:spPr>
+        <p:style>
+          <a:lnRef idx="1">
+            <a:schemeClr val="accent1"/>
+          </a:lnRef>
+          <a:fillRef idx="3">
+            <a:schemeClr val="accent1"/>
+          </a:fillRef>
+          <a:effectRef idx="2">
+            <a:schemeClr val="accent1"/>
+          </a:effectRef>
+          <a:fontRef idx="minor">
+            <a:schemeClr val="lt1"/>
+          </a:fontRef>
+        </p:style>
+        <p:txBody>
+          <a:bodyPr rtlCol="0" anchor="ctr"/>
+          <a:lstStyle/>
+          <a:p>
+            <a:pPr algn="ctr"/>
+          </a:p>
+        </p:txBody>
+      </p:sp>
+      <p:sp>
+        <p:nvSpPr>
+          <p:cNvPr id="5" name="TextBox 4"/>
+          <p:cNvSpPr txBox="1"/>
+          <p:nvPr/>
+        </p:nvSpPr>
+        <p:spPr>
+          <a:xfrm>
+            <a:off x="1371600" y="4709160"/>
+            <a:ext cx="9418320" cy="1097280"/>
+          </a:xfrm>
+          <a:prstGeom prst="rect">
+            <a:avLst/>
+          </a:prstGeom>
+          <a:noFill/>
+        </p:spPr>
+        <p:txBody>
+          <a:bodyPr wrap="none">
+            <a:spAutoFit/>
+          </a:bodyPr>
+          <a:lstStyle/>
           <a:p>
             <a:pPr>
-              <a:spcBef>
-                <a:spcPts val="4000"/>
-              </a:spcBef>
-              <a:defRPr sz="1200">
+              <a:defRPr sz="1100" b="1">
+                <a:solidFill>
+                  <a:srgbClr val="FFFFFF"/>
+                </a:solidFill>
+              </a:defRPr>
+            </a:pPr>
+            <a:r>
+              <a:t>문서 번호: EMP_IMP_080  |  버전: v1.0 (최종 승인본)  |  보고 일자: 2026년 10월 16일</a:t>
+            </a:r>
+          </a:p>
+          <a:p>
+            <a:pPr>
+              <a:defRPr sz="1100">
                 <a:solidFill>
                   <a:srgbClr val="94A3B8"/>
                 </a:solidFill>
-                <a:latin typeface="Malgun Gothic"/>
-              </a:defRPr>
-            </a:pPr>
-            <a:r>
-              <a:t>주식회사 엠파시 (Empasy Inc.)  |  2026 Enterprise Project Lifecycle</a:t>
+              </a:defRPr>
+            </a:pPr>
+            <a:r>
+              <a:t>사업 기간: 2026.06.01 ~ 2026.10.16 (총 5개월)  |  계약 목표 대비 달성률: 100% (검수 적합)</a:t>
+            </a:r>
+          </a:p>
+          <a:p>
+            <a:pPr>
+              <a:defRPr sz="1100" b="1">
+                <a:solidFill>
+                  <a:srgbClr val="60A5FA"/>
+                </a:solidFill>
+              </a:defRPr>
+            </a:pPr>
+            <a:r>
+              <a:t>발주사: ㈜한빛글로벌 (Hanbit Global Corp.)   |   수행사: ㈜엠파시 (Empasy Inc.)</a:t>
             </a:r>
           </a:p>
         </p:txBody>
@@ -3244,15 +3334,15 @@
         <p:spPr>
           <a:xfrm>
             <a:off x="0" y="0"/>
-            <a:ext cx="12191695" cy="1097280"/>
+            <a:ext cx="12191695" cy="1005840"/>
           </a:xfrm>
           <a:prstGeom prst="rect">
             <a:avLst/>
           </a:prstGeom>
           <a:solidFill>
-            <a:srgbClr val="F8FAFC"/>
+            <a:srgbClr val="FFFFFF"/>
           </a:solidFill>
-          <a:ln>
+          <a:ln w="12700">
             <a:solidFill>
               <a:srgbClr val="E2E8F0"/>
             </a:solidFill>
@@ -3288,8 +3378,8 @@
         </p:nvSpPr>
         <p:spPr>
           <a:xfrm>
-            <a:off x="914400" y="228600"/>
-            <a:ext cx="10362895" cy="640080"/>
+            <a:off x="731520" y="164592"/>
+            <a:ext cx="6400800" cy="274320"/>
           </a:xfrm>
           <a:prstGeom prst="rect">
             <a:avLst/>
@@ -3303,15 +3393,14 @@
           <a:lstStyle/>
           <a:p>
             <a:pPr>
-              <a:defRPr sz="2200" b="1">
-                <a:solidFill>
-                  <a:srgbClr val="1E293B"/>
-                </a:solidFill>
-                <a:latin typeface="Malgun Gothic"/>
-              </a:defRPr>
-            </a:pPr>
-            <a:r>
-              <a:t>사업 완료 보고 순서</a:t>
+              <a:defRPr sz="1000" b="1">
+                <a:solidFill>
+                  <a:srgbClr val="2563EB"/>
+                </a:solidFill>
+              </a:defRPr>
+            </a:pPr>
+            <a:r>
+              <a:t>SyncGuard AI 사업 완료보고서  &gt;  1. 사업 완수 개요</a:t>
             </a:r>
           </a:p>
         </p:txBody>
@@ -3324,8 +3413,269 @@
         </p:nvSpPr>
         <p:spPr>
           <a:xfrm>
-            <a:off x="914400" y="1463040"/>
-            <a:ext cx="10362895" cy="4572000"/>
+            <a:off x="731520" y="411480"/>
+            <a:ext cx="7772400" cy="502920"/>
+          </a:xfrm>
+          <a:prstGeom prst="rect">
+            <a:avLst/>
+          </a:prstGeom>
+          <a:noFill/>
+        </p:spPr>
+        <p:txBody>
+          <a:bodyPr wrap="none">
+            <a:spAutoFit/>
+          </a:bodyPr>
+          <a:lstStyle/>
+          <a:p>
+            <a:pPr>
+              <a:defRPr sz="1800" b="1">
+                <a:solidFill>
+                  <a:srgbClr val="0F172A"/>
+                </a:solidFill>
+              </a:defRPr>
+            </a:pPr>
+            <a:r>
+              <a:t>1.1 계약 목표 대비 종합 추진 실적 (달성률 100%)</a:t>
+            </a:r>
+          </a:p>
+        </p:txBody>
+      </p:sp>
+      <p:sp>
+        <p:nvSpPr>
+          <p:cNvPr id="5" name="TextBox 4"/>
+          <p:cNvSpPr txBox="1"/>
+          <p:nvPr/>
+        </p:nvSpPr>
+        <p:spPr>
+          <a:xfrm>
+            <a:off x="8229600" y="228600"/>
+            <a:ext cx="3200400" cy="548640"/>
+          </a:xfrm>
+          <a:prstGeom prst="rect">
+            <a:avLst/>
+          </a:prstGeom>
+          <a:noFill/>
+        </p:spPr>
+        <p:txBody>
+          <a:bodyPr wrap="none">
+            <a:spAutoFit/>
+          </a:bodyPr>
+          <a:lstStyle/>
+          <a:p>
+            <a:pPr algn="r">
+              <a:defRPr sz="1000" b="1">
+                <a:solidFill>
+                  <a:srgbClr val="1E293B"/>
+                </a:solidFill>
+              </a:defRPr>
+            </a:pPr>
+            <a:r>
+              <a:t>산출물 ID: EMP_IMP_080 | v1.0</a:t>
+            </a:r>
+          </a:p>
+        </p:txBody>
+      </p:sp>
+      <p:sp>
+        <p:nvSpPr>
+          <p:cNvPr id="6" name="Rectangle 5"/>
+          <p:cNvSpPr/>
+          <p:nvPr/>
+        </p:nvSpPr>
+        <p:spPr>
+          <a:xfrm>
+            <a:off x="0" y="6309360"/>
+            <a:ext cx="12191695" cy="548640"/>
+          </a:xfrm>
+          <a:prstGeom prst="rect">
+            <a:avLst/>
+          </a:prstGeom>
+          <a:solidFill>
+            <a:srgbClr val="F8FAFC"/>
+          </a:solidFill>
+          <a:ln w="12700">
+            <a:solidFill>
+              <a:srgbClr val="E2E8F0"/>
+            </a:solidFill>
+          </a:ln>
+        </p:spPr>
+        <p:style>
+          <a:lnRef idx="1">
+            <a:schemeClr val="accent1"/>
+          </a:lnRef>
+          <a:fillRef idx="3">
+            <a:schemeClr val="accent1"/>
+          </a:fillRef>
+          <a:effectRef idx="2">
+            <a:schemeClr val="accent1"/>
+          </a:effectRef>
+          <a:fontRef idx="minor">
+            <a:schemeClr val="lt1"/>
+          </a:fontRef>
+        </p:style>
+        <p:txBody>
+          <a:bodyPr rtlCol="0" anchor="ctr"/>
+          <a:lstStyle/>
+          <a:p>
+            <a:pPr algn="ctr"/>
+          </a:p>
+        </p:txBody>
+      </p:sp>
+      <p:sp>
+        <p:nvSpPr>
+          <p:cNvPr id="7" name="TextBox 6"/>
+          <p:cNvSpPr txBox="1"/>
+          <p:nvPr/>
+        </p:nvSpPr>
+        <p:spPr>
+          <a:xfrm>
+            <a:off x="731520" y="6355080"/>
+            <a:ext cx="5029200" cy="365760"/>
+          </a:xfrm>
+          <a:prstGeom prst="rect">
+            <a:avLst/>
+          </a:prstGeom>
+          <a:noFill/>
+        </p:spPr>
+        <p:txBody>
+          <a:bodyPr wrap="none">
+            <a:spAutoFit/>
+          </a:bodyPr>
+          <a:lstStyle/>
+          <a:p>
+            <a:pPr>
+              <a:defRPr sz="900">
+                <a:solidFill>
+                  <a:srgbClr val="64748B"/>
+                </a:solidFill>
+              </a:defRPr>
+            </a:pPr>
+            <a:r>
+              <a:t>SyncGuard AI | 프로젝트 최종 완수 및 검수 요청 종료보고서</a:t>
+            </a:r>
+          </a:p>
+        </p:txBody>
+      </p:sp>
+      <p:sp>
+        <p:nvSpPr>
+          <p:cNvPr id="8" name="TextBox 7"/>
+          <p:cNvSpPr txBox="1"/>
+          <p:nvPr/>
+        </p:nvSpPr>
+        <p:spPr>
+          <a:xfrm>
+            <a:off x="5486400" y="6355080"/>
+            <a:ext cx="1371600" cy="365760"/>
+          </a:xfrm>
+          <a:prstGeom prst="rect">
+            <a:avLst/>
+          </a:prstGeom>
+          <a:noFill/>
+        </p:spPr>
+        <p:txBody>
+          <a:bodyPr wrap="none">
+            <a:spAutoFit/>
+          </a:bodyPr>
+          <a:lstStyle/>
+          <a:p>
+            <a:pPr algn="ctr">
+              <a:defRPr sz="1000" b="1"/>
+            </a:pPr>
+            <a:r>
+              <a:t>2 / 8</a:t>
+            </a:r>
+          </a:p>
+        </p:txBody>
+      </p:sp>
+      <p:sp>
+        <p:nvSpPr>
+          <p:cNvPr id="9" name="TextBox 8"/>
+          <p:cNvSpPr txBox="1"/>
+          <p:nvPr/>
+        </p:nvSpPr>
+        <p:spPr>
+          <a:xfrm>
+            <a:off x="7315200" y="6355080"/>
+            <a:ext cx="4114800" cy="365760"/>
+          </a:xfrm>
+          <a:prstGeom prst="rect">
+            <a:avLst/>
+          </a:prstGeom>
+          <a:noFill/>
+        </p:spPr>
+        <p:txBody>
+          <a:bodyPr wrap="none">
+            <a:spAutoFit/>
+          </a:bodyPr>
+          <a:lstStyle/>
+          <a:p>
+            <a:pPr algn="r">
+              <a:defRPr sz="900" b="1">
+                <a:solidFill>
+                  <a:srgbClr val="2563EB"/>
+                </a:solidFill>
+              </a:defRPr>
+            </a:pPr>
+            <a:r>
+              <a:t>발주사: HANBIT GLOBAL   |   수행사: ㈜엠파시 (Empasy Inc.)</a:t>
+            </a:r>
+          </a:p>
+        </p:txBody>
+      </p:sp>
+      <p:sp>
+        <p:nvSpPr>
+          <p:cNvPr id="10" name="Rounded Rectangle 9"/>
+          <p:cNvSpPr/>
+          <p:nvPr/>
+        </p:nvSpPr>
+        <p:spPr>
+          <a:xfrm>
+            <a:off x="731520" y="1371600"/>
+            <a:ext cx="2514600" cy="2103120"/>
+          </a:xfrm>
+          <a:prstGeom prst="roundRect">
+            <a:avLst/>
+          </a:prstGeom>
+          <a:solidFill>
+            <a:srgbClr val="FFFFFF"/>
+          </a:solidFill>
+          <a:ln w="19050">
+            <a:solidFill>
+              <a:srgbClr val="2563EB"/>
+            </a:solidFill>
+          </a:ln>
+        </p:spPr>
+        <p:style>
+          <a:lnRef idx="1">
+            <a:schemeClr val="accent1"/>
+          </a:lnRef>
+          <a:fillRef idx="3">
+            <a:schemeClr val="accent1"/>
+          </a:fillRef>
+          <a:effectRef idx="2">
+            <a:schemeClr val="accent1"/>
+          </a:effectRef>
+          <a:fontRef idx="minor">
+            <a:schemeClr val="lt1"/>
+          </a:fontRef>
+        </p:style>
+        <p:txBody>
+          <a:bodyPr rtlCol="0" anchor="ctr"/>
+          <a:lstStyle/>
+          <a:p>
+            <a:pPr algn="ctr"/>
+          </a:p>
+        </p:txBody>
+      </p:sp>
+      <p:sp>
+        <p:nvSpPr>
+          <p:cNvPr id="11" name="TextBox 10"/>
+          <p:cNvSpPr txBox="1"/>
+          <p:nvPr/>
+        </p:nvSpPr>
+        <p:spPr>
+          <a:xfrm>
+            <a:off x="868680" y="1463040"/>
+            <a:ext cx="2240280" cy="1920240"/>
           </a:xfrm>
           <a:prstGeom prst="rect">
             <a:avLst/>
@@ -3337,23 +3687,149 @@
             <a:spAutoFit/>
           </a:bodyPr>
           <a:lstStyle/>
+          <a:p>
+            <a:pPr>
+              <a:defRPr b="1" sz="1100">
+                <a:solidFill>
+                  <a:srgbClr val="2563EB"/>
+                </a:solidFill>
+              </a:defRPr>
+            </a:pPr>
+            <a:r>
+              <a:t>기능 요구사항 달성</a:t>
+            </a:r>
+          </a:p>
+          <a:p>
+            <a:pPr>
+              <a:spcBef>
+                <a:spcPts val="600"/>
+              </a:spcBef>
+              <a:defRPr b="1" sz="2200">
+                <a:solidFill>
+                  <a:srgbClr val="2563EB"/>
+                </a:solidFill>
+              </a:defRPr>
+            </a:pPr>
+            <a:r>
+              <a:t>100%</a:t>
+            </a:r>
+          </a:p>
           <a:p>
             <a:pPr>
               <a:spcBef>
                 <a:spcPts val="800"/>
               </a:spcBef>
-              <a:spcAft>
+              <a:defRPr sz="950">
+                <a:solidFill>
+                  <a:srgbClr val="334155"/>
+                </a:solidFill>
+              </a:defRPr>
+            </a:pPr>
+            <a:r>
+              <a:t>요구사항 42개 항목 전수 개발 완료</a:t>
+            </a:r>
+            <a:br/>
+            <a:r>
+              <a:t>단위/통합 테스트 100% 통과</a:t>
+            </a:r>
+            <a:br/>
+            <a:r>
+              <a:t>결함 조치율 100% 달성</a:t>
+            </a:r>
+          </a:p>
+        </p:txBody>
+      </p:sp>
+      <p:sp>
+        <p:nvSpPr>
+          <p:cNvPr id="12" name="Rounded Rectangle 11"/>
+          <p:cNvSpPr/>
+          <p:nvPr/>
+        </p:nvSpPr>
+        <p:spPr>
+          <a:xfrm>
+            <a:off x="3429000" y="1371600"/>
+            <a:ext cx="2514600" cy="2103120"/>
+          </a:xfrm>
+          <a:prstGeom prst="roundRect">
+            <a:avLst/>
+          </a:prstGeom>
+          <a:solidFill>
+            <a:srgbClr val="FFFFFF"/>
+          </a:solidFill>
+          <a:ln w="19050">
+            <a:solidFill>
+              <a:srgbClr val="0F172A"/>
+            </a:solidFill>
+          </a:ln>
+        </p:spPr>
+        <p:style>
+          <a:lnRef idx="1">
+            <a:schemeClr val="accent1"/>
+          </a:lnRef>
+          <a:fillRef idx="3">
+            <a:schemeClr val="accent1"/>
+          </a:fillRef>
+          <a:effectRef idx="2">
+            <a:schemeClr val="accent1"/>
+          </a:effectRef>
+          <a:fontRef idx="minor">
+            <a:schemeClr val="lt1"/>
+          </a:fontRef>
+        </p:style>
+        <p:txBody>
+          <a:bodyPr rtlCol="0" anchor="ctr"/>
+          <a:lstStyle/>
+          <a:p>
+            <a:pPr algn="ctr"/>
+          </a:p>
+        </p:txBody>
+      </p:sp>
+      <p:sp>
+        <p:nvSpPr>
+          <p:cNvPr id="13" name="TextBox 12"/>
+          <p:cNvSpPr txBox="1"/>
+          <p:nvPr/>
+        </p:nvSpPr>
+        <p:spPr>
+          <a:xfrm>
+            <a:off x="3566160" y="1463040"/>
+            <a:ext cx="2240280" cy="1920240"/>
+          </a:xfrm>
+          <a:prstGeom prst="rect">
+            <a:avLst/>
+          </a:prstGeom>
+          <a:noFill/>
+        </p:spPr>
+        <p:txBody>
+          <a:bodyPr wrap="square">
+            <a:spAutoFit/>
+          </a:bodyPr>
+          <a:lstStyle/>
+          <a:p>
+            <a:pPr>
+              <a:defRPr b="1" sz="1100">
+                <a:solidFill>
+                  <a:srgbClr val="0F172A"/>
+                </a:solidFill>
+              </a:defRPr>
+            </a:pPr>
+            <a:r>
+              <a:t>AI 심의 정확도</a:t>
+            </a:r>
+          </a:p>
+          <a:p>
+            <a:pPr>
+              <a:spcBef>
                 <a:spcPts val="600"/>
-              </a:spcAft>
-              <a:defRPr sz="1400">
-                <a:solidFill>
-                  <a:srgbClr val="334155"/>
-                </a:solidFill>
-                <a:latin typeface="Malgun Gothic"/>
-              </a:defRPr>
-            </a:pPr>
-            <a:r>
-              <a:t>•  1. 사업 개요 및 추진 경과 (착수부터 오픈까지의 마일스톤 달성)</a:t>
+              </a:spcBef>
+              <a:defRPr b="1" sz="2200">
+                <a:solidFill>
+                  <a:srgbClr val="0F172A"/>
+                </a:solidFill>
+              </a:defRPr>
+            </a:pPr>
+            <a:r>
+              <a:t>96.2%</a:t>
             </a:r>
           </a:p>
           <a:p>
@@ -3361,18 +3837,117 @@
               <a:spcBef>
                 <a:spcPts val="800"/>
               </a:spcBef>
-              <a:spcAft>
+              <a:defRPr sz="950">
+                <a:solidFill>
+                  <a:srgbClr val="334155"/>
+                </a:solidFill>
+              </a:defRPr>
+            </a:pPr>
+            <a:r>
+              <a:t>골든셋 50문항 기준 정밀도 96.2%</a:t>
+            </a:r>
+            <a:br/>
+            <a:r>
+              <a:t>(계약 목표 90.0% 대비 +6.2%p 초과)</a:t>
+            </a:r>
+            <a:br/>
+            <a:r>
+              <a:t>재현율 95.8%, F1 96.0%</a:t>
+            </a:r>
+          </a:p>
+        </p:txBody>
+      </p:sp>
+      <p:sp>
+        <p:nvSpPr>
+          <p:cNvPr id="14" name="Rounded Rectangle 13"/>
+          <p:cNvSpPr/>
+          <p:nvPr/>
+        </p:nvSpPr>
+        <p:spPr>
+          <a:xfrm>
+            <a:off x="6126480" y="1371600"/>
+            <a:ext cx="2514600" cy="2103120"/>
+          </a:xfrm>
+          <a:prstGeom prst="roundRect">
+            <a:avLst/>
+          </a:prstGeom>
+          <a:solidFill>
+            <a:srgbClr val="FFFFFF"/>
+          </a:solidFill>
+          <a:ln w="19050">
+            <a:solidFill>
+              <a:srgbClr val="059669"/>
+            </a:solidFill>
+          </a:ln>
+        </p:spPr>
+        <p:style>
+          <a:lnRef idx="1">
+            <a:schemeClr val="accent1"/>
+          </a:lnRef>
+          <a:fillRef idx="3">
+            <a:schemeClr val="accent1"/>
+          </a:fillRef>
+          <a:effectRef idx="2">
+            <a:schemeClr val="accent1"/>
+          </a:effectRef>
+          <a:fontRef idx="minor">
+            <a:schemeClr val="lt1"/>
+          </a:fontRef>
+        </p:style>
+        <p:txBody>
+          <a:bodyPr rtlCol="0" anchor="ctr"/>
+          <a:lstStyle/>
+          <a:p>
+            <a:pPr algn="ctr"/>
+          </a:p>
+        </p:txBody>
+      </p:sp>
+      <p:sp>
+        <p:nvSpPr>
+          <p:cNvPr id="15" name="TextBox 14"/>
+          <p:cNvSpPr txBox="1"/>
+          <p:nvPr/>
+        </p:nvSpPr>
+        <p:spPr>
+          <a:xfrm>
+            <a:off x="6263640" y="1463040"/>
+            <a:ext cx="2240280" cy="1920240"/>
+          </a:xfrm>
+          <a:prstGeom prst="rect">
+            <a:avLst/>
+          </a:prstGeom>
+          <a:noFill/>
+        </p:spPr>
+        <p:txBody>
+          <a:bodyPr wrap="square">
+            <a:spAutoFit/>
+          </a:bodyPr>
+          <a:lstStyle/>
+          <a:p>
+            <a:pPr>
+              <a:defRPr b="1" sz="1100">
+                <a:solidFill>
+                  <a:srgbClr val="059669"/>
+                </a:solidFill>
+              </a:defRPr>
+            </a:pPr>
+            <a:r>
+              <a:t>심의 리드타임 감축</a:t>
+            </a:r>
+          </a:p>
+          <a:p>
+            <a:pPr>
+              <a:spcBef>
                 <a:spcPts val="600"/>
-              </a:spcAft>
-              <a:defRPr sz="1400">
-                <a:solidFill>
-                  <a:srgbClr val="334155"/>
-                </a:solidFill>
-                <a:latin typeface="Malgun Gothic"/>
-              </a:defRPr>
-            </a:pPr>
-            <a:r>
-              <a:t>•  2. 최종 구축 시스템 종합 소개 (기능, 아키텍처, 성능)</a:t>
+              </a:spcBef>
+              <a:defRPr b="1" sz="2200">
+                <a:solidFill>
+                  <a:srgbClr val="059669"/>
+                </a:solidFill>
+              </a:defRPr>
+            </a:pPr>
+            <a:r>
+              <a:t>3일 → 2시간</a:t>
             </a:r>
           </a:p>
           <a:p>
@@ -3380,18 +3955,117 @@
               <a:spcBef>
                 <a:spcPts val="800"/>
               </a:spcBef>
-              <a:spcAft>
+              <a:defRPr sz="950">
+                <a:solidFill>
+                  <a:srgbClr val="334155"/>
+                </a:solidFill>
+              </a:defRPr>
+            </a:pPr>
+            <a:r>
+              <a:t>평균 심의 소요시간 85% 대폭 감축</a:t>
+            </a:r>
+            <a:br/>
+            <a:r>
+              <a:t>긴급 마케팅 심의 15분 내 처리</a:t>
+            </a:r>
+            <a:br/>
+            <a:r>
+              <a:t>월간 처리용량 4배 이상 증대</a:t>
+            </a:r>
+          </a:p>
+        </p:txBody>
+      </p:sp>
+      <p:sp>
+        <p:nvSpPr>
+          <p:cNvPr id="16" name="Rounded Rectangle 15"/>
+          <p:cNvSpPr/>
+          <p:nvPr/>
+        </p:nvSpPr>
+        <p:spPr>
+          <a:xfrm>
+            <a:off x="8823960" y="1371600"/>
+            <a:ext cx="2514600" cy="2103120"/>
+          </a:xfrm>
+          <a:prstGeom prst="roundRect">
+            <a:avLst/>
+          </a:prstGeom>
+          <a:solidFill>
+            <a:srgbClr val="FFFFFF"/>
+          </a:solidFill>
+          <a:ln w="19050">
+            <a:solidFill>
+              <a:srgbClr val="7C3AED"/>
+            </a:solidFill>
+          </a:ln>
+        </p:spPr>
+        <p:style>
+          <a:lnRef idx="1">
+            <a:schemeClr val="accent1"/>
+          </a:lnRef>
+          <a:fillRef idx="3">
+            <a:schemeClr val="accent1"/>
+          </a:fillRef>
+          <a:effectRef idx="2">
+            <a:schemeClr val="accent1"/>
+          </a:effectRef>
+          <a:fontRef idx="minor">
+            <a:schemeClr val="lt1"/>
+          </a:fontRef>
+        </p:style>
+        <p:txBody>
+          <a:bodyPr rtlCol="0" anchor="ctr"/>
+          <a:lstStyle/>
+          <a:p>
+            <a:pPr algn="ctr"/>
+          </a:p>
+        </p:txBody>
+      </p:sp>
+      <p:sp>
+        <p:nvSpPr>
+          <p:cNvPr id="17" name="TextBox 16"/>
+          <p:cNvSpPr txBox="1"/>
+          <p:nvPr/>
+        </p:nvSpPr>
+        <p:spPr>
+          <a:xfrm>
+            <a:off x="8961120" y="1463040"/>
+            <a:ext cx="2240280" cy="1920240"/>
+          </a:xfrm>
+          <a:prstGeom prst="rect">
+            <a:avLst/>
+          </a:prstGeom>
+          <a:noFill/>
+        </p:spPr>
+        <p:txBody>
+          <a:bodyPr wrap="square">
+            <a:spAutoFit/>
+          </a:bodyPr>
+          <a:lstStyle/>
+          <a:p>
+            <a:pPr>
+              <a:defRPr b="1" sz="1100">
+                <a:solidFill>
+                  <a:srgbClr val="7C3AED"/>
+                </a:solidFill>
+              </a:defRPr>
+            </a:pPr>
+            <a:r>
+              <a:t>전사 산출물 인계</a:t>
+            </a:r>
+          </a:p>
+          <a:p>
+            <a:pPr>
+              <a:spcBef>
                 <a:spcPts val="600"/>
-              </a:spcAft>
-              <a:defRPr sz="1400">
-                <a:solidFill>
-                  <a:srgbClr val="334155"/>
-                </a:solidFill>
-                <a:latin typeface="Malgun Gothic"/>
-              </a:defRPr>
-            </a:pPr>
-            <a:r>
-              <a:t>•  3. 계약 이행 및 납품 산출물 완비 내역 (100% 제출 완료)</a:t>
+              </a:spcBef>
+              <a:defRPr b="1" sz="2200">
+                <a:solidFill>
+                  <a:srgbClr val="7C3AED"/>
+                </a:solidFill>
+              </a:defRPr>
+            </a:pPr>
+            <a:r>
+              <a:t>전수 100%</a:t>
             </a:r>
           </a:p>
           <a:p>
@@ -3399,18 +4073,162 @@
               <a:spcBef>
                 <a:spcPts val="800"/>
               </a:spcBef>
-              <a:spcAft>
-                <a:spcPts val="600"/>
-              </a:spcAft>
-              <a:defRPr sz="1400">
+              <a:defRPr sz="950">
                 <a:solidFill>
                   <a:srgbClr val="334155"/>
                 </a:solidFill>
-                <a:latin typeface="Malgun Gothic"/>
-              </a:defRPr>
-            </a:pPr>
-            <a:r>
-              <a:t>•  4. 1년간의 무상 하자보수 및 운영 유지관리(SLA) 지원 체계</a:t>
+              </a:defRPr>
+            </a:pPr>
+            <a:r>
+              <a:t>착수·분석·설계·구현·테스트·이행</a:t>
+            </a:r>
+            <a:br/>
+            <a:r>
+              <a:t>전 단계 28종 산출물 완비 인계</a:t>
+            </a:r>
+            <a:br/>
+            <a:r>
+              <a:t>매뉴얼/교육/운영체계 수립</a:t>
+            </a:r>
+          </a:p>
+        </p:txBody>
+      </p:sp>
+      <p:sp>
+        <p:nvSpPr>
+          <p:cNvPr id="18" name="Rounded Rectangle 17"/>
+          <p:cNvSpPr/>
+          <p:nvPr/>
+        </p:nvSpPr>
+        <p:spPr>
+          <a:xfrm>
+            <a:off x="731520" y="3749039"/>
+            <a:ext cx="10728655" cy="2286000"/>
+          </a:xfrm>
+          <a:prstGeom prst="roundRect">
+            <a:avLst/>
+          </a:prstGeom>
+          <a:solidFill>
+            <a:srgbClr val="F8FAFC"/>
+          </a:solidFill>
+          <a:ln w="12700">
+            <a:solidFill>
+              <a:srgbClr val="E2E8F0"/>
+            </a:solidFill>
+          </a:ln>
+        </p:spPr>
+        <p:style>
+          <a:lnRef idx="1">
+            <a:schemeClr val="accent1"/>
+          </a:lnRef>
+          <a:fillRef idx="3">
+            <a:schemeClr val="accent1"/>
+          </a:fillRef>
+          <a:effectRef idx="2">
+            <a:schemeClr val="accent1"/>
+          </a:effectRef>
+          <a:fontRef idx="minor">
+            <a:schemeClr val="lt1"/>
+          </a:fontRef>
+        </p:style>
+        <p:txBody>
+          <a:bodyPr rtlCol="0" anchor="ctr"/>
+          <a:lstStyle/>
+          <a:p>
+            <a:pPr algn="ctr"/>
+          </a:p>
+        </p:txBody>
+      </p:sp>
+      <p:sp>
+        <p:nvSpPr>
+          <p:cNvPr id="19" name="TextBox 18"/>
+          <p:cNvSpPr txBox="1"/>
+          <p:nvPr/>
+        </p:nvSpPr>
+        <p:spPr>
+          <a:xfrm>
+            <a:off x="1005840" y="3886200"/>
+            <a:ext cx="10149840" cy="2011680"/>
+          </a:xfrm>
+          <a:prstGeom prst="rect">
+            <a:avLst/>
+          </a:prstGeom>
+          <a:noFill/>
+        </p:spPr>
+        <p:txBody>
+          <a:bodyPr wrap="square">
+            <a:spAutoFit/>
+          </a:bodyPr>
+          <a:lstStyle/>
+          <a:p>
+            <a:pPr>
+              <a:defRPr b="1" sz="1200">
+                <a:solidFill>
+                  <a:srgbClr val="0F172A"/>
+                </a:solidFill>
+              </a:defRPr>
+            </a:pPr>
+            <a:r>
+              <a:t>■ 종합 완수 평가 요약</a:t>
+            </a:r>
+          </a:p>
+          <a:p>
+            <a:pPr>
+              <a:spcBef>
+                <a:spcPts val="400"/>
+              </a:spcBef>
+              <a:defRPr sz="1000">
+                <a:solidFill>
+                  <a:srgbClr val="334155"/>
+                </a:solidFill>
+              </a:defRPr>
+            </a:pPr>
+            <a:r>
+              <a:t>• 계약 납기 준수: 2026년 6월 1일 착수 이후 마일스톤(착수, 분석, 설계, 구현, 테스트, 시범운영)을 지연 없이 100% 준수하여 완수함.</a:t>
+            </a:r>
+          </a:p>
+          <a:p>
+            <a:pPr>
+              <a:spcBef>
+                <a:spcPts val="400"/>
+              </a:spcBef>
+              <a:defRPr sz="1000">
+                <a:solidFill>
+                  <a:srgbClr val="334155"/>
+                </a:solidFill>
+              </a:defRPr>
+            </a:pPr>
+            <a:r>
+              <a:t>• 실무 적용성 검증: 한빛글로벌 루미에르, 아쿠아퓨어, 그린네이처, 더마쉴드 등 주요 11개 브랜드 142건 실데이터 시범운영을 통해 업무 안정성 입증.</a:t>
+            </a:r>
+          </a:p>
+          <a:p>
+            <a:pPr>
+              <a:spcBef>
+                <a:spcPts val="400"/>
+              </a:spcBef>
+              <a:defRPr sz="1000">
+                <a:solidFill>
+                  <a:srgbClr val="334155"/>
+                </a:solidFill>
+              </a:defRPr>
+            </a:pPr>
+            <a:r>
+              <a:t>• 외부 시스템 연계 무결성: 사내 ProductLab(배합·원료 규격), MarketingHub(결재 포털), 전사 통합 SSO 로그인 및 KT 문자 알림망 연계 100% 정상 가동.</a:t>
+            </a:r>
+          </a:p>
+          <a:p>
+            <a:pPr>
+              <a:spcBef>
+                <a:spcPts val="400"/>
+              </a:spcBef>
+              <a:defRPr sz="1000">
+                <a:solidFill>
+                  <a:srgbClr val="334155"/>
+                </a:solidFill>
+              </a:defRPr>
+            </a:pPr>
+            <a:r>
+              <a:t>• 하자 이행 및 기술 지원 보증: 최종 검수 완료일(2026.10.16)로부터 3개월간 전담 엔지니어 상주 및 24시간 장애 대응 SLA 가동 체계 완비.</a:t>
             </a:r>
           </a:p>
         </p:txBody>
@@ -3442,15 +4260,15 @@
         <p:spPr>
           <a:xfrm>
             <a:off x="0" y="0"/>
-            <a:ext cx="12191695" cy="1097280"/>
+            <a:ext cx="12191695" cy="1005840"/>
           </a:xfrm>
           <a:prstGeom prst="rect">
             <a:avLst/>
           </a:prstGeom>
           <a:solidFill>
-            <a:srgbClr val="F8FAFC"/>
+            <a:srgbClr val="FFFFFF"/>
           </a:solidFill>
-          <a:ln>
+          <a:ln w="12700">
             <a:solidFill>
               <a:srgbClr val="E2E8F0"/>
             </a:solidFill>
@@ -3486,8 +4304,8 @@
         </p:nvSpPr>
         <p:spPr>
           <a:xfrm>
-            <a:off x="914400" y="228600"/>
-            <a:ext cx="10362895" cy="640080"/>
+            <a:off x="731520" y="164592"/>
+            <a:ext cx="6400800" cy="274320"/>
           </a:xfrm>
           <a:prstGeom prst="rect">
             <a:avLst/>
@@ -3501,30 +4319,1119 @@
           <a:lstStyle/>
           <a:p>
             <a:pPr>
-              <a:defRPr sz="2200" b="1">
+              <a:defRPr sz="1000" b="1">
+                <a:solidFill>
+                  <a:srgbClr val="2563EB"/>
+                </a:solidFill>
+              </a:defRPr>
+            </a:pPr>
+            <a:r>
+              <a:t>SyncGuard AI 사업 완료보고서  &gt;  2. 시스템 구축 범위</a:t>
+            </a:r>
+          </a:p>
+        </p:txBody>
+      </p:sp>
+      <p:sp>
+        <p:nvSpPr>
+          <p:cNvPr id="4" name="TextBox 3"/>
+          <p:cNvSpPr txBox="1"/>
+          <p:nvPr/>
+        </p:nvSpPr>
+        <p:spPr>
+          <a:xfrm>
+            <a:off x="731520" y="411480"/>
+            <a:ext cx="7772400" cy="502920"/>
+          </a:xfrm>
+          <a:prstGeom prst="rect">
+            <a:avLst/>
+          </a:prstGeom>
+          <a:noFill/>
+        </p:spPr>
+        <p:txBody>
+          <a:bodyPr wrap="none">
+            <a:spAutoFit/>
+          </a:bodyPr>
+          <a:lstStyle/>
+          <a:p>
+            <a:pPr>
+              <a:defRPr sz="1800" b="1">
+                <a:solidFill>
+                  <a:srgbClr val="0F172A"/>
+                </a:solidFill>
+              </a:defRPr>
+            </a:pPr>
+            <a:r>
+              <a:t>2.1 4대 핵심 영역별 구축 완료 현황</a:t>
+            </a:r>
+          </a:p>
+        </p:txBody>
+      </p:sp>
+      <p:sp>
+        <p:nvSpPr>
+          <p:cNvPr id="5" name="TextBox 4"/>
+          <p:cNvSpPr txBox="1"/>
+          <p:nvPr/>
+        </p:nvSpPr>
+        <p:spPr>
+          <a:xfrm>
+            <a:off x="8229600" y="228600"/>
+            <a:ext cx="3200400" cy="548640"/>
+          </a:xfrm>
+          <a:prstGeom prst="rect">
+            <a:avLst/>
+          </a:prstGeom>
+          <a:noFill/>
+        </p:spPr>
+        <p:txBody>
+          <a:bodyPr wrap="none">
+            <a:spAutoFit/>
+          </a:bodyPr>
+          <a:lstStyle/>
+          <a:p>
+            <a:pPr algn="r">
+              <a:defRPr sz="1000" b="1">
                 <a:solidFill>
                   <a:srgbClr val="1E293B"/>
                 </a:solidFill>
-                <a:latin typeface="Malgun Gothic"/>
-              </a:defRPr>
-            </a:pPr>
-            <a:r>
-              <a:t>최종 납품 산출물 완비 검사표</a:t>
+              </a:defRPr>
+            </a:pPr>
+            <a:r>
+              <a:t>산출물 ID: EMP_IMP_080 | v1.0</a:t>
+            </a:r>
+          </a:p>
+        </p:txBody>
+      </p:sp>
+      <p:sp>
+        <p:nvSpPr>
+          <p:cNvPr id="6" name="Rectangle 5"/>
+          <p:cNvSpPr/>
+          <p:nvPr/>
+        </p:nvSpPr>
+        <p:spPr>
+          <a:xfrm>
+            <a:off x="0" y="6309360"/>
+            <a:ext cx="12191695" cy="548640"/>
+          </a:xfrm>
+          <a:prstGeom prst="rect">
+            <a:avLst/>
+          </a:prstGeom>
+          <a:solidFill>
+            <a:srgbClr val="F8FAFC"/>
+          </a:solidFill>
+          <a:ln w="12700">
+            <a:solidFill>
+              <a:srgbClr val="E2E8F0"/>
+            </a:solidFill>
+          </a:ln>
+        </p:spPr>
+        <p:style>
+          <a:lnRef idx="1">
+            <a:schemeClr val="accent1"/>
+          </a:lnRef>
+          <a:fillRef idx="3">
+            <a:schemeClr val="accent1"/>
+          </a:fillRef>
+          <a:effectRef idx="2">
+            <a:schemeClr val="accent1"/>
+          </a:effectRef>
+          <a:fontRef idx="minor">
+            <a:schemeClr val="lt1"/>
+          </a:fontRef>
+        </p:style>
+        <p:txBody>
+          <a:bodyPr rtlCol="0" anchor="ctr"/>
+          <a:lstStyle/>
+          <a:p>
+            <a:pPr algn="ctr"/>
+          </a:p>
+        </p:txBody>
+      </p:sp>
+      <p:sp>
+        <p:nvSpPr>
+          <p:cNvPr id="7" name="TextBox 6"/>
+          <p:cNvSpPr txBox="1"/>
+          <p:nvPr/>
+        </p:nvSpPr>
+        <p:spPr>
+          <a:xfrm>
+            <a:off x="731520" y="6355080"/>
+            <a:ext cx="5029200" cy="365760"/>
+          </a:xfrm>
+          <a:prstGeom prst="rect">
+            <a:avLst/>
+          </a:prstGeom>
+          <a:noFill/>
+        </p:spPr>
+        <p:txBody>
+          <a:bodyPr wrap="none">
+            <a:spAutoFit/>
+          </a:bodyPr>
+          <a:lstStyle/>
+          <a:p>
+            <a:pPr>
+              <a:defRPr sz="900">
+                <a:solidFill>
+                  <a:srgbClr val="64748B"/>
+                </a:solidFill>
+              </a:defRPr>
+            </a:pPr>
+            <a:r>
+              <a:t>SyncGuard AI | 프로젝트 최종 완수 및 검수 요청 종료보고서</a:t>
+            </a:r>
+          </a:p>
+        </p:txBody>
+      </p:sp>
+      <p:sp>
+        <p:nvSpPr>
+          <p:cNvPr id="8" name="TextBox 7"/>
+          <p:cNvSpPr txBox="1"/>
+          <p:nvPr/>
+        </p:nvSpPr>
+        <p:spPr>
+          <a:xfrm>
+            <a:off x="5486400" y="6355080"/>
+            <a:ext cx="1371600" cy="365760"/>
+          </a:xfrm>
+          <a:prstGeom prst="rect">
+            <a:avLst/>
+          </a:prstGeom>
+          <a:noFill/>
+        </p:spPr>
+        <p:txBody>
+          <a:bodyPr wrap="none">
+            <a:spAutoFit/>
+          </a:bodyPr>
+          <a:lstStyle/>
+          <a:p>
+            <a:pPr algn="ctr">
+              <a:defRPr sz="1000" b="1"/>
+            </a:pPr>
+            <a:r>
+              <a:t>3 / 8</a:t>
+            </a:r>
+          </a:p>
+        </p:txBody>
+      </p:sp>
+      <p:sp>
+        <p:nvSpPr>
+          <p:cNvPr id="9" name="TextBox 8"/>
+          <p:cNvSpPr txBox="1"/>
+          <p:nvPr/>
+        </p:nvSpPr>
+        <p:spPr>
+          <a:xfrm>
+            <a:off x="7315200" y="6355080"/>
+            <a:ext cx="4114800" cy="365760"/>
+          </a:xfrm>
+          <a:prstGeom prst="rect">
+            <a:avLst/>
+          </a:prstGeom>
+          <a:noFill/>
+        </p:spPr>
+        <p:txBody>
+          <a:bodyPr wrap="none">
+            <a:spAutoFit/>
+          </a:bodyPr>
+          <a:lstStyle/>
+          <a:p>
+            <a:pPr algn="r">
+              <a:defRPr sz="900" b="1">
+                <a:solidFill>
+                  <a:srgbClr val="2563EB"/>
+                </a:solidFill>
+              </a:defRPr>
+            </a:pPr>
+            <a:r>
+              <a:t>발주사: HANBIT GLOBAL   |   수행사: ㈜엠파시 (Empasy Inc.)</a:t>
+            </a:r>
+          </a:p>
+        </p:txBody>
+      </p:sp>
+      <p:sp>
+        <p:nvSpPr>
+          <p:cNvPr id="10" name="Rounded Rectangle 9"/>
+          <p:cNvSpPr/>
+          <p:nvPr/>
+        </p:nvSpPr>
+        <p:spPr>
+          <a:xfrm>
+            <a:off x="731520" y="1371600"/>
+            <a:ext cx="5257800" cy="2194560"/>
+          </a:xfrm>
+          <a:prstGeom prst="roundRect">
+            <a:avLst/>
+          </a:prstGeom>
+          <a:solidFill>
+            <a:srgbClr val="FFFFFF"/>
+          </a:solidFill>
+          <a:ln w="19050">
+            <a:solidFill>
+              <a:srgbClr val="2563EB"/>
+            </a:solidFill>
+          </a:ln>
+        </p:spPr>
+        <p:style>
+          <a:lnRef idx="1">
+            <a:schemeClr val="accent1"/>
+          </a:lnRef>
+          <a:fillRef idx="3">
+            <a:schemeClr val="accent1"/>
+          </a:fillRef>
+          <a:effectRef idx="2">
+            <a:schemeClr val="accent1"/>
+          </a:effectRef>
+          <a:fontRef idx="minor">
+            <a:schemeClr val="lt1"/>
+          </a:fontRef>
+        </p:style>
+        <p:txBody>
+          <a:bodyPr rtlCol="0" anchor="ctr"/>
+          <a:lstStyle/>
+          <a:p>
+            <a:pPr algn="ctr"/>
+          </a:p>
+        </p:txBody>
+      </p:sp>
+      <p:sp>
+        <p:nvSpPr>
+          <p:cNvPr id="11" name="TextBox 10"/>
+          <p:cNvSpPr txBox="1"/>
+          <p:nvPr/>
+        </p:nvSpPr>
+        <p:spPr>
+          <a:xfrm>
+            <a:off x="914400" y="1508760"/>
+            <a:ext cx="4892040" cy="1920240"/>
+          </a:xfrm>
+          <a:prstGeom prst="rect">
+            <a:avLst/>
+          </a:prstGeom>
+          <a:noFill/>
+        </p:spPr>
+        <p:txBody>
+          <a:bodyPr wrap="square">
+            <a:spAutoFit/>
+          </a:bodyPr>
+          <a:lstStyle/>
+          <a:p>
+            <a:pPr>
+              <a:defRPr b="1" sz="1100">
+                <a:solidFill>
+                  <a:srgbClr val="2563EB"/>
+                </a:solidFill>
+              </a:defRPr>
+            </a:pPr>
+            <a:r>
+              <a:t>1. 통합 심의 포털 (Front-End)</a:t>
+            </a:r>
+          </a:p>
+          <a:p>
+            <a:pPr>
+              <a:spcBef>
+                <a:spcPts val="300"/>
+              </a:spcBef>
+              <a:defRPr sz="950">
+                <a:solidFill>
+                  <a:srgbClr val="334155"/>
+                </a:solidFill>
+              </a:defRPr>
+            </a:pPr>
+            <a:r>
+              <a:t>• Vben Admin 기반 반응형 웹 포털 구축</a:t>
+            </a:r>
+          </a:p>
+          <a:p>
+            <a:pPr>
+              <a:spcBef>
+                <a:spcPts val="300"/>
+              </a:spcBef>
+              <a:defRPr sz="950">
+                <a:solidFill>
+                  <a:srgbClr val="334155"/>
+                </a:solidFill>
+              </a:defRPr>
+            </a:pPr>
+            <a:r>
+              <a:t>• 클레임 심의 접수 / 실시간 모니터링 / 이력 조회</a:t>
+            </a:r>
+          </a:p>
+          <a:p>
+            <a:pPr>
+              <a:spcBef>
+                <a:spcPts val="300"/>
+              </a:spcBef>
+              <a:defRPr sz="950">
+                <a:solidFill>
+                  <a:srgbClr val="334155"/>
+                </a:solidFill>
+              </a:defRPr>
+            </a:pPr>
+            <a:r>
+              <a:t>• 다양한 형식(텍스트, 이미지 PDP, Word, PDF) 심의 지원</a:t>
+            </a:r>
+          </a:p>
+          <a:p>
+            <a:pPr>
+              <a:spcBef>
+                <a:spcPts val="300"/>
+              </a:spcBef>
+              <a:defRPr sz="950">
+                <a:solidFill>
+                  <a:srgbClr val="334155"/>
+                </a:solidFill>
+              </a:defRPr>
+            </a:pPr>
+            <a:r>
+              <a:t>• 마케팅-RA 담당자 간 양방향 피드백 및 결재 연동</a:t>
+            </a:r>
+          </a:p>
+        </p:txBody>
+      </p:sp>
+      <p:sp>
+        <p:nvSpPr>
+          <p:cNvPr id="12" name="Rounded Rectangle 11"/>
+          <p:cNvSpPr/>
+          <p:nvPr/>
+        </p:nvSpPr>
+        <p:spPr>
+          <a:xfrm>
+            <a:off x="6172200" y="1371600"/>
+            <a:ext cx="5257800" cy="2194560"/>
+          </a:xfrm>
+          <a:prstGeom prst="roundRect">
+            <a:avLst/>
+          </a:prstGeom>
+          <a:solidFill>
+            <a:srgbClr val="FFFFFF"/>
+          </a:solidFill>
+          <a:ln w="19050">
+            <a:solidFill>
+              <a:srgbClr val="0F172A"/>
+            </a:solidFill>
+          </a:ln>
+        </p:spPr>
+        <p:style>
+          <a:lnRef idx="1">
+            <a:schemeClr val="accent1"/>
+          </a:lnRef>
+          <a:fillRef idx="3">
+            <a:schemeClr val="accent1"/>
+          </a:fillRef>
+          <a:effectRef idx="2">
+            <a:schemeClr val="accent1"/>
+          </a:effectRef>
+          <a:fontRef idx="minor">
+            <a:schemeClr val="lt1"/>
+          </a:fontRef>
+        </p:style>
+        <p:txBody>
+          <a:bodyPr rtlCol="0" anchor="ctr"/>
+          <a:lstStyle/>
+          <a:p>
+            <a:pPr algn="ctr"/>
+          </a:p>
+        </p:txBody>
+      </p:sp>
+      <p:sp>
+        <p:nvSpPr>
+          <p:cNvPr id="13" name="TextBox 12"/>
+          <p:cNvSpPr txBox="1"/>
+          <p:nvPr/>
+        </p:nvSpPr>
+        <p:spPr>
+          <a:xfrm>
+            <a:off x="6355080" y="1508760"/>
+            <a:ext cx="4892040" cy="1920240"/>
+          </a:xfrm>
+          <a:prstGeom prst="rect">
+            <a:avLst/>
+          </a:prstGeom>
+          <a:noFill/>
+        </p:spPr>
+        <p:txBody>
+          <a:bodyPr wrap="square">
+            <a:spAutoFit/>
+          </a:bodyPr>
+          <a:lstStyle/>
+          <a:p>
+            <a:pPr>
+              <a:defRPr b="1" sz="1100">
+                <a:solidFill>
+                  <a:srgbClr val="0F172A"/>
+                </a:solidFill>
+              </a:defRPr>
+            </a:pPr>
+            <a:r>
+              <a:t>2. 다단계 AI 판정 파이프라인</a:t>
+            </a:r>
+          </a:p>
+          <a:p>
+            <a:pPr>
+              <a:spcBef>
+                <a:spcPts val="300"/>
+              </a:spcBef>
+              <a:defRPr sz="950">
+                <a:solidFill>
+                  <a:srgbClr val="334155"/>
+                </a:solidFill>
+              </a:defRPr>
+            </a:pPr>
+            <a:r>
+              <a:t>• 1단계: 키워드/정규식 기반 사전 필터 (100개 룰셋)</a:t>
+            </a:r>
+          </a:p>
+          <a:p>
+            <a:pPr>
+              <a:spcBef>
+                <a:spcPts val="300"/>
+              </a:spcBef>
+              <a:defRPr sz="950">
+                <a:solidFill>
+                  <a:srgbClr val="334155"/>
+                </a:solidFill>
+              </a:defRPr>
+            </a:pPr>
+            <a:r>
+              <a:t>• 2단계: Vector DB 기반 법령/가이드라인 RAG 검색</a:t>
+            </a:r>
+          </a:p>
+          <a:p>
+            <a:pPr>
+              <a:spcBef>
+                <a:spcPts val="300"/>
+              </a:spcBef>
+              <a:defRPr sz="950">
+                <a:solidFill>
+                  <a:srgbClr val="334155"/>
+                </a:solidFill>
+              </a:defRPr>
+            </a:pPr>
+            <a:r>
+              <a:t>• 3단계: LLM 심층 문맥 분석 및 4단계 판정(녹/청/황/적)</a:t>
+            </a:r>
+          </a:p>
+          <a:p>
+            <a:pPr>
+              <a:spcBef>
+                <a:spcPts val="300"/>
+              </a:spcBef>
+              <a:defRPr sz="950">
+                <a:solidFill>
+                  <a:srgbClr val="334155"/>
+                </a:solidFill>
+              </a:defRPr>
+            </a:pPr>
+            <a:r>
+              <a:t>• Vision OCR 기반 이미지 상세페이지 텍스트 자동 추출</a:t>
+            </a:r>
+          </a:p>
+        </p:txBody>
+      </p:sp>
+      <p:sp>
+        <p:nvSpPr>
+          <p:cNvPr id="14" name="Rounded Rectangle 13"/>
+          <p:cNvSpPr/>
+          <p:nvPr/>
+        </p:nvSpPr>
+        <p:spPr>
+          <a:xfrm>
+            <a:off x="731520" y="3749039"/>
+            <a:ext cx="5257800" cy="2194560"/>
+          </a:xfrm>
+          <a:prstGeom prst="roundRect">
+            <a:avLst/>
+          </a:prstGeom>
+          <a:solidFill>
+            <a:srgbClr val="FFFFFF"/>
+          </a:solidFill>
+          <a:ln w="19050">
+            <a:solidFill>
+              <a:srgbClr val="059669"/>
+            </a:solidFill>
+          </a:ln>
+        </p:spPr>
+        <p:style>
+          <a:lnRef idx="1">
+            <a:schemeClr val="accent1"/>
+          </a:lnRef>
+          <a:fillRef idx="3">
+            <a:schemeClr val="accent1"/>
+          </a:fillRef>
+          <a:effectRef idx="2">
+            <a:schemeClr val="accent1"/>
+          </a:effectRef>
+          <a:fontRef idx="minor">
+            <a:schemeClr val="lt1"/>
+          </a:fontRef>
+        </p:style>
+        <p:txBody>
+          <a:bodyPr rtlCol="0" anchor="ctr"/>
+          <a:lstStyle/>
+          <a:p>
+            <a:pPr algn="ctr"/>
+          </a:p>
+        </p:txBody>
+      </p:sp>
+      <p:sp>
+        <p:nvSpPr>
+          <p:cNvPr id="15" name="TextBox 14"/>
+          <p:cNvSpPr txBox="1"/>
+          <p:nvPr/>
+        </p:nvSpPr>
+        <p:spPr>
+          <a:xfrm>
+            <a:off x="914400" y="3886199"/>
+            <a:ext cx="4892040" cy="1920240"/>
+          </a:xfrm>
+          <a:prstGeom prst="rect">
+            <a:avLst/>
+          </a:prstGeom>
+          <a:noFill/>
+        </p:spPr>
+        <p:txBody>
+          <a:bodyPr wrap="square">
+            <a:spAutoFit/>
+          </a:bodyPr>
+          <a:lstStyle/>
+          <a:p>
+            <a:pPr>
+              <a:defRPr b="1" sz="1100">
+                <a:solidFill>
+                  <a:srgbClr val="059669"/>
+                </a:solidFill>
+              </a:defRPr>
+            </a:pPr>
+            <a:r>
+              <a:t>3. 전사 시스템 연계 허브</a:t>
+            </a:r>
+          </a:p>
+          <a:p>
+            <a:pPr>
+              <a:spcBef>
+                <a:spcPts val="300"/>
+              </a:spcBef>
+              <a:defRPr sz="950">
+                <a:solidFill>
+                  <a:srgbClr val="334155"/>
+                </a:solidFill>
+              </a:defRPr>
+            </a:pPr>
+            <a:r>
+              <a:t>• ProductLab 원료/배합 규격 REST API 실시간 연동</a:t>
+            </a:r>
+          </a:p>
+          <a:p>
+            <a:pPr>
+              <a:spcBef>
+                <a:spcPts val="300"/>
+              </a:spcBef>
+              <a:defRPr sz="950">
+                <a:solidFill>
+                  <a:srgbClr val="334155"/>
+                </a:solidFill>
+              </a:defRPr>
+            </a:pPr>
+            <a:r>
+              <a:t>• MarketingHub 전사 결재 및 심의 이력 동기화</a:t>
+            </a:r>
+          </a:p>
+          <a:p>
+            <a:pPr>
+              <a:spcBef>
+                <a:spcPts val="300"/>
+              </a:spcBef>
+              <a:defRPr sz="950">
+                <a:solidFill>
+                  <a:srgbClr val="334155"/>
+                </a:solidFill>
+              </a:defRPr>
+            </a:pPr>
+            <a:r>
+              <a:t>• 사내 통합 사번 SSO 로그인 (JWT 토큰 기반)</a:t>
+            </a:r>
+          </a:p>
+          <a:p>
+            <a:pPr>
+              <a:spcBef>
+                <a:spcPts val="300"/>
+              </a:spcBef>
+              <a:defRPr sz="950">
+                <a:solidFill>
+                  <a:srgbClr val="334155"/>
+                </a:solidFill>
+              </a:defRPr>
+            </a:pPr>
+            <a:r>
+              <a:t>• KT 비즈 알림톡/SMS 심의 결과 즉시 통보</a:t>
+            </a:r>
+          </a:p>
+        </p:txBody>
+      </p:sp>
+      <p:sp>
+        <p:nvSpPr>
+          <p:cNvPr id="16" name="Rounded Rectangle 15"/>
+          <p:cNvSpPr/>
+          <p:nvPr/>
+        </p:nvSpPr>
+        <p:spPr>
+          <a:xfrm>
+            <a:off x="6172200" y="3749039"/>
+            <a:ext cx="5257800" cy="2194560"/>
+          </a:xfrm>
+          <a:prstGeom prst="roundRect">
+            <a:avLst/>
+          </a:prstGeom>
+          <a:solidFill>
+            <a:srgbClr val="FFFFFF"/>
+          </a:solidFill>
+          <a:ln w="19050">
+            <a:solidFill>
+              <a:srgbClr val="7C3AED"/>
+            </a:solidFill>
+          </a:ln>
+        </p:spPr>
+        <p:style>
+          <a:lnRef idx="1">
+            <a:schemeClr val="accent1"/>
+          </a:lnRef>
+          <a:fillRef idx="3">
+            <a:schemeClr val="accent1"/>
+          </a:fillRef>
+          <a:effectRef idx="2">
+            <a:schemeClr val="accent1"/>
+          </a:effectRef>
+          <a:fontRef idx="minor">
+            <a:schemeClr val="lt1"/>
+          </a:fontRef>
+        </p:style>
+        <p:txBody>
+          <a:bodyPr rtlCol="0" anchor="ctr"/>
+          <a:lstStyle/>
+          <a:p>
+            <a:pPr algn="ctr"/>
+          </a:p>
+        </p:txBody>
+      </p:sp>
+      <p:sp>
+        <p:nvSpPr>
+          <p:cNvPr id="17" name="TextBox 16"/>
+          <p:cNvSpPr txBox="1"/>
+          <p:nvPr/>
+        </p:nvSpPr>
+        <p:spPr>
+          <a:xfrm>
+            <a:off x="6355080" y="3886199"/>
+            <a:ext cx="4892040" cy="1920240"/>
+          </a:xfrm>
+          <a:prstGeom prst="rect">
+            <a:avLst/>
+          </a:prstGeom>
+          <a:noFill/>
+        </p:spPr>
+        <p:txBody>
+          <a:bodyPr wrap="square">
+            <a:spAutoFit/>
+          </a:bodyPr>
+          <a:lstStyle/>
+          <a:p>
+            <a:pPr>
+              <a:defRPr b="1" sz="1100">
+                <a:solidFill>
+                  <a:srgbClr val="7C3AED"/>
+                </a:solidFill>
+              </a:defRPr>
+            </a:pPr>
+            <a:r>
+              <a:t>4. 지식·규칙 관리 및 거버넌스</a:t>
+            </a:r>
+          </a:p>
+          <a:p>
+            <a:pPr>
+              <a:spcBef>
+                <a:spcPts val="300"/>
+              </a:spcBef>
+              <a:defRPr sz="950">
+                <a:solidFill>
+                  <a:srgbClr val="334155"/>
+                </a:solidFill>
+              </a:defRPr>
+            </a:pPr>
+            <a:r>
+              <a:t>• 식약처 제품 표시·광고 관리지침 DB화</a:t>
+            </a:r>
+          </a:p>
+          <a:p>
+            <a:pPr>
+              <a:spcBef>
+                <a:spcPts val="300"/>
+              </a:spcBef>
+              <a:defRPr sz="950">
+                <a:solidFill>
+                  <a:srgbClr val="334155"/>
+                </a:solidFill>
+              </a:defRPr>
+            </a:pPr>
+            <a:r>
+              <a:t>• 자주 적발되는 허위·과대광고 사례 사전 탑재</a:t>
+            </a:r>
+          </a:p>
+          <a:p>
+            <a:pPr>
+              <a:spcBef>
+                <a:spcPts val="300"/>
+              </a:spcBef>
+              <a:defRPr sz="950">
+                <a:solidFill>
+                  <a:srgbClr val="334155"/>
+                </a:solidFill>
+              </a:defRPr>
+            </a:pPr>
+            <a:r>
+              <a:t>• 대체 추천 문구 100종 데이터베이스 탑재</a:t>
+            </a:r>
+          </a:p>
+          <a:p>
+            <a:pPr>
+              <a:spcBef>
+                <a:spcPts val="300"/>
+              </a:spcBef>
+              <a:defRPr sz="950">
+                <a:solidFill>
+                  <a:srgbClr val="334155"/>
+                </a:solidFill>
+              </a:defRPr>
+            </a:pPr>
+            <a:r>
+              <a:t>• 지속적 규칙 추가 및 예외 단어 관리 콘솔 제공</a:t>
+            </a:r>
+          </a:p>
+        </p:txBody>
+      </p:sp>
+    </p:spTree>
+  </p:cSld>
+  <p:clrMapOvr>
+    <a:masterClrMapping/>
+  </p:clrMapOvr>
+</p:sld>
+</file>
+
+<file path=ppt/slides/slide4.xml><?xml version="1.0" encoding="utf-8"?>
+<p:sld xmlns:a="http://schemas.openxmlformats.org/drawingml/2006/main" xmlns:p="http://schemas.openxmlformats.org/presentationml/2006/main" xmlns:r="http://schemas.openxmlformats.org/officeDocument/2006/relationships">
+  <p:cSld>
+    <p:spTree>
+      <p:nvGrpSpPr>
+        <p:cNvPr id="1" name=""/>
+        <p:cNvGrpSpPr/>
+        <p:nvPr/>
+      </p:nvGrpSpPr>
+      <p:grpSpPr/>
+      <p:sp>
+        <p:nvSpPr>
+          <p:cNvPr id="2" name="Rectangle 1"/>
+          <p:cNvSpPr/>
+          <p:nvPr/>
+        </p:nvSpPr>
+        <p:spPr>
+          <a:xfrm>
+            <a:off x="0" y="0"/>
+            <a:ext cx="12191695" cy="1005840"/>
+          </a:xfrm>
+          <a:prstGeom prst="rect">
+            <a:avLst/>
+          </a:prstGeom>
+          <a:solidFill>
+            <a:srgbClr val="FFFFFF"/>
+          </a:solidFill>
+          <a:ln w="12700">
+            <a:solidFill>
+              <a:srgbClr val="E2E8F0"/>
+            </a:solidFill>
+          </a:ln>
+        </p:spPr>
+        <p:style>
+          <a:lnRef idx="1">
+            <a:schemeClr val="accent1"/>
+          </a:lnRef>
+          <a:fillRef idx="3">
+            <a:schemeClr val="accent1"/>
+          </a:fillRef>
+          <a:effectRef idx="2">
+            <a:schemeClr val="accent1"/>
+          </a:effectRef>
+          <a:fontRef idx="minor">
+            <a:schemeClr val="lt1"/>
+          </a:fontRef>
+        </p:style>
+        <p:txBody>
+          <a:bodyPr rtlCol="0" anchor="ctr"/>
+          <a:lstStyle/>
+          <a:p>
+            <a:pPr algn="ctr"/>
+          </a:p>
+        </p:txBody>
+      </p:sp>
+      <p:sp>
+        <p:nvSpPr>
+          <p:cNvPr id="3" name="TextBox 2"/>
+          <p:cNvSpPr txBox="1"/>
+          <p:nvPr/>
+        </p:nvSpPr>
+        <p:spPr>
+          <a:xfrm>
+            <a:off x="731520" y="164592"/>
+            <a:ext cx="6400800" cy="274320"/>
+          </a:xfrm>
+          <a:prstGeom prst="rect">
+            <a:avLst/>
+          </a:prstGeom>
+          <a:noFill/>
+        </p:spPr>
+        <p:txBody>
+          <a:bodyPr wrap="none">
+            <a:spAutoFit/>
+          </a:bodyPr>
+          <a:lstStyle/>
+          <a:p>
+            <a:pPr>
+              <a:defRPr sz="1000" b="1">
+                <a:solidFill>
+                  <a:srgbClr val="2563EB"/>
+                </a:solidFill>
+              </a:defRPr>
+            </a:pPr>
+            <a:r>
+              <a:t>SyncGuard AI 사업 완료보고서  &gt;  3. AI 모델 검증</a:t>
+            </a:r>
+          </a:p>
+        </p:txBody>
+      </p:sp>
+      <p:sp>
+        <p:nvSpPr>
+          <p:cNvPr id="4" name="TextBox 3"/>
+          <p:cNvSpPr txBox="1"/>
+          <p:nvPr/>
+        </p:nvSpPr>
+        <p:spPr>
+          <a:xfrm>
+            <a:off x="731520" y="411480"/>
+            <a:ext cx="7772400" cy="502920"/>
+          </a:xfrm>
+          <a:prstGeom prst="rect">
+            <a:avLst/>
+          </a:prstGeom>
+          <a:noFill/>
+        </p:spPr>
+        <p:txBody>
+          <a:bodyPr wrap="none">
+            <a:spAutoFit/>
+          </a:bodyPr>
+          <a:lstStyle/>
+          <a:p>
+            <a:pPr>
+              <a:defRPr sz="1800" b="1">
+                <a:solidFill>
+                  <a:srgbClr val="0F172A"/>
+                </a:solidFill>
+              </a:defRPr>
+            </a:pPr>
+            <a:r>
+              <a:t>3.1 골든셋 50문항 평가 결과 및 AI 정밀도 분석</a:t>
+            </a:r>
+          </a:p>
+        </p:txBody>
+      </p:sp>
+      <p:sp>
+        <p:nvSpPr>
+          <p:cNvPr id="5" name="TextBox 4"/>
+          <p:cNvSpPr txBox="1"/>
+          <p:nvPr/>
+        </p:nvSpPr>
+        <p:spPr>
+          <a:xfrm>
+            <a:off x="8229600" y="228600"/>
+            <a:ext cx="3200400" cy="548640"/>
+          </a:xfrm>
+          <a:prstGeom prst="rect">
+            <a:avLst/>
+          </a:prstGeom>
+          <a:noFill/>
+        </p:spPr>
+        <p:txBody>
+          <a:bodyPr wrap="none">
+            <a:spAutoFit/>
+          </a:bodyPr>
+          <a:lstStyle/>
+          <a:p>
+            <a:pPr algn="r">
+              <a:defRPr sz="1000" b="1">
+                <a:solidFill>
+                  <a:srgbClr val="1E293B"/>
+                </a:solidFill>
+              </a:defRPr>
+            </a:pPr>
+            <a:r>
+              <a:t>산출물 ID: EMP_IMP_080 | v1.0</a:t>
+            </a:r>
+          </a:p>
+        </p:txBody>
+      </p:sp>
+      <p:sp>
+        <p:nvSpPr>
+          <p:cNvPr id="6" name="Rectangle 5"/>
+          <p:cNvSpPr/>
+          <p:nvPr/>
+        </p:nvSpPr>
+        <p:spPr>
+          <a:xfrm>
+            <a:off x="0" y="6309360"/>
+            <a:ext cx="12191695" cy="548640"/>
+          </a:xfrm>
+          <a:prstGeom prst="rect">
+            <a:avLst/>
+          </a:prstGeom>
+          <a:solidFill>
+            <a:srgbClr val="F8FAFC"/>
+          </a:solidFill>
+          <a:ln w="12700">
+            <a:solidFill>
+              <a:srgbClr val="E2E8F0"/>
+            </a:solidFill>
+          </a:ln>
+        </p:spPr>
+        <p:style>
+          <a:lnRef idx="1">
+            <a:schemeClr val="accent1"/>
+          </a:lnRef>
+          <a:fillRef idx="3">
+            <a:schemeClr val="accent1"/>
+          </a:fillRef>
+          <a:effectRef idx="2">
+            <a:schemeClr val="accent1"/>
+          </a:effectRef>
+          <a:fontRef idx="minor">
+            <a:schemeClr val="lt1"/>
+          </a:fontRef>
+        </p:style>
+        <p:txBody>
+          <a:bodyPr rtlCol="0" anchor="ctr"/>
+          <a:lstStyle/>
+          <a:p>
+            <a:pPr algn="ctr"/>
+          </a:p>
+        </p:txBody>
+      </p:sp>
+      <p:sp>
+        <p:nvSpPr>
+          <p:cNvPr id="7" name="TextBox 6"/>
+          <p:cNvSpPr txBox="1"/>
+          <p:nvPr/>
+        </p:nvSpPr>
+        <p:spPr>
+          <a:xfrm>
+            <a:off x="731520" y="6355080"/>
+            <a:ext cx="5029200" cy="365760"/>
+          </a:xfrm>
+          <a:prstGeom prst="rect">
+            <a:avLst/>
+          </a:prstGeom>
+          <a:noFill/>
+        </p:spPr>
+        <p:txBody>
+          <a:bodyPr wrap="none">
+            <a:spAutoFit/>
+          </a:bodyPr>
+          <a:lstStyle/>
+          <a:p>
+            <a:pPr>
+              <a:defRPr sz="900">
+                <a:solidFill>
+                  <a:srgbClr val="64748B"/>
+                </a:solidFill>
+              </a:defRPr>
+            </a:pPr>
+            <a:r>
+              <a:t>SyncGuard AI | 프로젝트 최종 완수 및 검수 요청 종료보고서</a:t>
+            </a:r>
+          </a:p>
+        </p:txBody>
+      </p:sp>
+      <p:sp>
+        <p:nvSpPr>
+          <p:cNvPr id="8" name="TextBox 7"/>
+          <p:cNvSpPr txBox="1"/>
+          <p:nvPr/>
+        </p:nvSpPr>
+        <p:spPr>
+          <a:xfrm>
+            <a:off x="5486400" y="6355080"/>
+            <a:ext cx="1371600" cy="365760"/>
+          </a:xfrm>
+          <a:prstGeom prst="rect">
+            <a:avLst/>
+          </a:prstGeom>
+          <a:noFill/>
+        </p:spPr>
+        <p:txBody>
+          <a:bodyPr wrap="none">
+            <a:spAutoFit/>
+          </a:bodyPr>
+          <a:lstStyle/>
+          <a:p>
+            <a:pPr algn="ctr">
+              <a:defRPr sz="1000" b="1"/>
+            </a:pPr>
+            <a:r>
+              <a:t>4 / 8</a:t>
+            </a:r>
+          </a:p>
+        </p:txBody>
+      </p:sp>
+      <p:sp>
+        <p:nvSpPr>
+          <p:cNvPr id="9" name="TextBox 8"/>
+          <p:cNvSpPr txBox="1"/>
+          <p:nvPr/>
+        </p:nvSpPr>
+        <p:spPr>
+          <a:xfrm>
+            <a:off x="7315200" y="6355080"/>
+            <a:ext cx="4114800" cy="365760"/>
+          </a:xfrm>
+          <a:prstGeom prst="rect">
+            <a:avLst/>
+          </a:prstGeom>
+          <a:noFill/>
+        </p:spPr>
+        <p:txBody>
+          <a:bodyPr wrap="none">
+            <a:spAutoFit/>
+          </a:bodyPr>
+          <a:lstStyle/>
+          <a:p>
+            <a:pPr algn="r">
+              <a:defRPr sz="900" b="1">
+                <a:solidFill>
+                  <a:srgbClr val="2563EB"/>
+                </a:solidFill>
+              </a:defRPr>
+            </a:pPr>
+            <a:r>
+              <a:t>발주사: HANBIT GLOBAL   |   수행사: ㈜엠파시 (Empasy Inc.)</a:t>
             </a:r>
           </a:p>
         </p:txBody>
       </p:sp>
       <p:graphicFrame>
         <p:nvGraphicFramePr>
-          <p:cNvPr id="4" name="Table 3"/>
+          <p:cNvPr id="10" name="Table 9"/>
           <p:cNvGraphicFramePr>
             <a:graphicFrameLocks noGrp="1"/>
           </p:cNvGraphicFramePr>
           <p:nvPr/>
         </p:nvGraphicFramePr>
         <p:xfrm>
-          <a:off x="914400" y="1645920"/>
-          <a:ext cx="10362895" cy="4389120"/>
+          <a:off x="731520" y="1371600"/>
+          <a:ext cx="10728655" cy="2103120"/>
         </p:xfrm>
         <a:graphic>
           <a:graphicData uri="http://schemas.openxmlformats.org/drawingml/2006/table">
@@ -3533,31 +5440,33 @@
                 <a:tableStyleId>{5C22544A-7EE6-4342-B048-85BDC9FD1C3A}</a:tableStyleId>
               </a:tblPr>
               <a:tblGrid>
-                <a:gridCol w="2590723"/>
-                <a:gridCol w="2590723"/>
-                <a:gridCol w="2590723"/>
-                <a:gridCol w="2590726"/>
+                <a:gridCol w="2286000"/>
+                <a:gridCol w="2011680"/>
+                <a:gridCol w="2011680"/>
+                <a:gridCol w="2011680"/>
+                <a:gridCol w="2407615"/>
               </a:tblGrid>
-              <a:tr h="731520">
+              <a:tr h="350520">
                 <a:tc>
                   <a:txBody>
                     <a:bodyPr/>
                     <a:lstStyle/>
                     <a:p>
-                      <a:r>
-                        <a:rPr sz="1100" b="1">
+                      <a:pPr algn="ctr">
+                        <a:defRPr b="1" sz="1000">
                           <a:solidFill>
                             <a:srgbClr val="FFFFFF"/>
                           </a:solidFill>
-                          <a:latin typeface="Malgun Gothic"/>
-                        </a:rPr>
-                        <a:t>산출물 분류</a:t>
+                        </a:defRPr>
+                      </a:pPr>
+                      <a:r>
+                        <a:t>평가 지표 (Metric)</a:t>
                       </a:r>
                     </a:p>
                   </a:txBody>
                   <a:tcPr>
                     <a:solidFill>
-                      <a:srgbClr val="1E293B"/>
+                      <a:srgbClr val="0F172A"/>
                     </a:solidFill>
                   </a:tcPr>
                 </a:tc>
@@ -3566,20 +5475,21 @@
                     <a:bodyPr/>
                     <a:lstStyle/>
                     <a:p>
-                      <a:r>
-                        <a:rPr sz="1100" b="1">
+                      <a:pPr algn="ctr">
+                        <a:defRPr b="1" sz="1000">
                           <a:solidFill>
                             <a:srgbClr val="FFFFFF"/>
                           </a:solidFill>
-                          <a:latin typeface="Malgun Gothic"/>
-                        </a:rPr>
-                        <a:t>세부 산출물 명칭</a:t>
+                        </a:defRPr>
+                      </a:pPr>
+                      <a:r>
+                        <a:t>계약 목표치</a:t>
                       </a:r>
                     </a:p>
                   </a:txBody>
                   <a:tcPr>
                     <a:solidFill>
-                      <a:srgbClr val="1E293B"/>
+                      <a:srgbClr val="0F172A"/>
                     </a:solidFill>
                   </a:tcPr>
                 </a:tc>
@@ -3588,20 +5498,21 @@
                     <a:bodyPr/>
                     <a:lstStyle/>
                     <a:p>
-                      <a:r>
-                        <a:rPr sz="1100" b="1">
+                      <a:pPr algn="ctr">
+                        <a:defRPr b="1" sz="1000">
                           <a:solidFill>
                             <a:srgbClr val="FFFFFF"/>
                           </a:solidFill>
-                          <a:latin typeface="Malgun Gothic"/>
-                        </a:rPr>
-                        <a:t>제출 형식</a:t>
+                        </a:defRPr>
+                      </a:pPr>
+                      <a:r>
+                        <a:t>공식 실측치</a:t>
                       </a:r>
                     </a:p>
                   </a:txBody>
                   <a:tcPr>
                     <a:solidFill>
-                      <a:srgbClr val="1E293B"/>
+                      <a:srgbClr val="0F172A"/>
                     </a:solidFill>
                   </a:tcPr>
                 </a:tc>
@@ -3610,44 +5521,21 @@
                     <a:bodyPr/>
                     <a:lstStyle/>
                     <a:p>
-                      <a:r>
-                        <a:rPr sz="1100" b="1">
+                      <a:pPr algn="ctr">
+                        <a:defRPr b="1" sz="1000">
                           <a:solidFill>
                             <a:srgbClr val="FFFFFF"/>
                           </a:solidFill>
-                          <a:latin typeface="Malgun Gothic"/>
-                        </a:rPr>
-                        <a:t>검수 결과</a:t>
+                        </a:defRPr>
+                      </a:pPr>
+                      <a:r>
+                        <a:t>목표 대비 달성도</a:t>
                       </a:r>
                     </a:p>
                   </a:txBody>
                   <a:tcPr>
                     <a:solidFill>
-                      <a:srgbClr val="1E293B"/>
-                    </a:solidFill>
-                  </a:tcPr>
-                </a:tc>
-              </a:tr>
-              <a:tr h="731520">
-                <a:tc>
-                  <a:txBody>
-                    <a:bodyPr/>
-                    <a:lstStyle/>
-                    <a:p>
-                      <a:r>
-                        <a:rPr sz="1100">
-                          <a:solidFill>
-                            <a:srgbClr val="334155"/>
-                          </a:solidFill>
-                          <a:latin typeface="Malgun Gothic"/>
-                        </a:rPr>
-                        <a:t>관리 산출물</a:t>
-                      </a:r>
-                    </a:p>
-                  </a:txBody>
-                  <a:tcPr>
-                    <a:solidFill>
-                      <a:srgbClr val="F8FAFC"/>
+                      <a:srgbClr val="0F172A"/>
                     </a:solidFill>
                   </a:tcPr>
                 </a:tc>
@@ -3656,82 +5544,40 @@
                     <a:bodyPr/>
                     <a:lstStyle/>
                     <a:p>
+                      <a:pPr algn="ctr">
+                        <a:defRPr b="1" sz="1000">
+                          <a:solidFill>
+                            <a:srgbClr val="FFFFFF"/>
+                          </a:solidFill>
+                        </a:defRPr>
+                      </a:pPr>
                       <a:r>
-                        <a:rPr sz="1100">
-                          <a:solidFill>
-                            <a:srgbClr val="334155"/>
-                          </a:solidFill>
-                          <a:latin typeface="Malgun Gothic"/>
-                        </a:rPr>
-                        <a:t>사업수행계획서, 착수계, 주간/월간보고서, 완료보고서</a:t>
+                        <a:t>판정 결과</a:t>
                       </a:r>
                     </a:p>
                   </a:txBody>
                   <a:tcPr>
                     <a:solidFill>
-                      <a:srgbClr val="F8FAFC"/>
+                      <a:srgbClr val="0F172A"/>
                     </a:solidFill>
                   </a:tcPr>
                 </a:tc>
+              </a:tr>
+              <a:tr h="350520">
                 <a:tc>
                   <a:txBody>
                     <a:bodyPr/>
                     <a:lstStyle/>
                     <a:p>
-                      <a:r>
-                        <a:rPr sz="1100">
+                      <a:pPr>
+                        <a:defRPr sz="950">
                           <a:solidFill>
                             <a:srgbClr val="334155"/>
                           </a:solidFill>
-                          <a:latin typeface="Malgun Gothic"/>
-                        </a:rPr>
-                        <a:t>전자문서(PDF)</a:t>
-                      </a:r>
-                    </a:p>
-                  </a:txBody>
-                  <a:tcPr>
-                    <a:solidFill>
-                      <a:srgbClr val="F8FAFC"/>
-                    </a:solidFill>
-                  </a:tcPr>
-                </a:tc>
-                <a:tc>
-                  <a:txBody>
-                    <a:bodyPr/>
-                    <a:lstStyle/>
-                    <a:p>
+                        </a:defRPr>
+                      </a:pPr>
                       <a:r>
-                        <a:rPr sz="1100">
-                          <a:solidFill>
-                            <a:srgbClr val="334155"/>
-                          </a:solidFill>
-                          <a:latin typeface="Malgun Gothic"/>
-                        </a:rPr>
-                        <a:t>합격 (적격)</a:t>
-                      </a:r>
-                    </a:p>
-                  </a:txBody>
-                  <a:tcPr>
-                    <a:solidFill>
-                      <a:srgbClr val="F8FAFC"/>
-                    </a:solidFill>
-                  </a:tcPr>
-                </a:tc>
-              </a:tr>
-              <a:tr h="731520">
-                <a:tc>
-                  <a:txBody>
-                    <a:bodyPr/>
-                    <a:lstStyle/>
-                    <a:p>
-                      <a:r>
-                        <a:rPr sz="1100">
-                          <a:solidFill>
-                            <a:srgbClr val="334155"/>
-                          </a:solidFill>
-                          <a:latin typeface="Malgun Gothic"/>
-                        </a:rPr>
-                        <a:t>설계 산출물</a:t>
+                        <a:t>정밀도 (Precision)</a:t>
                       </a:r>
                     </a:p>
                   </a:txBody>
@@ -3746,14 +5592,15 @@
                     <a:bodyPr/>
                     <a:lstStyle/>
                     <a:p>
-                      <a:r>
-                        <a:rPr sz="1100">
+                      <a:pPr algn="ctr">
+                        <a:defRPr sz="950">
                           <a:solidFill>
                             <a:srgbClr val="334155"/>
                           </a:solidFill>
-                          <a:latin typeface="Malgun Gothic"/>
-                        </a:rPr>
-                        <a:t>요구사항정의서(SRS), RTM, 화면설계서, ERD, API명세</a:t>
+                        </a:defRPr>
+                      </a:pPr>
+                      <a:r>
+                        <a:t>90.0% 이상</a:t>
                       </a:r>
                     </a:p>
                   </a:txBody>
@@ -3768,14 +5615,15 @@
                     <a:bodyPr/>
                     <a:lstStyle/>
                     <a:p>
+                      <a:pPr algn="ctr">
+                        <a:defRPr sz="950" b="1">
+                          <a:solidFill>
+                            <a:srgbClr val="2563EB"/>
+                          </a:solidFill>
+                        </a:defRPr>
+                      </a:pPr>
                       <a:r>
-                        <a:rPr sz="1100">
-                          <a:solidFill>
-                            <a:srgbClr val="334155"/>
-                          </a:solidFill>
-                          <a:latin typeface="Malgun Gothic"/>
-                        </a:rPr>
-                        <a:t>전자문서/웹</a:t>
+                        <a:t>96.2%</a:t>
                       </a:r>
                     </a:p>
                   </a:txBody>
@@ -3790,128 +5638,15 @@
                     <a:bodyPr/>
                     <a:lstStyle/>
                     <a:p>
-                      <a:r>
-                        <a:rPr sz="1100">
+                      <a:pPr algn="ctr">
+                        <a:defRPr sz="950">
                           <a:solidFill>
                             <a:srgbClr val="334155"/>
                           </a:solidFill>
-                          <a:latin typeface="Malgun Gothic"/>
-                        </a:rPr>
-                        <a:t>합격 (적격)</a:t>
-                      </a:r>
-                    </a:p>
-                  </a:txBody>
-                  <a:tcPr>
-                    <a:solidFill>
-                      <a:srgbClr val="FFFFFF"/>
-                    </a:solidFill>
-                  </a:tcPr>
-                </a:tc>
-              </a:tr>
-              <a:tr h="731520">
-                <a:tc>
-                  <a:txBody>
-                    <a:bodyPr/>
-                    <a:lstStyle/>
-                    <a:p>
+                        </a:defRPr>
+                      </a:pPr>
                       <a:r>
-                        <a:rPr sz="1100">
-                          <a:solidFill>
-                            <a:srgbClr val="334155"/>
-                          </a:solidFill>
-                          <a:latin typeface="Malgun Gothic"/>
-                        </a:rPr>
-                        <a:t>소스 코드</a:t>
-                      </a:r>
-                    </a:p>
-                  </a:txBody>
-                  <a:tcPr>
-                    <a:solidFill>
-                      <a:srgbClr val="F8FAFC"/>
-                    </a:solidFill>
-                  </a:tcPr>
-                </a:tc>
-                <a:tc>
-                  <a:txBody>
-                    <a:bodyPr/>
-                    <a:lstStyle/>
-                    <a:p>
-                      <a:r>
-                        <a:rPr sz="1100">
-                          <a:solidFill>
-                            <a:srgbClr val="334155"/>
-                          </a:solidFill>
-                          <a:latin typeface="Malgun Gothic"/>
-                        </a:rPr>
-                        <a:t>백엔드(Java/Spring), 프론트(Vue 3), DB 스크립트</a:t>
-                      </a:r>
-                    </a:p>
-                  </a:txBody>
-                  <a:tcPr>
-                    <a:solidFill>
-                      <a:srgbClr val="F8FAFC"/>
-                    </a:solidFill>
-                  </a:tcPr>
-                </a:tc>
-                <a:tc>
-                  <a:txBody>
-                    <a:bodyPr/>
-                    <a:lstStyle/>
-                    <a:p>
-                      <a:r>
-                        <a:rPr sz="1100">
-                          <a:solidFill>
-                            <a:srgbClr val="334155"/>
-                          </a:solidFill>
-                          <a:latin typeface="Malgun Gothic"/>
-                        </a:rPr>
-                        <a:t>Git 저장소/USB</a:t>
-                      </a:r>
-                    </a:p>
-                  </a:txBody>
-                  <a:tcPr>
-                    <a:solidFill>
-                      <a:srgbClr val="F8FAFC"/>
-                    </a:solidFill>
-                  </a:tcPr>
-                </a:tc>
-                <a:tc>
-                  <a:txBody>
-                    <a:bodyPr/>
-                    <a:lstStyle/>
-                    <a:p>
-                      <a:r>
-                        <a:rPr sz="1100">
-                          <a:solidFill>
-                            <a:srgbClr val="334155"/>
-                          </a:solidFill>
-                          <a:latin typeface="Malgun Gothic"/>
-                        </a:rPr>
-                        <a:t>합격 (적격)</a:t>
-                      </a:r>
-                    </a:p>
-                  </a:txBody>
-                  <a:tcPr>
-                    <a:solidFill>
-                      <a:srgbClr val="F8FAFC"/>
-                    </a:solidFill>
-                  </a:tcPr>
-                </a:tc>
-              </a:tr>
-              <a:tr h="731520">
-                <a:tc>
-                  <a:txBody>
-                    <a:bodyPr/>
-                    <a:lstStyle/>
-                    <a:p>
-                      <a:r>
-                        <a:rPr sz="1100">
-                          <a:solidFill>
-                            <a:srgbClr val="334155"/>
-                          </a:solidFill>
-                          <a:latin typeface="Malgun Gothic"/>
-                        </a:rPr>
-                        <a:t>시험/보안</a:t>
+                        <a:t>+6.2%p 초과 달성</a:t>
                       </a:r>
                     </a:p>
                   </a:txBody>
@@ -3926,14 +5661,157 @@
                     <a:bodyPr/>
                     <a:lstStyle/>
                     <a:p>
+                      <a:pPr algn="ctr">
+                        <a:defRPr sz="950" b="1">
+                          <a:solidFill>
+                            <a:srgbClr val="059669"/>
+                          </a:solidFill>
+                        </a:defRPr>
+                      </a:pPr>
                       <a:r>
-                        <a:rPr sz="1100">
+                        <a:t>적합 (최우수)</a:t>
+                      </a:r>
+                    </a:p>
+                  </a:txBody>
+                  <a:tcPr>
+                    <a:solidFill>
+                      <a:srgbClr val="FFFFFF"/>
+                    </a:solidFill>
+                  </a:tcPr>
+                </a:tc>
+              </a:tr>
+              <a:tr h="350520">
+                <a:tc>
+                  <a:txBody>
+                    <a:bodyPr/>
+                    <a:lstStyle/>
+                    <a:p>
+                      <a:pPr>
+                        <a:defRPr sz="950">
                           <a:solidFill>
                             <a:srgbClr val="334155"/>
                           </a:solidFill>
-                          <a:latin typeface="Malgun Gothic"/>
-                        </a:rPr>
-                        <a:t>단위/통합시험서, 시큐어코딩 진단표, 감리조치서</a:t>
+                        </a:defRPr>
+                      </a:pPr>
+                      <a:r>
+                        <a:t>재현율 (Recall)</a:t>
+                      </a:r>
+                    </a:p>
+                  </a:txBody>
+                  <a:tcPr>
+                    <a:solidFill>
+                      <a:srgbClr val="F1F5F9"/>
+                    </a:solidFill>
+                  </a:tcPr>
+                </a:tc>
+                <a:tc>
+                  <a:txBody>
+                    <a:bodyPr/>
+                    <a:lstStyle/>
+                    <a:p>
+                      <a:pPr algn="ctr">
+                        <a:defRPr sz="950">
+                          <a:solidFill>
+                            <a:srgbClr val="334155"/>
+                          </a:solidFill>
+                        </a:defRPr>
+                      </a:pPr>
+                      <a:r>
+                        <a:t>90.0% 이상</a:t>
+                      </a:r>
+                    </a:p>
+                  </a:txBody>
+                  <a:tcPr>
+                    <a:solidFill>
+                      <a:srgbClr val="F1F5F9"/>
+                    </a:solidFill>
+                  </a:tcPr>
+                </a:tc>
+                <a:tc>
+                  <a:txBody>
+                    <a:bodyPr/>
+                    <a:lstStyle/>
+                    <a:p>
+                      <a:pPr algn="ctr">
+                        <a:defRPr sz="950" b="1">
+                          <a:solidFill>
+                            <a:srgbClr val="2563EB"/>
+                          </a:solidFill>
+                        </a:defRPr>
+                      </a:pPr>
+                      <a:r>
+                        <a:t>95.8%</a:t>
+                      </a:r>
+                    </a:p>
+                  </a:txBody>
+                  <a:tcPr>
+                    <a:solidFill>
+                      <a:srgbClr val="F1F5F9"/>
+                    </a:solidFill>
+                  </a:tcPr>
+                </a:tc>
+                <a:tc>
+                  <a:txBody>
+                    <a:bodyPr/>
+                    <a:lstStyle/>
+                    <a:p>
+                      <a:pPr algn="ctr">
+                        <a:defRPr sz="950">
+                          <a:solidFill>
+                            <a:srgbClr val="334155"/>
+                          </a:solidFill>
+                        </a:defRPr>
+                      </a:pPr>
+                      <a:r>
+                        <a:t>+5.8%p 초과 달성</a:t>
+                      </a:r>
+                    </a:p>
+                  </a:txBody>
+                  <a:tcPr>
+                    <a:solidFill>
+                      <a:srgbClr val="F1F5F9"/>
+                    </a:solidFill>
+                  </a:tcPr>
+                </a:tc>
+                <a:tc>
+                  <a:txBody>
+                    <a:bodyPr/>
+                    <a:lstStyle/>
+                    <a:p>
+                      <a:pPr algn="ctr">
+                        <a:defRPr sz="950" b="1">
+                          <a:solidFill>
+                            <a:srgbClr val="059669"/>
+                          </a:solidFill>
+                        </a:defRPr>
+                      </a:pPr>
+                      <a:r>
+                        <a:t>적합 (최우수)</a:t>
+                      </a:r>
+                    </a:p>
+                  </a:txBody>
+                  <a:tcPr>
+                    <a:solidFill>
+                      <a:srgbClr val="F1F5F9"/>
+                    </a:solidFill>
+                  </a:tcPr>
+                </a:tc>
+              </a:tr>
+              <a:tr h="350520">
+                <a:tc>
+                  <a:txBody>
+                    <a:bodyPr/>
+                    <a:lstStyle/>
+                    <a:p>
+                      <a:pPr>
+                        <a:defRPr sz="950">
+                          <a:solidFill>
+                            <a:srgbClr val="334155"/>
+                          </a:solidFill>
+                        </a:defRPr>
+                      </a:pPr>
+                      <a:r>
+                        <a:t>F1-Score 종합지수</a:t>
                       </a:r>
                     </a:p>
                   </a:txBody>
@@ -3948,14 +5826,15 @@
                     <a:bodyPr/>
                     <a:lstStyle/>
                     <a:p>
-                      <a:r>
-                        <a:rPr sz="1100">
+                      <a:pPr algn="ctr">
+                        <a:defRPr sz="950">
                           <a:solidFill>
                             <a:srgbClr val="334155"/>
                           </a:solidFill>
-                          <a:latin typeface="Malgun Gothic"/>
-                        </a:rPr>
-                        <a:t>전자문서(PDF)</a:t>
+                        </a:defRPr>
+                      </a:pPr>
+                      <a:r>
+                        <a:t>90.0% 이상</a:t>
                       </a:r>
                     </a:p>
                   </a:txBody>
@@ -3970,14 +5849,61 @@
                     <a:bodyPr/>
                     <a:lstStyle/>
                     <a:p>
+                      <a:pPr algn="ctr">
+                        <a:defRPr sz="950" b="1">
+                          <a:solidFill>
+                            <a:srgbClr val="2563EB"/>
+                          </a:solidFill>
+                        </a:defRPr>
+                      </a:pPr>
                       <a:r>
-                        <a:rPr sz="1100">
+                        <a:t>96.0%</a:t>
+                      </a:r>
+                    </a:p>
+                  </a:txBody>
+                  <a:tcPr>
+                    <a:solidFill>
+                      <a:srgbClr val="FFFFFF"/>
+                    </a:solidFill>
+                  </a:tcPr>
+                </a:tc>
+                <a:tc>
+                  <a:txBody>
+                    <a:bodyPr/>
+                    <a:lstStyle/>
+                    <a:p>
+                      <a:pPr algn="ctr">
+                        <a:defRPr sz="950">
                           <a:solidFill>
                             <a:srgbClr val="334155"/>
                           </a:solidFill>
-                          <a:latin typeface="Malgun Gothic"/>
-                        </a:rPr>
-                        <a:t>합격 (적격)</a:t>
+                        </a:defRPr>
+                      </a:pPr>
+                      <a:r>
+                        <a:t>+6.0%p 초과 달성</a:t>
+                      </a:r>
+                    </a:p>
+                  </a:txBody>
+                  <a:tcPr>
+                    <a:solidFill>
+                      <a:srgbClr val="FFFFFF"/>
+                    </a:solidFill>
+                  </a:tcPr>
+                </a:tc>
+                <a:tc>
+                  <a:txBody>
+                    <a:bodyPr/>
+                    <a:lstStyle/>
+                    <a:p>
+                      <a:pPr algn="ctr">
+                        <a:defRPr sz="950" b="1">
+                          <a:solidFill>
+                            <a:srgbClr val="059669"/>
+                          </a:solidFill>
+                        </a:defRPr>
+                      </a:pPr>
+                      <a:r>
+                        <a:t>적합 (최우수)</a:t>
                       </a:r>
                     </a:p>
                   </a:txBody>
@@ -3988,26 +5914,27 @@
                   </a:tcPr>
                 </a:tc>
               </a:tr>
-              <a:tr h="731520">
+              <a:tr h="350520">
                 <a:tc>
                   <a:txBody>
                     <a:bodyPr/>
                     <a:lstStyle/>
                     <a:p>
-                      <a:r>
-                        <a:rPr sz="1100">
+                      <a:pPr>
+                        <a:defRPr sz="950">
                           <a:solidFill>
                             <a:srgbClr val="334155"/>
                           </a:solidFill>
-                          <a:latin typeface="Malgun Gothic"/>
-                        </a:rPr>
-                        <a:t>매뉴얼/교육</a:t>
+                        </a:defRPr>
+                      </a:pPr>
+                      <a:r>
+                        <a:t>단건 심의 응답속도</a:t>
                       </a:r>
                     </a:p>
                   </a:txBody>
                   <a:tcPr>
                     <a:solidFill>
-                      <a:srgbClr val="F8FAFC"/>
+                      <a:srgbClr val="F1F5F9"/>
                     </a:solidFill>
                   </a:tcPr>
                 </a:tc>
@@ -4016,20 +5943,21 @@
                     <a:bodyPr/>
                     <a:lstStyle/>
                     <a:p>
-                      <a:r>
-                        <a:rPr sz="1100">
+                      <a:pPr algn="ctr">
+                        <a:defRPr sz="950">
                           <a:solidFill>
                             <a:srgbClr val="334155"/>
                           </a:solidFill>
-                          <a:latin typeface="Malgun Gothic"/>
-                        </a:rPr>
-                        <a:t>관리자/사용자 매뉴얼, 교육결과보고서, 인수증</a:t>
+                        </a:defRPr>
+                      </a:pPr>
+                      <a:r>
+                        <a:t>5.0초 이내</a:t>
                       </a:r>
                     </a:p>
                   </a:txBody>
                   <a:tcPr>
                     <a:solidFill>
-                      <a:srgbClr val="F8FAFC"/>
+                      <a:srgbClr val="F1F5F9"/>
                     </a:solidFill>
                   </a:tcPr>
                 </a:tc>
@@ -4038,20 +5966,21 @@
                     <a:bodyPr/>
                     <a:lstStyle/>
                     <a:p>
+                      <a:pPr algn="ctr">
+                        <a:defRPr sz="950" b="1">
+                          <a:solidFill>
+                            <a:srgbClr val="2563EB"/>
+                          </a:solidFill>
+                        </a:defRPr>
+                      </a:pPr>
                       <a:r>
-                        <a:rPr sz="1100">
-                          <a:solidFill>
-                            <a:srgbClr val="334155"/>
-                          </a:solidFill>
-                          <a:latin typeface="Malgun Gothic"/>
-                        </a:rPr>
-                        <a:t>전자문서/책자</a:t>
+                        <a:t>3.2초 (평균)</a:t>
                       </a:r>
                     </a:p>
                   </a:txBody>
                   <a:tcPr>
                     <a:solidFill>
-                      <a:srgbClr val="F8FAFC"/>
+                      <a:srgbClr val="F1F5F9"/>
                     </a:solidFill>
                   </a:tcPr>
                 </a:tc>
@@ -4060,20 +5989,161 @@
                     <a:bodyPr/>
                     <a:lstStyle/>
                     <a:p>
-                      <a:r>
-                        <a:rPr sz="1100">
+                      <a:pPr algn="ctr">
+                        <a:defRPr sz="950">
                           <a:solidFill>
                             <a:srgbClr val="334155"/>
                           </a:solidFill>
-                          <a:latin typeface="Malgun Gothic"/>
-                        </a:rPr>
-                        <a:t>합격 (적격)</a:t>
+                        </a:defRPr>
+                      </a:pPr>
+                      <a:r>
+                        <a:t>-1.8초 단축 (36% 개선)</a:t>
                       </a:r>
                     </a:p>
                   </a:txBody>
                   <a:tcPr>
                     <a:solidFill>
-                      <a:srgbClr val="F8FAFC"/>
+                      <a:srgbClr val="F1F5F9"/>
+                    </a:solidFill>
+                  </a:tcPr>
+                </a:tc>
+                <a:tc>
+                  <a:txBody>
+                    <a:bodyPr/>
+                    <a:lstStyle/>
+                    <a:p>
+                      <a:pPr algn="ctr">
+                        <a:defRPr sz="950" b="1">
+                          <a:solidFill>
+                            <a:srgbClr val="059669"/>
+                          </a:solidFill>
+                        </a:defRPr>
+                      </a:pPr>
+                      <a:r>
+                        <a:t>적합 (목표 달성)</a:t>
+                      </a:r>
+                    </a:p>
+                  </a:txBody>
+                  <a:tcPr>
+                    <a:solidFill>
+                      <a:srgbClr val="F1F5F9"/>
+                    </a:solidFill>
+                  </a:tcPr>
+                </a:tc>
+              </a:tr>
+              <a:tr h="350520">
+                <a:tc>
+                  <a:txBody>
+                    <a:bodyPr/>
+                    <a:lstStyle/>
+                    <a:p>
+                      <a:pPr>
+                        <a:defRPr sz="950">
+                          <a:solidFill>
+                            <a:srgbClr val="334155"/>
+                          </a:solidFill>
+                        </a:defRPr>
+                      </a:pPr>
+                      <a:r>
+                        <a:t>부하 시험 동시 요청</a:t>
+                      </a:r>
+                    </a:p>
+                  </a:txBody>
+                  <a:tcPr>
+                    <a:solidFill>
+                      <a:srgbClr val="FFFFFF"/>
+                    </a:solidFill>
+                  </a:tcPr>
+                </a:tc>
+                <a:tc>
+                  <a:txBody>
+                    <a:bodyPr/>
+                    <a:lstStyle/>
+                    <a:p>
+                      <a:pPr algn="ctr">
+                        <a:defRPr sz="950">
+                          <a:solidFill>
+                            <a:srgbClr val="334155"/>
+                          </a:solidFill>
+                        </a:defRPr>
+                      </a:pPr>
+                      <a:r>
+                        <a:t>50 VU / 100 TPS</a:t>
+                      </a:r>
+                    </a:p>
+                  </a:txBody>
+                  <a:tcPr>
+                    <a:solidFill>
+                      <a:srgbClr val="FFFFFF"/>
+                    </a:solidFill>
+                  </a:tcPr>
+                </a:tc>
+                <a:tc>
+                  <a:txBody>
+                    <a:bodyPr/>
+                    <a:lstStyle/>
+                    <a:p>
+                      <a:pPr algn="ctr">
+                        <a:defRPr sz="950" b="1">
+                          <a:solidFill>
+                            <a:srgbClr val="2563EB"/>
+                          </a:solidFill>
+                        </a:defRPr>
+                      </a:pPr>
+                      <a:r>
+                        <a:t>62 VU / 128 TPS</a:t>
+                      </a:r>
+                    </a:p>
+                  </a:txBody>
+                  <a:tcPr>
+                    <a:solidFill>
+                      <a:srgbClr val="FFFFFF"/>
+                    </a:solidFill>
+                  </a:tcPr>
+                </a:tc>
+                <a:tc>
+                  <a:txBody>
+                    <a:bodyPr/>
+                    <a:lstStyle/>
+                    <a:p>
+                      <a:pPr algn="ctr">
+                        <a:defRPr sz="950">
+                          <a:solidFill>
+                            <a:srgbClr val="334155"/>
+                          </a:solidFill>
+                        </a:defRPr>
+                      </a:pPr>
+                      <a:r>
+                        <a:t>+28% 여유 마진 확보</a:t>
+                      </a:r>
+                    </a:p>
+                  </a:txBody>
+                  <a:tcPr>
+                    <a:solidFill>
+                      <a:srgbClr val="FFFFFF"/>
+                    </a:solidFill>
+                  </a:tcPr>
+                </a:tc>
+                <a:tc>
+                  <a:txBody>
+                    <a:bodyPr/>
+                    <a:lstStyle/>
+                    <a:p>
+                      <a:pPr algn="ctr">
+                        <a:defRPr sz="950" b="1">
+                          <a:solidFill>
+                            <a:srgbClr val="059669"/>
+                          </a:solidFill>
+                        </a:defRPr>
+                      </a:pPr>
+                      <a:r>
+                        <a:t>적합 (목표 달성)</a:t>
+                      </a:r>
+                    </a:p>
+                  </a:txBody>
+                  <a:tcPr>
+                    <a:solidFill>
+                      <a:srgbClr val="FFFFFF"/>
                     </a:solidFill>
                   </a:tcPr>
                 </a:tc>
@@ -4082,6 +6152,3832 @@
           </a:graphicData>
         </a:graphic>
       </p:graphicFrame>
+      <p:sp>
+        <p:nvSpPr>
+          <p:cNvPr id="11" name="Rounded Rectangle 10"/>
+          <p:cNvSpPr/>
+          <p:nvPr/>
+        </p:nvSpPr>
+        <p:spPr>
+          <a:xfrm>
+            <a:off x="731520" y="3749039"/>
+            <a:ext cx="10728655" cy="2286000"/>
+          </a:xfrm>
+          <a:prstGeom prst="roundRect">
+            <a:avLst/>
+          </a:prstGeom>
+          <a:solidFill>
+            <a:srgbClr val="F8FAFC"/>
+          </a:solidFill>
+          <a:ln w="12700">
+            <a:solidFill>
+              <a:srgbClr val="E2E8F0"/>
+            </a:solidFill>
+          </a:ln>
+        </p:spPr>
+        <p:style>
+          <a:lnRef idx="1">
+            <a:schemeClr val="accent1"/>
+          </a:lnRef>
+          <a:fillRef idx="3">
+            <a:schemeClr val="accent1"/>
+          </a:fillRef>
+          <a:effectRef idx="2">
+            <a:schemeClr val="accent1"/>
+          </a:effectRef>
+          <a:fontRef idx="minor">
+            <a:schemeClr val="lt1"/>
+          </a:fontRef>
+        </p:style>
+        <p:txBody>
+          <a:bodyPr rtlCol="0" anchor="ctr"/>
+          <a:lstStyle/>
+          <a:p>
+            <a:pPr algn="ctr"/>
+          </a:p>
+        </p:txBody>
+      </p:sp>
+      <p:sp>
+        <p:nvSpPr>
+          <p:cNvPr id="12" name="TextBox 11"/>
+          <p:cNvSpPr txBox="1"/>
+          <p:nvPr/>
+        </p:nvSpPr>
+        <p:spPr>
+          <a:xfrm>
+            <a:off x="1005840" y="3886200"/>
+            <a:ext cx="10149840" cy="2011680"/>
+          </a:xfrm>
+          <a:prstGeom prst="rect">
+            <a:avLst/>
+          </a:prstGeom>
+          <a:noFill/>
+        </p:spPr>
+        <p:txBody>
+          <a:bodyPr wrap="square">
+            <a:spAutoFit/>
+          </a:bodyPr>
+          <a:lstStyle/>
+          <a:p>
+            <a:pPr>
+              <a:defRPr b="1" sz="1100">
+                <a:solidFill>
+                  <a:srgbClr val="0F172A"/>
+                </a:solidFill>
+              </a:defRPr>
+            </a:pPr>
+            <a:r>
+              <a:t>■ 골든셋 50문항 정밀 검증 결과 분석 요약</a:t>
+            </a:r>
+          </a:p>
+          <a:p>
+            <a:pPr>
+              <a:spcBef>
+                <a:spcPts val="300"/>
+              </a:spcBef>
+              <a:defRPr sz="950">
+                <a:solidFill>
+                  <a:srgbClr val="334155"/>
+                </a:solidFill>
+              </a:defRPr>
+            </a:pPr>
+            <a:r>
+              <a:t>• 의약품 오인 표현 탐지율 100%: '치료', '재생', '염증 완화', '세포 증식' 등 식약처 고위험 표현 전수 탐지 및 대체어 즉시 추천 완결.</a:t>
+            </a:r>
+          </a:p>
+          <a:p>
+            <a:pPr>
+              <a:spcBef>
+                <a:spcPts val="300"/>
+              </a:spcBef>
+              <a:defRPr sz="950">
+                <a:solidFill>
+                  <a:srgbClr val="334155"/>
+                </a:solidFill>
+              </a:defRPr>
+            </a:pPr>
+            <a:r>
+              <a:t>• 기능성 화장품 범위 검증: 미백, 주름개선, 자외선 차단 3대 고시 성분과 비고시 성분의 과대 주장 문맥을 완벽히 분리 판정.</a:t>
+            </a:r>
+          </a:p>
+          <a:p>
+            <a:pPr>
+              <a:spcBef>
+                <a:spcPts val="300"/>
+              </a:spcBef>
+              <a:defRPr sz="950">
+                <a:solidFill>
+                  <a:srgbClr val="334155"/>
+                </a:solidFill>
+              </a:defRPr>
+            </a:pPr>
+            <a:r>
+              <a:t>• 부정어 및 문맥 왜곡 방지: '트러블을 치료하지 않고 예방에 도움'과 같은 복합 문맥에서 오경보 없이 정상 판정(청색) 도출 확인.</a:t>
+            </a:r>
+          </a:p>
+          <a:p>
+            <a:pPr>
+              <a:spcBef>
+                <a:spcPts val="300"/>
+              </a:spcBef>
+              <a:defRPr sz="950">
+                <a:solidFill>
+                  <a:srgbClr val="334155"/>
+                </a:solidFill>
+              </a:defRPr>
+            </a:pPr>
+            <a:r>
+              <a:t>• 근거 규격 자동 매칭: 판정 결과마다 식약처 표시·광고 공정화법 제3조 및 관리지침 근거 조항을 100% 매핑하여 심의관의 검토 설득력 확보.</a:t>
+            </a:r>
+          </a:p>
+        </p:txBody>
+      </p:sp>
+    </p:spTree>
+  </p:cSld>
+  <p:clrMapOvr>
+    <a:masterClrMapping/>
+  </p:clrMapOvr>
+</p:sld>
+</file>
+
+<file path=ppt/slides/slide5.xml><?xml version="1.0" encoding="utf-8"?>
+<p:sld xmlns:a="http://schemas.openxmlformats.org/drawingml/2006/main" xmlns:p="http://schemas.openxmlformats.org/presentationml/2006/main" xmlns:r="http://schemas.openxmlformats.org/officeDocument/2006/relationships">
+  <p:cSld>
+    <p:spTree>
+      <p:nvGrpSpPr>
+        <p:cNvPr id="1" name=""/>
+        <p:cNvGrpSpPr/>
+        <p:nvPr/>
+      </p:nvGrpSpPr>
+      <p:grpSpPr/>
+      <p:sp>
+        <p:nvSpPr>
+          <p:cNvPr id="2" name="Rectangle 1"/>
+          <p:cNvSpPr/>
+          <p:nvPr/>
+        </p:nvSpPr>
+        <p:spPr>
+          <a:xfrm>
+            <a:off x="0" y="0"/>
+            <a:ext cx="12191695" cy="1005840"/>
+          </a:xfrm>
+          <a:prstGeom prst="rect">
+            <a:avLst/>
+          </a:prstGeom>
+          <a:solidFill>
+            <a:srgbClr val="FFFFFF"/>
+          </a:solidFill>
+          <a:ln w="12700">
+            <a:solidFill>
+              <a:srgbClr val="E2E8F0"/>
+            </a:solidFill>
+          </a:ln>
+        </p:spPr>
+        <p:style>
+          <a:lnRef idx="1">
+            <a:schemeClr val="accent1"/>
+          </a:lnRef>
+          <a:fillRef idx="3">
+            <a:schemeClr val="accent1"/>
+          </a:fillRef>
+          <a:effectRef idx="2">
+            <a:schemeClr val="accent1"/>
+          </a:effectRef>
+          <a:fontRef idx="minor">
+            <a:schemeClr val="lt1"/>
+          </a:fontRef>
+        </p:style>
+        <p:txBody>
+          <a:bodyPr rtlCol="0" anchor="ctr"/>
+          <a:lstStyle/>
+          <a:p>
+            <a:pPr algn="ctr"/>
+          </a:p>
+        </p:txBody>
+      </p:sp>
+      <p:sp>
+        <p:nvSpPr>
+          <p:cNvPr id="3" name="TextBox 2"/>
+          <p:cNvSpPr txBox="1"/>
+          <p:nvPr/>
+        </p:nvSpPr>
+        <p:spPr>
+          <a:xfrm>
+            <a:off x="731520" y="164592"/>
+            <a:ext cx="6400800" cy="274320"/>
+          </a:xfrm>
+          <a:prstGeom prst="rect">
+            <a:avLst/>
+          </a:prstGeom>
+          <a:noFill/>
+        </p:spPr>
+        <p:txBody>
+          <a:bodyPr wrap="none">
+            <a:spAutoFit/>
+          </a:bodyPr>
+          <a:lstStyle/>
+          <a:p>
+            <a:pPr>
+              <a:defRPr sz="1000" b="1">
+                <a:solidFill>
+                  <a:srgbClr val="2563EB"/>
+                </a:solidFill>
+              </a:defRPr>
+            </a:pPr>
+            <a:r>
+              <a:t>SyncGuard AI 사업 완료보고서  &gt;  4. 시범운영 및 ROI</a:t>
+            </a:r>
+          </a:p>
+        </p:txBody>
+      </p:sp>
+      <p:sp>
+        <p:nvSpPr>
+          <p:cNvPr id="4" name="TextBox 3"/>
+          <p:cNvSpPr txBox="1"/>
+          <p:nvPr/>
+        </p:nvSpPr>
+        <p:spPr>
+          <a:xfrm>
+            <a:off x="731520" y="411480"/>
+            <a:ext cx="7772400" cy="502920"/>
+          </a:xfrm>
+          <a:prstGeom prst="rect">
+            <a:avLst/>
+          </a:prstGeom>
+          <a:noFill/>
+        </p:spPr>
+        <p:txBody>
+          <a:bodyPr wrap="none">
+            <a:spAutoFit/>
+          </a:bodyPr>
+          <a:lstStyle/>
+          <a:p>
+            <a:pPr>
+              <a:defRPr sz="1800" b="1">
+                <a:solidFill>
+                  <a:srgbClr val="0F172A"/>
+                </a:solidFill>
+              </a:defRPr>
+            </a:pPr>
+            <a:r>
+              <a:t>4.1 실데이터 시범운영 실적 및 업무 생산성 개선 효과</a:t>
+            </a:r>
+          </a:p>
+        </p:txBody>
+      </p:sp>
+      <p:sp>
+        <p:nvSpPr>
+          <p:cNvPr id="5" name="TextBox 4"/>
+          <p:cNvSpPr txBox="1"/>
+          <p:nvPr/>
+        </p:nvSpPr>
+        <p:spPr>
+          <a:xfrm>
+            <a:off x="8229600" y="228600"/>
+            <a:ext cx="3200400" cy="548640"/>
+          </a:xfrm>
+          <a:prstGeom prst="rect">
+            <a:avLst/>
+          </a:prstGeom>
+          <a:noFill/>
+        </p:spPr>
+        <p:txBody>
+          <a:bodyPr wrap="none">
+            <a:spAutoFit/>
+          </a:bodyPr>
+          <a:lstStyle/>
+          <a:p>
+            <a:pPr algn="r">
+              <a:defRPr sz="1000" b="1">
+                <a:solidFill>
+                  <a:srgbClr val="1E293B"/>
+                </a:solidFill>
+              </a:defRPr>
+            </a:pPr>
+            <a:r>
+              <a:t>산출물 ID: EMP_IMP_080 | v1.0</a:t>
+            </a:r>
+          </a:p>
+        </p:txBody>
+      </p:sp>
+      <p:sp>
+        <p:nvSpPr>
+          <p:cNvPr id="6" name="Rectangle 5"/>
+          <p:cNvSpPr/>
+          <p:nvPr/>
+        </p:nvSpPr>
+        <p:spPr>
+          <a:xfrm>
+            <a:off x="0" y="6309360"/>
+            <a:ext cx="12191695" cy="548640"/>
+          </a:xfrm>
+          <a:prstGeom prst="rect">
+            <a:avLst/>
+          </a:prstGeom>
+          <a:solidFill>
+            <a:srgbClr val="F8FAFC"/>
+          </a:solidFill>
+          <a:ln w="12700">
+            <a:solidFill>
+              <a:srgbClr val="E2E8F0"/>
+            </a:solidFill>
+          </a:ln>
+        </p:spPr>
+        <p:style>
+          <a:lnRef idx="1">
+            <a:schemeClr val="accent1"/>
+          </a:lnRef>
+          <a:fillRef idx="3">
+            <a:schemeClr val="accent1"/>
+          </a:fillRef>
+          <a:effectRef idx="2">
+            <a:schemeClr val="accent1"/>
+          </a:effectRef>
+          <a:fontRef idx="minor">
+            <a:schemeClr val="lt1"/>
+          </a:fontRef>
+        </p:style>
+        <p:txBody>
+          <a:bodyPr rtlCol="0" anchor="ctr"/>
+          <a:lstStyle/>
+          <a:p>
+            <a:pPr algn="ctr"/>
+          </a:p>
+        </p:txBody>
+      </p:sp>
+      <p:sp>
+        <p:nvSpPr>
+          <p:cNvPr id="7" name="TextBox 6"/>
+          <p:cNvSpPr txBox="1"/>
+          <p:nvPr/>
+        </p:nvSpPr>
+        <p:spPr>
+          <a:xfrm>
+            <a:off x="731520" y="6355080"/>
+            <a:ext cx="5029200" cy="365760"/>
+          </a:xfrm>
+          <a:prstGeom prst="rect">
+            <a:avLst/>
+          </a:prstGeom>
+          <a:noFill/>
+        </p:spPr>
+        <p:txBody>
+          <a:bodyPr wrap="none">
+            <a:spAutoFit/>
+          </a:bodyPr>
+          <a:lstStyle/>
+          <a:p>
+            <a:pPr>
+              <a:defRPr sz="900">
+                <a:solidFill>
+                  <a:srgbClr val="64748B"/>
+                </a:solidFill>
+              </a:defRPr>
+            </a:pPr>
+            <a:r>
+              <a:t>SyncGuard AI | 프로젝트 최종 완수 및 검수 요청 종료보고서</a:t>
+            </a:r>
+          </a:p>
+        </p:txBody>
+      </p:sp>
+      <p:sp>
+        <p:nvSpPr>
+          <p:cNvPr id="8" name="TextBox 7"/>
+          <p:cNvSpPr txBox="1"/>
+          <p:nvPr/>
+        </p:nvSpPr>
+        <p:spPr>
+          <a:xfrm>
+            <a:off x="5486400" y="6355080"/>
+            <a:ext cx="1371600" cy="365760"/>
+          </a:xfrm>
+          <a:prstGeom prst="rect">
+            <a:avLst/>
+          </a:prstGeom>
+          <a:noFill/>
+        </p:spPr>
+        <p:txBody>
+          <a:bodyPr wrap="none">
+            <a:spAutoFit/>
+          </a:bodyPr>
+          <a:lstStyle/>
+          <a:p>
+            <a:pPr algn="ctr">
+              <a:defRPr sz="1000" b="1"/>
+            </a:pPr>
+            <a:r>
+              <a:t>5 / 8</a:t>
+            </a:r>
+          </a:p>
+        </p:txBody>
+      </p:sp>
+      <p:sp>
+        <p:nvSpPr>
+          <p:cNvPr id="9" name="TextBox 8"/>
+          <p:cNvSpPr txBox="1"/>
+          <p:nvPr/>
+        </p:nvSpPr>
+        <p:spPr>
+          <a:xfrm>
+            <a:off x="7315200" y="6355080"/>
+            <a:ext cx="4114800" cy="365760"/>
+          </a:xfrm>
+          <a:prstGeom prst="rect">
+            <a:avLst/>
+          </a:prstGeom>
+          <a:noFill/>
+        </p:spPr>
+        <p:txBody>
+          <a:bodyPr wrap="none">
+            <a:spAutoFit/>
+          </a:bodyPr>
+          <a:lstStyle/>
+          <a:p>
+            <a:pPr algn="r">
+              <a:defRPr sz="900" b="1">
+                <a:solidFill>
+                  <a:srgbClr val="2563EB"/>
+                </a:solidFill>
+              </a:defRPr>
+            </a:pPr>
+            <a:r>
+              <a:t>발주사: HANBIT GLOBAL   |   수행사: ㈜엠파시 (Empasy Inc.)</a:t>
+            </a:r>
+          </a:p>
+        </p:txBody>
+      </p:sp>
+      <p:sp>
+        <p:nvSpPr>
+          <p:cNvPr id="10" name="Rounded Rectangle 9"/>
+          <p:cNvSpPr/>
+          <p:nvPr/>
+        </p:nvSpPr>
+        <p:spPr>
+          <a:xfrm>
+            <a:off x="731520" y="1371600"/>
+            <a:ext cx="2514600" cy="1828800"/>
+          </a:xfrm>
+          <a:prstGeom prst="roundRect">
+            <a:avLst/>
+          </a:prstGeom>
+          <a:solidFill>
+            <a:srgbClr val="FFFFFF"/>
+          </a:solidFill>
+          <a:ln w="12700">
+            <a:solidFill>
+              <a:srgbClr val="E2E8F0"/>
+            </a:solidFill>
+          </a:ln>
+        </p:spPr>
+        <p:style>
+          <a:lnRef idx="1">
+            <a:schemeClr val="accent1"/>
+          </a:lnRef>
+          <a:fillRef idx="3">
+            <a:schemeClr val="accent1"/>
+          </a:fillRef>
+          <a:effectRef idx="2">
+            <a:schemeClr val="accent1"/>
+          </a:effectRef>
+          <a:fontRef idx="minor">
+            <a:schemeClr val="lt1"/>
+          </a:fontRef>
+        </p:style>
+        <p:txBody>
+          <a:bodyPr rtlCol="0" anchor="ctr"/>
+          <a:lstStyle/>
+          <a:p>
+            <a:pPr algn="ctr"/>
+          </a:p>
+        </p:txBody>
+      </p:sp>
+      <p:sp>
+        <p:nvSpPr>
+          <p:cNvPr id="11" name="TextBox 10"/>
+          <p:cNvSpPr txBox="1"/>
+          <p:nvPr/>
+        </p:nvSpPr>
+        <p:spPr>
+          <a:xfrm>
+            <a:off x="868680" y="1463040"/>
+            <a:ext cx="2240280" cy="1645920"/>
+          </a:xfrm>
+          <a:prstGeom prst="rect">
+            <a:avLst/>
+          </a:prstGeom>
+          <a:noFill/>
+        </p:spPr>
+        <p:txBody>
+          <a:bodyPr wrap="square">
+            <a:spAutoFit/>
+          </a:bodyPr>
+          <a:lstStyle/>
+          <a:p>
+            <a:pPr>
+              <a:defRPr b="1" sz="1000">
+                <a:solidFill>
+                  <a:srgbClr val="64748B"/>
+                </a:solidFill>
+              </a:defRPr>
+            </a:pPr>
+            <a:r>
+              <a:t>시범운영 총 심의 건수</a:t>
+            </a:r>
+          </a:p>
+          <a:p>
+            <a:pPr>
+              <a:spcBef>
+                <a:spcPts val="400"/>
+              </a:spcBef>
+              <a:defRPr b="1" sz="2000">
+                <a:solidFill>
+                  <a:srgbClr val="2563EB"/>
+                </a:solidFill>
+              </a:defRPr>
+            </a:pPr>
+            <a:r>
+              <a:t>142건</a:t>
+            </a:r>
+          </a:p>
+          <a:p>
+            <a:pPr>
+              <a:spcBef>
+                <a:spcPts val="600"/>
+              </a:spcBef>
+              <a:defRPr sz="900">
+                <a:solidFill>
+                  <a:srgbClr val="334155"/>
+                </a:solidFill>
+              </a:defRPr>
+            </a:pPr>
+            <a:r>
+              <a:t>루미에르, 아쿠아퓨어, 그린네이처 등</a:t>
+            </a:r>
+            <a:br/>
+            <a:r>
+              <a:t>11개 브랜드 실무 적용 완료</a:t>
+            </a:r>
+          </a:p>
+        </p:txBody>
+      </p:sp>
+      <p:sp>
+        <p:nvSpPr>
+          <p:cNvPr id="12" name="Rounded Rectangle 11"/>
+          <p:cNvSpPr/>
+          <p:nvPr/>
+        </p:nvSpPr>
+        <p:spPr>
+          <a:xfrm>
+            <a:off x="3429000" y="1371600"/>
+            <a:ext cx="2514600" cy="1828800"/>
+          </a:xfrm>
+          <a:prstGeom prst="roundRect">
+            <a:avLst/>
+          </a:prstGeom>
+          <a:solidFill>
+            <a:srgbClr val="FFFFFF"/>
+          </a:solidFill>
+          <a:ln w="12700">
+            <a:solidFill>
+              <a:srgbClr val="E2E8F0"/>
+            </a:solidFill>
+          </a:ln>
+        </p:spPr>
+        <p:style>
+          <a:lnRef idx="1">
+            <a:schemeClr val="accent1"/>
+          </a:lnRef>
+          <a:fillRef idx="3">
+            <a:schemeClr val="accent1"/>
+          </a:fillRef>
+          <a:effectRef idx="2">
+            <a:schemeClr val="accent1"/>
+          </a:effectRef>
+          <a:fontRef idx="minor">
+            <a:schemeClr val="lt1"/>
+          </a:fontRef>
+        </p:style>
+        <p:txBody>
+          <a:bodyPr rtlCol="0" anchor="ctr"/>
+          <a:lstStyle/>
+          <a:p>
+            <a:pPr algn="ctr"/>
+          </a:p>
+        </p:txBody>
+      </p:sp>
+      <p:sp>
+        <p:nvSpPr>
+          <p:cNvPr id="13" name="TextBox 12"/>
+          <p:cNvSpPr txBox="1"/>
+          <p:nvPr/>
+        </p:nvSpPr>
+        <p:spPr>
+          <a:xfrm>
+            <a:off x="3566160" y="1463040"/>
+            <a:ext cx="2240280" cy="1645920"/>
+          </a:xfrm>
+          <a:prstGeom prst="rect">
+            <a:avLst/>
+          </a:prstGeom>
+          <a:noFill/>
+        </p:spPr>
+        <p:txBody>
+          <a:bodyPr wrap="square">
+            <a:spAutoFit/>
+          </a:bodyPr>
+          <a:lstStyle/>
+          <a:p>
+            <a:pPr>
+              <a:defRPr b="1" sz="1000">
+                <a:solidFill>
+                  <a:srgbClr val="64748B"/>
+                </a:solidFill>
+              </a:defRPr>
+            </a:pPr>
+            <a:r>
+              <a:t>RA 담당자 판정 일치율</a:t>
+            </a:r>
+          </a:p>
+          <a:p>
+            <a:pPr>
+              <a:spcBef>
+                <a:spcPts val="400"/>
+              </a:spcBef>
+              <a:defRPr b="1" sz="2000">
+                <a:solidFill>
+                  <a:srgbClr val="2563EB"/>
+                </a:solidFill>
+              </a:defRPr>
+            </a:pPr>
+            <a:r>
+              <a:t>97.2%</a:t>
+            </a:r>
+          </a:p>
+          <a:p>
+            <a:pPr>
+              <a:spcBef>
+                <a:spcPts val="600"/>
+              </a:spcBef>
+              <a:defRPr sz="900">
+                <a:solidFill>
+                  <a:srgbClr val="334155"/>
+                </a:solidFill>
+              </a:defRPr>
+            </a:pPr>
+            <a:r>
+              <a:t>142건 중 138건 일치</a:t>
+            </a:r>
+            <a:br/>
+            <a:r>
+              <a:t>(단 4건 미세 조정 완료)</a:t>
+            </a:r>
+          </a:p>
+        </p:txBody>
+      </p:sp>
+      <p:sp>
+        <p:nvSpPr>
+          <p:cNvPr id="14" name="Rounded Rectangle 13"/>
+          <p:cNvSpPr/>
+          <p:nvPr/>
+        </p:nvSpPr>
+        <p:spPr>
+          <a:xfrm>
+            <a:off x="6126480" y="1371600"/>
+            <a:ext cx="2514600" cy="1828800"/>
+          </a:xfrm>
+          <a:prstGeom prst="roundRect">
+            <a:avLst/>
+          </a:prstGeom>
+          <a:solidFill>
+            <a:srgbClr val="FFFFFF"/>
+          </a:solidFill>
+          <a:ln w="12700">
+            <a:solidFill>
+              <a:srgbClr val="E2E8F0"/>
+            </a:solidFill>
+          </a:ln>
+        </p:spPr>
+        <p:style>
+          <a:lnRef idx="1">
+            <a:schemeClr val="accent1"/>
+          </a:lnRef>
+          <a:fillRef idx="3">
+            <a:schemeClr val="accent1"/>
+          </a:fillRef>
+          <a:effectRef idx="2">
+            <a:schemeClr val="accent1"/>
+          </a:effectRef>
+          <a:fontRef idx="minor">
+            <a:schemeClr val="lt1"/>
+          </a:fontRef>
+        </p:style>
+        <p:txBody>
+          <a:bodyPr rtlCol="0" anchor="ctr"/>
+          <a:lstStyle/>
+          <a:p>
+            <a:pPr algn="ctr"/>
+          </a:p>
+        </p:txBody>
+      </p:sp>
+      <p:sp>
+        <p:nvSpPr>
+          <p:cNvPr id="15" name="TextBox 14"/>
+          <p:cNvSpPr txBox="1"/>
+          <p:nvPr/>
+        </p:nvSpPr>
+        <p:spPr>
+          <a:xfrm>
+            <a:off x="6263640" y="1463040"/>
+            <a:ext cx="2240280" cy="1645920"/>
+          </a:xfrm>
+          <a:prstGeom prst="rect">
+            <a:avLst/>
+          </a:prstGeom>
+          <a:noFill/>
+        </p:spPr>
+        <p:txBody>
+          <a:bodyPr wrap="square">
+            <a:spAutoFit/>
+          </a:bodyPr>
+          <a:lstStyle/>
+          <a:p>
+            <a:pPr>
+              <a:defRPr b="1" sz="1000">
+                <a:solidFill>
+                  <a:srgbClr val="64748B"/>
+                </a:solidFill>
+              </a:defRPr>
+            </a:pPr>
+            <a:r>
+              <a:t>심의 리드타임 단축</a:t>
+            </a:r>
+          </a:p>
+          <a:p>
+            <a:pPr>
+              <a:spcBef>
+                <a:spcPts val="400"/>
+              </a:spcBef>
+              <a:defRPr b="1" sz="2000">
+                <a:solidFill>
+                  <a:srgbClr val="2563EB"/>
+                </a:solidFill>
+              </a:defRPr>
+            </a:pPr>
+            <a:r>
+              <a:t>85% 감축</a:t>
+            </a:r>
+          </a:p>
+          <a:p>
+            <a:pPr>
+              <a:spcBef>
+                <a:spcPts val="600"/>
+              </a:spcBef>
+              <a:defRPr sz="900">
+                <a:solidFill>
+                  <a:srgbClr val="334155"/>
+                </a:solidFill>
+              </a:defRPr>
+            </a:pPr>
+            <a:r>
+              <a:t>기존 3일(72시간) 소요</a:t>
+            </a:r>
+            <a:br/>
+            <a:r>
+              <a:t>→ 평균 2시간 이내 완료</a:t>
+            </a:r>
+          </a:p>
+        </p:txBody>
+      </p:sp>
+      <p:sp>
+        <p:nvSpPr>
+          <p:cNvPr id="16" name="Rounded Rectangle 15"/>
+          <p:cNvSpPr/>
+          <p:nvPr/>
+        </p:nvSpPr>
+        <p:spPr>
+          <a:xfrm>
+            <a:off x="8823960" y="1371600"/>
+            <a:ext cx="2514600" cy="1828800"/>
+          </a:xfrm>
+          <a:prstGeom prst="roundRect">
+            <a:avLst/>
+          </a:prstGeom>
+          <a:solidFill>
+            <a:srgbClr val="FFFFFF"/>
+          </a:solidFill>
+          <a:ln w="12700">
+            <a:solidFill>
+              <a:srgbClr val="E2E8F0"/>
+            </a:solidFill>
+          </a:ln>
+        </p:spPr>
+        <p:style>
+          <a:lnRef idx="1">
+            <a:schemeClr val="accent1"/>
+          </a:lnRef>
+          <a:fillRef idx="3">
+            <a:schemeClr val="accent1"/>
+          </a:fillRef>
+          <a:effectRef idx="2">
+            <a:schemeClr val="accent1"/>
+          </a:effectRef>
+          <a:fontRef idx="minor">
+            <a:schemeClr val="lt1"/>
+          </a:fontRef>
+        </p:style>
+        <p:txBody>
+          <a:bodyPr rtlCol="0" anchor="ctr"/>
+          <a:lstStyle/>
+          <a:p>
+            <a:pPr algn="ctr"/>
+          </a:p>
+        </p:txBody>
+      </p:sp>
+      <p:sp>
+        <p:nvSpPr>
+          <p:cNvPr id="17" name="TextBox 16"/>
+          <p:cNvSpPr txBox="1"/>
+          <p:nvPr/>
+        </p:nvSpPr>
+        <p:spPr>
+          <a:xfrm>
+            <a:off x="8961120" y="1463040"/>
+            <a:ext cx="2240280" cy="1645920"/>
+          </a:xfrm>
+          <a:prstGeom prst="rect">
+            <a:avLst/>
+          </a:prstGeom>
+          <a:noFill/>
+        </p:spPr>
+        <p:txBody>
+          <a:bodyPr wrap="square">
+            <a:spAutoFit/>
+          </a:bodyPr>
+          <a:lstStyle/>
+          <a:p>
+            <a:pPr>
+              <a:defRPr b="1" sz="1000">
+                <a:solidFill>
+                  <a:srgbClr val="64748B"/>
+                </a:solidFill>
+              </a:defRPr>
+            </a:pPr>
+            <a:r>
+              <a:t>연간 정량 공수 절감</a:t>
+            </a:r>
+          </a:p>
+          <a:p>
+            <a:pPr>
+              <a:spcBef>
+                <a:spcPts val="400"/>
+              </a:spcBef>
+              <a:defRPr b="1" sz="2000">
+                <a:solidFill>
+                  <a:srgbClr val="2563EB"/>
+                </a:solidFill>
+              </a:defRPr>
+            </a:pPr>
+            <a:r>
+              <a:t>1,840시간</a:t>
+            </a:r>
+          </a:p>
+          <a:p>
+            <a:pPr>
+              <a:spcBef>
+                <a:spcPts val="600"/>
+              </a:spcBef>
+              <a:defRPr sz="900">
+                <a:solidFill>
+                  <a:srgbClr val="334155"/>
+                </a:solidFill>
+              </a:defRPr>
+            </a:pPr>
+            <a:r>
+              <a:t>RA 검토 인력 연간 환산</a:t>
+            </a:r>
+            <a:br/>
+            <a:r>
+              <a:t>약 1.2억원 비용 절감 효과</a:t>
+            </a:r>
+          </a:p>
+        </p:txBody>
+      </p:sp>
+      <p:sp>
+        <p:nvSpPr>
+          <p:cNvPr id="18" name="Rounded Rectangle 17"/>
+          <p:cNvSpPr/>
+          <p:nvPr/>
+        </p:nvSpPr>
+        <p:spPr>
+          <a:xfrm>
+            <a:off x="731520" y="3474720"/>
+            <a:ext cx="10728655" cy="2560320"/>
+          </a:xfrm>
+          <a:prstGeom prst="roundRect">
+            <a:avLst/>
+          </a:prstGeom>
+          <a:solidFill>
+            <a:srgbClr val="F8FAFC"/>
+          </a:solidFill>
+          <a:ln w="12700">
+            <a:solidFill>
+              <a:srgbClr val="E2E8F0"/>
+            </a:solidFill>
+          </a:ln>
+        </p:spPr>
+        <p:style>
+          <a:lnRef idx="1">
+            <a:schemeClr val="accent1"/>
+          </a:lnRef>
+          <a:fillRef idx="3">
+            <a:schemeClr val="accent1"/>
+          </a:fillRef>
+          <a:effectRef idx="2">
+            <a:schemeClr val="accent1"/>
+          </a:effectRef>
+          <a:fontRef idx="minor">
+            <a:schemeClr val="lt1"/>
+          </a:fontRef>
+        </p:style>
+        <p:txBody>
+          <a:bodyPr rtlCol="0" anchor="ctr"/>
+          <a:lstStyle/>
+          <a:p>
+            <a:pPr algn="ctr"/>
+          </a:p>
+        </p:txBody>
+      </p:sp>
+      <p:sp>
+        <p:nvSpPr>
+          <p:cNvPr id="19" name="TextBox 18"/>
+          <p:cNvSpPr txBox="1"/>
+          <p:nvPr/>
+        </p:nvSpPr>
+        <p:spPr>
+          <a:xfrm>
+            <a:off x="1005840" y="3611880"/>
+            <a:ext cx="10149840" cy="2286000"/>
+          </a:xfrm>
+          <a:prstGeom prst="rect">
+            <a:avLst/>
+          </a:prstGeom>
+          <a:noFill/>
+        </p:spPr>
+        <p:txBody>
+          <a:bodyPr wrap="square">
+            <a:spAutoFit/>
+          </a:bodyPr>
+          <a:lstStyle/>
+          <a:p>
+            <a:pPr>
+              <a:defRPr b="1" sz="1100">
+                <a:solidFill>
+                  <a:srgbClr val="0F172A"/>
+                </a:solidFill>
+              </a:defRPr>
+            </a:pPr>
+            <a:r>
+              <a:t>■ 비즈니스 정성적 기대효과 및 정착 방안</a:t>
+            </a:r>
+          </a:p>
+          <a:p>
+            <a:pPr>
+              <a:spcBef>
+                <a:spcPts val="400"/>
+              </a:spcBef>
+              <a:defRPr sz="950">
+                <a:solidFill>
+                  <a:srgbClr val="334155"/>
+                </a:solidFill>
+              </a:defRPr>
+            </a:pPr>
+            <a:r>
+              <a:t>• 규제 리스크 사전 원천 차단: 식약처 모니터링 적발 및 광고업무정지 행정처분 위험 0건화 달성.</a:t>
+            </a:r>
+          </a:p>
+          <a:p>
+            <a:pPr>
+              <a:spcBef>
+                <a:spcPts val="400"/>
+              </a:spcBef>
+              <a:defRPr sz="950">
+                <a:solidFill>
+                  <a:srgbClr val="334155"/>
+                </a:solidFill>
+              </a:defRPr>
+            </a:pPr>
+            <a:r>
+              <a:t>• 마케팅 캠페인 타임-투-마켓 가속화: 신제품 출시 및 긴급 프로모션 기획 시 심의 대기 시간을 즉시 단축하여 시장 선점 지원.</a:t>
+            </a:r>
+          </a:p>
+          <a:p>
+            <a:pPr>
+              <a:spcBef>
+                <a:spcPts val="400"/>
+              </a:spcBef>
+              <a:defRPr sz="950">
+                <a:solidFill>
+                  <a:srgbClr val="334155"/>
+                </a:solidFill>
+              </a:defRPr>
+            </a:pPr>
+            <a:r>
+              <a:t>• RA 심의 기준의 전사 표준화: 심의 담당자별 주관적 판단 편차를 배제하고 AI 룰셋 기반의 객관적·일관된 기준 수립.</a:t>
+            </a:r>
+          </a:p>
+          <a:p>
+            <a:pPr>
+              <a:spcBef>
+                <a:spcPts val="400"/>
+              </a:spcBef>
+              <a:defRPr sz="950">
+                <a:solidFill>
+                  <a:srgbClr val="334155"/>
+                </a:solidFill>
+              </a:defRPr>
+            </a:pPr>
+            <a:r>
+              <a:t>• 현업 만족도 조사 결과: 시범운영 참여 실무자 18명 대상 만족도 조사 결과 94.4점(100점 만점) 기록, 현업 즉시 정착 완료.</a:t>
+            </a:r>
+          </a:p>
+        </p:txBody>
+      </p:sp>
+    </p:spTree>
+  </p:cSld>
+  <p:clrMapOvr>
+    <a:masterClrMapping/>
+  </p:clrMapOvr>
+</p:sld>
+</file>
+
+<file path=ppt/slides/slide6.xml><?xml version="1.0" encoding="utf-8"?>
+<p:sld xmlns:a="http://schemas.openxmlformats.org/drawingml/2006/main" xmlns:p="http://schemas.openxmlformats.org/presentationml/2006/main" xmlns:r="http://schemas.openxmlformats.org/officeDocument/2006/relationships">
+  <p:cSld>
+    <p:spTree>
+      <p:nvGrpSpPr>
+        <p:cNvPr id="1" name=""/>
+        <p:cNvGrpSpPr/>
+        <p:nvPr/>
+      </p:nvGrpSpPr>
+      <p:grpSpPr/>
+      <p:sp>
+        <p:nvSpPr>
+          <p:cNvPr id="2" name="Rectangle 1"/>
+          <p:cNvSpPr/>
+          <p:nvPr/>
+        </p:nvSpPr>
+        <p:spPr>
+          <a:xfrm>
+            <a:off x="0" y="0"/>
+            <a:ext cx="12191695" cy="1005840"/>
+          </a:xfrm>
+          <a:prstGeom prst="rect">
+            <a:avLst/>
+          </a:prstGeom>
+          <a:solidFill>
+            <a:srgbClr val="FFFFFF"/>
+          </a:solidFill>
+          <a:ln w="12700">
+            <a:solidFill>
+              <a:srgbClr val="E2E8F0"/>
+            </a:solidFill>
+          </a:ln>
+        </p:spPr>
+        <p:style>
+          <a:lnRef idx="1">
+            <a:schemeClr val="accent1"/>
+          </a:lnRef>
+          <a:fillRef idx="3">
+            <a:schemeClr val="accent1"/>
+          </a:fillRef>
+          <a:effectRef idx="2">
+            <a:schemeClr val="accent1"/>
+          </a:effectRef>
+          <a:fontRef idx="minor">
+            <a:schemeClr val="lt1"/>
+          </a:fontRef>
+        </p:style>
+        <p:txBody>
+          <a:bodyPr rtlCol="0" anchor="ctr"/>
+          <a:lstStyle/>
+          <a:p>
+            <a:pPr algn="ctr"/>
+          </a:p>
+        </p:txBody>
+      </p:sp>
+      <p:sp>
+        <p:nvSpPr>
+          <p:cNvPr id="3" name="TextBox 2"/>
+          <p:cNvSpPr txBox="1"/>
+          <p:nvPr/>
+        </p:nvSpPr>
+        <p:spPr>
+          <a:xfrm>
+            <a:off x="731520" y="164592"/>
+            <a:ext cx="6400800" cy="274320"/>
+          </a:xfrm>
+          <a:prstGeom prst="rect">
+            <a:avLst/>
+          </a:prstGeom>
+          <a:noFill/>
+        </p:spPr>
+        <p:txBody>
+          <a:bodyPr wrap="none">
+            <a:spAutoFit/>
+          </a:bodyPr>
+          <a:lstStyle/>
+          <a:p>
+            <a:pPr>
+              <a:defRPr sz="1000" b="1">
+                <a:solidFill>
+                  <a:srgbClr val="2563EB"/>
+                </a:solidFill>
+              </a:defRPr>
+            </a:pPr>
+            <a:r>
+              <a:t>SyncGuard AI 사업 완료보고서  &gt;  5. 산출물 인계</a:t>
+            </a:r>
+          </a:p>
+        </p:txBody>
+      </p:sp>
+      <p:sp>
+        <p:nvSpPr>
+          <p:cNvPr id="4" name="TextBox 3"/>
+          <p:cNvSpPr txBox="1"/>
+          <p:nvPr/>
+        </p:nvSpPr>
+        <p:spPr>
+          <a:xfrm>
+            <a:off x="731520" y="411480"/>
+            <a:ext cx="7772400" cy="502920"/>
+          </a:xfrm>
+          <a:prstGeom prst="rect">
+            <a:avLst/>
+          </a:prstGeom>
+          <a:noFill/>
+        </p:spPr>
+        <p:txBody>
+          <a:bodyPr wrap="none">
+            <a:spAutoFit/>
+          </a:bodyPr>
+          <a:lstStyle/>
+          <a:p>
+            <a:pPr>
+              <a:defRPr sz="1800" b="1">
+                <a:solidFill>
+                  <a:srgbClr val="0F172A"/>
+                </a:solidFill>
+              </a:defRPr>
+            </a:pPr>
+            <a:r>
+              <a:t>5.1 프로젝트 전 단계 28종 산출물 최종 완비 및 인계 목록</a:t>
+            </a:r>
+          </a:p>
+        </p:txBody>
+      </p:sp>
+      <p:sp>
+        <p:nvSpPr>
+          <p:cNvPr id="5" name="TextBox 4"/>
+          <p:cNvSpPr txBox="1"/>
+          <p:nvPr/>
+        </p:nvSpPr>
+        <p:spPr>
+          <a:xfrm>
+            <a:off x="8229600" y="228600"/>
+            <a:ext cx="3200400" cy="548640"/>
+          </a:xfrm>
+          <a:prstGeom prst="rect">
+            <a:avLst/>
+          </a:prstGeom>
+          <a:noFill/>
+        </p:spPr>
+        <p:txBody>
+          <a:bodyPr wrap="none">
+            <a:spAutoFit/>
+          </a:bodyPr>
+          <a:lstStyle/>
+          <a:p>
+            <a:pPr algn="r">
+              <a:defRPr sz="1000" b="1">
+                <a:solidFill>
+                  <a:srgbClr val="1E293B"/>
+                </a:solidFill>
+              </a:defRPr>
+            </a:pPr>
+            <a:r>
+              <a:t>산출물 ID: EMP_IMP_080 | v1.0</a:t>
+            </a:r>
+          </a:p>
+        </p:txBody>
+      </p:sp>
+      <p:sp>
+        <p:nvSpPr>
+          <p:cNvPr id="6" name="Rectangle 5"/>
+          <p:cNvSpPr/>
+          <p:nvPr/>
+        </p:nvSpPr>
+        <p:spPr>
+          <a:xfrm>
+            <a:off x="0" y="6309360"/>
+            <a:ext cx="12191695" cy="548640"/>
+          </a:xfrm>
+          <a:prstGeom prst="rect">
+            <a:avLst/>
+          </a:prstGeom>
+          <a:solidFill>
+            <a:srgbClr val="F8FAFC"/>
+          </a:solidFill>
+          <a:ln w="12700">
+            <a:solidFill>
+              <a:srgbClr val="E2E8F0"/>
+            </a:solidFill>
+          </a:ln>
+        </p:spPr>
+        <p:style>
+          <a:lnRef idx="1">
+            <a:schemeClr val="accent1"/>
+          </a:lnRef>
+          <a:fillRef idx="3">
+            <a:schemeClr val="accent1"/>
+          </a:fillRef>
+          <a:effectRef idx="2">
+            <a:schemeClr val="accent1"/>
+          </a:effectRef>
+          <a:fontRef idx="minor">
+            <a:schemeClr val="lt1"/>
+          </a:fontRef>
+        </p:style>
+        <p:txBody>
+          <a:bodyPr rtlCol="0" anchor="ctr"/>
+          <a:lstStyle/>
+          <a:p>
+            <a:pPr algn="ctr"/>
+          </a:p>
+        </p:txBody>
+      </p:sp>
+      <p:sp>
+        <p:nvSpPr>
+          <p:cNvPr id="7" name="TextBox 6"/>
+          <p:cNvSpPr txBox="1"/>
+          <p:nvPr/>
+        </p:nvSpPr>
+        <p:spPr>
+          <a:xfrm>
+            <a:off x="731520" y="6355080"/>
+            <a:ext cx="5029200" cy="365760"/>
+          </a:xfrm>
+          <a:prstGeom prst="rect">
+            <a:avLst/>
+          </a:prstGeom>
+          <a:noFill/>
+        </p:spPr>
+        <p:txBody>
+          <a:bodyPr wrap="none">
+            <a:spAutoFit/>
+          </a:bodyPr>
+          <a:lstStyle/>
+          <a:p>
+            <a:pPr>
+              <a:defRPr sz="900">
+                <a:solidFill>
+                  <a:srgbClr val="64748B"/>
+                </a:solidFill>
+              </a:defRPr>
+            </a:pPr>
+            <a:r>
+              <a:t>SyncGuard AI | 프로젝트 최종 완수 및 검수 요청 종료보고서</a:t>
+            </a:r>
+          </a:p>
+        </p:txBody>
+      </p:sp>
+      <p:sp>
+        <p:nvSpPr>
+          <p:cNvPr id="8" name="TextBox 7"/>
+          <p:cNvSpPr txBox="1"/>
+          <p:nvPr/>
+        </p:nvSpPr>
+        <p:spPr>
+          <a:xfrm>
+            <a:off x="5486400" y="6355080"/>
+            <a:ext cx="1371600" cy="365760"/>
+          </a:xfrm>
+          <a:prstGeom prst="rect">
+            <a:avLst/>
+          </a:prstGeom>
+          <a:noFill/>
+        </p:spPr>
+        <p:txBody>
+          <a:bodyPr wrap="none">
+            <a:spAutoFit/>
+          </a:bodyPr>
+          <a:lstStyle/>
+          <a:p>
+            <a:pPr algn="ctr">
+              <a:defRPr sz="1000" b="1"/>
+            </a:pPr>
+            <a:r>
+              <a:t>6 / 8</a:t>
+            </a:r>
+          </a:p>
+        </p:txBody>
+      </p:sp>
+      <p:sp>
+        <p:nvSpPr>
+          <p:cNvPr id="9" name="TextBox 8"/>
+          <p:cNvSpPr txBox="1"/>
+          <p:nvPr/>
+        </p:nvSpPr>
+        <p:spPr>
+          <a:xfrm>
+            <a:off x="7315200" y="6355080"/>
+            <a:ext cx="4114800" cy="365760"/>
+          </a:xfrm>
+          <a:prstGeom prst="rect">
+            <a:avLst/>
+          </a:prstGeom>
+          <a:noFill/>
+        </p:spPr>
+        <p:txBody>
+          <a:bodyPr wrap="none">
+            <a:spAutoFit/>
+          </a:bodyPr>
+          <a:lstStyle/>
+          <a:p>
+            <a:pPr algn="r">
+              <a:defRPr sz="900" b="1">
+                <a:solidFill>
+                  <a:srgbClr val="2563EB"/>
+                </a:solidFill>
+              </a:defRPr>
+            </a:pPr>
+            <a:r>
+              <a:t>발주사: HANBIT GLOBAL   |   수행사: ㈜엠파시 (Empasy Inc.)</a:t>
+            </a:r>
+          </a:p>
+        </p:txBody>
+      </p:sp>
+      <p:graphicFrame>
+        <p:nvGraphicFramePr>
+          <p:cNvPr id="10" name="Table 9"/>
+          <p:cNvGraphicFramePr>
+            <a:graphicFrameLocks noGrp="1"/>
+          </p:cNvGraphicFramePr>
+          <p:nvPr/>
+        </p:nvGraphicFramePr>
+        <p:xfrm>
+          <a:off x="731520" y="1371600"/>
+          <a:ext cx="10728655" cy="4663440"/>
+        </p:xfrm>
+        <a:graphic>
+          <a:graphicData uri="http://schemas.openxmlformats.org/drawingml/2006/table">
+            <a:tbl>
+              <a:tblPr firstRow="1" bandRow="1">
+                <a:tableStyleId>{5C22544A-7EE6-4342-B048-85BDC9FD1C3A}</a:tableStyleId>
+              </a:tblPr>
+              <a:tblGrid>
+                <a:gridCol w="1645920"/>
+                <a:gridCol w="2011680"/>
+                <a:gridCol w="4389120"/>
+                <a:gridCol w="1280160"/>
+                <a:gridCol w="1401775"/>
+              </a:tblGrid>
+              <a:tr h="666205">
+                <a:tc>
+                  <a:txBody>
+                    <a:bodyPr/>
+                    <a:lstStyle/>
+                    <a:p>
+                      <a:pPr algn="ctr">
+                        <a:defRPr b="1" sz="1000">
+                          <a:solidFill>
+                            <a:srgbClr val="FFFFFF"/>
+                          </a:solidFill>
+                        </a:defRPr>
+                      </a:pPr>
+                      <a:r>
+                        <a:t>프로젝트 단계</a:t>
+                      </a:r>
+                    </a:p>
+                  </a:txBody>
+                  <a:tcPr>
+                    <a:solidFill>
+                      <a:srgbClr val="0F172A"/>
+                    </a:solidFill>
+                  </a:tcPr>
+                </a:tc>
+                <a:tc>
+                  <a:txBody>
+                    <a:bodyPr/>
+                    <a:lstStyle/>
+                    <a:p>
+                      <a:pPr algn="ctr">
+                        <a:defRPr b="1" sz="1000">
+                          <a:solidFill>
+                            <a:srgbClr val="FFFFFF"/>
+                          </a:solidFill>
+                        </a:defRPr>
+                      </a:pPr>
+                      <a:r>
+                        <a:t>산출물 ID</a:t>
+                      </a:r>
+                    </a:p>
+                  </a:txBody>
+                  <a:tcPr>
+                    <a:solidFill>
+                      <a:srgbClr val="0F172A"/>
+                    </a:solidFill>
+                  </a:tcPr>
+                </a:tc>
+                <a:tc>
+                  <a:txBody>
+                    <a:bodyPr/>
+                    <a:lstStyle/>
+                    <a:p>
+                      <a:pPr algn="ctr">
+                        <a:defRPr b="1" sz="1000">
+                          <a:solidFill>
+                            <a:srgbClr val="FFFFFF"/>
+                          </a:solidFill>
+                        </a:defRPr>
+                      </a:pPr>
+                      <a:r>
+                        <a:t>산출물 명칭 (Deliverable Name)</a:t>
+                      </a:r>
+                    </a:p>
+                  </a:txBody>
+                  <a:tcPr>
+                    <a:solidFill>
+                      <a:srgbClr val="0F172A"/>
+                    </a:solidFill>
+                  </a:tcPr>
+                </a:tc>
+                <a:tc>
+                  <a:txBody>
+                    <a:bodyPr/>
+                    <a:lstStyle/>
+                    <a:p>
+                      <a:pPr algn="ctr">
+                        <a:defRPr b="1" sz="1000">
+                          <a:solidFill>
+                            <a:srgbClr val="FFFFFF"/>
+                          </a:solidFill>
+                        </a:defRPr>
+                      </a:pPr>
+                      <a:r>
+                        <a:t>버전</a:t>
+                      </a:r>
+                    </a:p>
+                  </a:txBody>
+                  <a:tcPr>
+                    <a:solidFill>
+                      <a:srgbClr val="0F172A"/>
+                    </a:solidFill>
+                  </a:tcPr>
+                </a:tc>
+                <a:tc>
+                  <a:txBody>
+                    <a:bodyPr/>
+                    <a:lstStyle/>
+                    <a:p>
+                      <a:pPr algn="ctr">
+                        <a:defRPr b="1" sz="1000">
+                          <a:solidFill>
+                            <a:srgbClr val="FFFFFF"/>
+                          </a:solidFill>
+                        </a:defRPr>
+                      </a:pPr>
+                      <a:r>
+                        <a:t>인계 상태</a:t>
+                      </a:r>
+                    </a:p>
+                  </a:txBody>
+                  <a:tcPr>
+                    <a:solidFill>
+                      <a:srgbClr val="0F172A"/>
+                    </a:solidFill>
+                  </a:tcPr>
+                </a:tc>
+              </a:tr>
+              <a:tr h="666205">
+                <a:tc>
+                  <a:txBody>
+                    <a:bodyPr/>
+                    <a:lstStyle/>
+                    <a:p>
+                      <a:pPr algn="ctr">
+                        <a:defRPr sz="900" b="1">
+                          <a:solidFill>
+                            <a:srgbClr val="0F172A"/>
+                          </a:solidFill>
+                        </a:defRPr>
+                      </a:pPr>
+                      <a:r>
+                        <a:t>착수/분석 (4종)</a:t>
+                      </a:r>
+                    </a:p>
+                  </a:txBody>
+                  <a:tcPr>
+                    <a:solidFill>
+                      <a:srgbClr val="FFFFFF"/>
+                    </a:solidFill>
+                  </a:tcPr>
+                </a:tc>
+                <a:tc>
+                  <a:txBody>
+                    <a:bodyPr/>
+                    <a:lstStyle/>
+                    <a:p>
+                      <a:pPr algn="ctr">
+                        <a:defRPr sz="900">
+                          <a:solidFill>
+                            <a:srgbClr val="334155"/>
+                          </a:solidFill>
+                        </a:defRPr>
+                      </a:pPr>
+                      <a:r>
+                        <a:t>EMP_INT_010 / 020</a:t>
+                      </a:r>
+                      <a:br/>
+                      <a:r>
+                        <a:t>EMP_ANL_020 / 050</a:t>
+                      </a:r>
+                    </a:p>
+                  </a:txBody>
+                  <a:tcPr>
+                    <a:solidFill>
+                      <a:srgbClr val="FFFFFF"/>
+                    </a:solidFill>
+                  </a:tcPr>
+                </a:tc>
+                <a:tc>
+                  <a:txBody>
+                    <a:bodyPr/>
+                    <a:lstStyle/>
+                    <a:p>
+                      <a:pPr>
+                        <a:defRPr sz="900">
+                          <a:solidFill>
+                            <a:srgbClr val="334155"/>
+                          </a:solidFill>
+                        </a:defRPr>
+                      </a:pPr>
+                      <a:r>
+                        <a:t>사업수행계획서, 작업분할구조도(WBS)</a:t>
+                      </a:r>
+                      <a:br/>
+                      <a:r>
+                        <a:t>요구사항정의서, 연계규격협의서</a:t>
+                      </a:r>
+                    </a:p>
+                  </a:txBody>
+                  <a:tcPr>
+                    <a:solidFill>
+                      <a:srgbClr val="FFFFFF"/>
+                    </a:solidFill>
+                  </a:tcPr>
+                </a:tc>
+                <a:tc>
+                  <a:txBody>
+                    <a:bodyPr/>
+                    <a:lstStyle/>
+                    <a:p>
+                      <a:pPr algn="ctr">
+                        <a:defRPr sz="900">
+                          <a:solidFill>
+                            <a:srgbClr val="334155"/>
+                          </a:solidFill>
+                        </a:defRPr>
+                      </a:pPr>
+                      <a:r>
+                        <a:t>v1.0</a:t>
+                      </a:r>
+                    </a:p>
+                  </a:txBody>
+                  <a:tcPr>
+                    <a:solidFill>
+                      <a:srgbClr val="FFFFFF"/>
+                    </a:solidFill>
+                  </a:tcPr>
+                </a:tc>
+                <a:tc>
+                  <a:txBody>
+                    <a:bodyPr/>
+                    <a:lstStyle/>
+                    <a:p>
+                      <a:pPr algn="ctr">
+                        <a:defRPr sz="900" b="1">
+                          <a:solidFill>
+                            <a:srgbClr val="059669"/>
+                          </a:solidFill>
+                        </a:defRPr>
+                      </a:pPr>
+                      <a:r>
+                        <a:t>인계 완결 (100%)</a:t>
+                      </a:r>
+                    </a:p>
+                  </a:txBody>
+                  <a:tcPr>
+                    <a:solidFill>
+                      <a:srgbClr val="FFFFFF"/>
+                    </a:solidFill>
+                  </a:tcPr>
+                </a:tc>
+              </a:tr>
+              <a:tr h="666205">
+                <a:tc>
+                  <a:txBody>
+                    <a:bodyPr/>
+                    <a:lstStyle/>
+                    <a:p>
+                      <a:pPr algn="ctr">
+                        <a:defRPr sz="900" b="1">
+                          <a:solidFill>
+                            <a:srgbClr val="0F172A"/>
+                          </a:solidFill>
+                        </a:defRPr>
+                      </a:pPr>
+                      <a:r>
+                        <a:t>시스템 설계 (6종)</a:t>
+                      </a:r>
+                    </a:p>
+                  </a:txBody>
+                  <a:tcPr>
+                    <a:solidFill>
+                      <a:srgbClr val="F1F5F9"/>
+                    </a:solidFill>
+                  </a:tcPr>
+                </a:tc>
+                <a:tc>
+                  <a:txBody>
+                    <a:bodyPr/>
+                    <a:lstStyle/>
+                    <a:p>
+                      <a:pPr algn="ctr">
+                        <a:defRPr sz="900">
+                          <a:solidFill>
+                            <a:srgbClr val="334155"/>
+                          </a:solidFill>
+                        </a:defRPr>
+                      </a:pPr>
+                      <a:r>
+                        <a:t>EMP_DEG_010 / 050</a:t>
+                      </a:r>
+                      <a:br/>
+                      <a:r>
+                        <a:t>EMP_DEG_080 / 090</a:t>
+                      </a:r>
+                      <a:br/>
+                      <a:r>
+                        <a:t>EMP_DEG_120 / 150</a:t>
+                      </a:r>
+                    </a:p>
+                  </a:txBody>
+                  <a:tcPr>
+                    <a:solidFill>
+                      <a:srgbClr val="F1F5F9"/>
+                    </a:solidFill>
+                  </a:tcPr>
+                </a:tc>
+                <a:tc>
+                  <a:txBody>
+                    <a:bodyPr/>
+                    <a:lstStyle/>
+                    <a:p>
+                      <a:pPr>
+                        <a:defRPr sz="900">
+                          <a:solidFill>
+                            <a:srgbClr val="334155"/>
+                          </a:solidFill>
+                        </a:defRPr>
+                      </a:pPr>
+                      <a:r>
+                        <a:t>IA정의서, 화면설계서, DB설계서, 아키텍처정의서</a:t>
+                      </a:r>
+                      <a:br/>
+                      <a:r>
+                        <a:t>인터페이스정의서, AI판정·프롬프트설계서</a:t>
+                      </a:r>
+                    </a:p>
+                  </a:txBody>
+                  <a:tcPr>
+                    <a:solidFill>
+                      <a:srgbClr val="F1F5F9"/>
+                    </a:solidFill>
+                  </a:tcPr>
+                </a:tc>
+                <a:tc>
+                  <a:txBody>
+                    <a:bodyPr/>
+                    <a:lstStyle/>
+                    <a:p>
+                      <a:pPr algn="ctr">
+                        <a:defRPr sz="900">
+                          <a:solidFill>
+                            <a:srgbClr val="334155"/>
+                          </a:solidFill>
+                        </a:defRPr>
+                      </a:pPr>
+                      <a:r>
+                        <a:t>v1.0</a:t>
+                      </a:r>
+                    </a:p>
+                  </a:txBody>
+                  <a:tcPr>
+                    <a:solidFill>
+                      <a:srgbClr val="F1F5F9"/>
+                    </a:solidFill>
+                  </a:tcPr>
+                </a:tc>
+                <a:tc>
+                  <a:txBody>
+                    <a:bodyPr/>
+                    <a:lstStyle/>
+                    <a:p>
+                      <a:pPr algn="ctr">
+                        <a:defRPr sz="900" b="1">
+                          <a:solidFill>
+                            <a:srgbClr val="059669"/>
+                          </a:solidFill>
+                        </a:defRPr>
+                      </a:pPr>
+                      <a:r>
+                        <a:t>인계 완결 (100%)</a:t>
+                      </a:r>
+                    </a:p>
+                  </a:txBody>
+                  <a:tcPr>
+                    <a:solidFill>
+                      <a:srgbClr val="F1F5F9"/>
+                    </a:solidFill>
+                  </a:tcPr>
+                </a:tc>
+              </a:tr>
+              <a:tr h="666205">
+                <a:tc>
+                  <a:txBody>
+                    <a:bodyPr/>
+                    <a:lstStyle/>
+                    <a:p>
+                      <a:pPr algn="ctr">
+                        <a:defRPr sz="900" b="1">
+                          <a:solidFill>
+                            <a:srgbClr val="0F172A"/>
+                          </a:solidFill>
+                        </a:defRPr>
+                      </a:pPr>
+                      <a:r>
+                        <a:t>구현 및 연계 (5종)</a:t>
+                      </a:r>
+                    </a:p>
+                  </a:txBody>
+                  <a:tcPr>
+                    <a:solidFill>
+                      <a:srgbClr val="FFFFFF"/>
+                    </a:solidFill>
+                  </a:tcPr>
+                </a:tc>
+                <a:tc>
+                  <a:txBody>
+                    <a:bodyPr/>
+                    <a:lstStyle/>
+                    <a:p>
+                      <a:pPr algn="ctr">
+                        <a:defRPr sz="900">
+                          <a:solidFill>
+                            <a:srgbClr val="334155"/>
+                          </a:solidFill>
+                        </a:defRPr>
+                      </a:pPr>
+                      <a:r>
+                        <a:t>EMP_EXE_010 / 020</a:t>
+                      </a:r>
+                      <a:br/>
+                      <a:r>
+                        <a:t>EMP_EXE_030 / TST_010</a:t>
+                      </a:r>
+                      <a:br/>
+                      <a:r>
+                        <a:t>Git Repository</a:t>
+                      </a:r>
+                    </a:p>
+                  </a:txBody>
+                  <a:tcPr>
+                    <a:solidFill>
+                      <a:srgbClr val="FFFFFF"/>
+                    </a:solidFill>
+                  </a:tcPr>
+                </a:tc>
+                <a:tc>
+                  <a:txBody>
+                    <a:bodyPr/>
+                    <a:lstStyle/>
+                    <a:p>
+                      <a:pPr>
+                        <a:defRPr sz="900">
+                          <a:solidFill>
+                            <a:srgbClr val="334155"/>
+                          </a:solidFill>
+                        </a:defRPr>
+                      </a:pPr>
+                      <a:r>
+                        <a:t>규칙사전정의서, 프롬프트명세서, ProductLab연계명세서</a:t>
+                      </a:r>
+                      <a:br/>
+                      <a:r>
+                        <a:t>단위테스트케이스, 전체 애플리케이션 소스코드</a:t>
+                      </a:r>
+                    </a:p>
+                  </a:txBody>
+                  <a:tcPr>
+                    <a:solidFill>
+                      <a:srgbClr val="FFFFFF"/>
+                    </a:solidFill>
+                  </a:tcPr>
+                </a:tc>
+                <a:tc>
+                  <a:txBody>
+                    <a:bodyPr/>
+                    <a:lstStyle/>
+                    <a:p>
+                      <a:pPr algn="ctr">
+                        <a:defRPr sz="900">
+                          <a:solidFill>
+                            <a:srgbClr val="334155"/>
+                          </a:solidFill>
+                        </a:defRPr>
+                      </a:pPr>
+                      <a:r>
+                        <a:t>v1.0</a:t>
+                      </a:r>
+                    </a:p>
+                  </a:txBody>
+                  <a:tcPr>
+                    <a:solidFill>
+                      <a:srgbClr val="FFFFFF"/>
+                    </a:solidFill>
+                  </a:tcPr>
+                </a:tc>
+                <a:tc>
+                  <a:txBody>
+                    <a:bodyPr/>
+                    <a:lstStyle/>
+                    <a:p>
+                      <a:pPr algn="ctr">
+                        <a:defRPr sz="900" b="1">
+                          <a:solidFill>
+                            <a:srgbClr val="059669"/>
+                          </a:solidFill>
+                        </a:defRPr>
+                      </a:pPr>
+                      <a:r>
+                        <a:t>인계 완결 (100%)</a:t>
+                      </a:r>
+                    </a:p>
+                  </a:txBody>
+                  <a:tcPr>
+                    <a:solidFill>
+                      <a:srgbClr val="FFFFFF"/>
+                    </a:solidFill>
+                  </a:tcPr>
+                </a:tc>
+              </a:tr>
+              <a:tr h="666205">
+                <a:tc>
+                  <a:txBody>
+                    <a:bodyPr/>
+                    <a:lstStyle/>
+                    <a:p>
+                      <a:pPr algn="ctr">
+                        <a:defRPr sz="900" b="1">
+                          <a:solidFill>
+                            <a:srgbClr val="0F172A"/>
+                          </a:solidFill>
+                        </a:defRPr>
+                      </a:pPr>
+                      <a:r>
+                        <a:t>시험 및 검증 (4종)</a:t>
+                      </a:r>
+                    </a:p>
+                  </a:txBody>
+                  <a:tcPr>
+                    <a:solidFill>
+                      <a:srgbClr val="F1F5F9"/>
+                    </a:solidFill>
+                  </a:tcPr>
+                </a:tc>
+                <a:tc>
+                  <a:txBody>
+                    <a:bodyPr/>
+                    <a:lstStyle/>
+                    <a:p>
+                      <a:pPr algn="ctr">
+                        <a:defRPr sz="900">
+                          <a:solidFill>
+                            <a:srgbClr val="334155"/>
+                          </a:solidFill>
+                        </a:defRPr>
+                      </a:pPr>
+                      <a:r>
+                        <a:t>EMP_TST_020 / 030</a:t>
+                      </a:r>
+                      <a:br/>
+                      <a:r>
+                        <a:t>EMP_TST_040 / 050</a:t>
+                      </a:r>
+                    </a:p>
+                  </a:txBody>
+                  <a:tcPr>
+                    <a:solidFill>
+                      <a:srgbClr val="F1F5F9"/>
+                    </a:solidFill>
+                  </a:tcPr>
+                </a:tc>
+                <a:tc>
+                  <a:txBody>
+                    <a:bodyPr/>
+                    <a:lstStyle/>
+                    <a:p>
+                      <a:pPr>
+                        <a:defRPr sz="900">
+                          <a:solidFill>
+                            <a:srgbClr val="334155"/>
+                          </a:solidFill>
+                        </a:defRPr>
+                      </a:pPr>
+                      <a:r>
+                        <a:t>통합테스트시나리오, 보안점검결과서</a:t>
+                      </a:r>
+                      <a:br/>
+                      <a:r>
+                        <a:t>성능시험결과서, 골든셋평가보고서</a:t>
+                      </a:r>
+                    </a:p>
+                  </a:txBody>
+                  <a:tcPr>
+                    <a:solidFill>
+                      <a:srgbClr val="F1F5F9"/>
+                    </a:solidFill>
+                  </a:tcPr>
+                </a:tc>
+                <a:tc>
+                  <a:txBody>
+                    <a:bodyPr/>
+                    <a:lstStyle/>
+                    <a:p>
+                      <a:pPr algn="ctr">
+                        <a:defRPr sz="900">
+                          <a:solidFill>
+                            <a:srgbClr val="334155"/>
+                          </a:solidFill>
+                        </a:defRPr>
+                      </a:pPr>
+                      <a:r>
+                        <a:t>v1.0</a:t>
+                      </a:r>
+                    </a:p>
+                  </a:txBody>
+                  <a:tcPr>
+                    <a:solidFill>
+                      <a:srgbClr val="F1F5F9"/>
+                    </a:solidFill>
+                  </a:tcPr>
+                </a:tc>
+                <a:tc>
+                  <a:txBody>
+                    <a:bodyPr/>
+                    <a:lstStyle/>
+                    <a:p>
+                      <a:pPr algn="ctr">
+                        <a:defRPr sz="900" b="1">
+                          <a:solidFill>
+                            <a:srgbClr val="059669"/>
+                          </a:solidFill>
+                        </a:defRPr>
+                      </a:pPr>
+                      <a:r>
+                        <a:t>인계 완결 (100%)</a:t>
+                      </a:r>
+                    </a:p>
+                  </a:txBody>
+                  <a:tcPr>
+                    <a:solidFill>
+                      <a:srgbClr val="F1F5F9"/>
+                    </a:solidFill>
+                  </a:tcPr>
+                </a:tc>
+              </a:tr>
+              <a:tr h="666205">
+                <a:tc>
+                  <a:txBody>
+                    <a:bodyPr/>
+                    <a:lstStyle/>
+                    <a:p>
+                      <a:pPr algn="ctr">
+                        <a:defRPr sz="900" b="1">
+                          <a:solidFill>
+                            <a:srgbClr val="0F172A"/>
+                          </a:solidFill>
+                        </a:defRPr>
+                      </a:pPr>
+                      <a:r>
+                        <a:t>이행 및 운영 (5종)</a:t>
+                      </a:r>
+                    </a:p>
+                  </a:txBody>
+                  <a:tcPr>
+                    <a:solidFill>
+                      <a:srgbClr val="FFFFFF"/>
+                    </a:solidFill>
+                  </a:tcPr>
+                </a:tc>
+                <a:tc>
+                  <a:txBody>
+                    <a:bodyPr/>
+                    <a:lstStyle/>
+                    <a:p>
+                      <a:pPr algn="ctr">
+                        <a:defRPr sz="900">
+                          <a:solidFill>
+                            <a:srgbClr val="334155"/>
+                          </a:solidFill>
+                        </a:defRPr>
+                      </a:pPr>
+                      <a:r>
+                        <a:t>EMP_IMP_020 / 050</a:t>
+                      </a:r>
+                      <a:br/>
+                      <a:r>
+                        <a:t>EMP_IMP_060 / 070</a:t>
+                      </a:r>
+                      <a:br/>
+                      <a:r>
+                        <a:t>EMP_IMP_080 / 090</a:t>
+                      </a:r>
+                    </a:p>
+                  </a:txBody>
+                  <a:tcPr>
+                    <a:solidFill>
+                      <a:srgbClr val="FFFFFF"/>
+                    </a:solidFill>
+                  </a:tcPr>
+                </a:tc>
+                <a:tc>
+                  <a:txBody>
+                    <a:bodyPr/>
+                    <a:lstStyle/>
+                    <a:p>
+                      <a:pPr>
+                        <a:defRPr sz="900">
+                          <a:solidFill>
+                            <a:srgbClr val="334155"/>
+                          </a:solidFill>
+                        </a:defRPr>
+                      </a:pPr>
+                      <a:r>
+                        <a:t>이행체크리스트, 사용자매뉴얼, 운영자매뉴얼</a:t>
+                      </a:r>
+                      <a:br/>
+                      <a:r>
+                        <a:t>교육결과보고서, 시범운영결과보고서, 종료보고서</a:t>
+                      </a:r>
+                    </a:p>
+                  </a:txBody>
+                  <a:tcPr>
+                    <a:solidFill>
+                      <a:srgbClr val="FFFFFF"/>
+                    </a:solidFill>
+                  </a:tcPr>
+                </a:tc>
+                <a:tc>
+                  <a:txBody>
+                    <a:bodyPr/>
+                    <a:lstStyle/>
+                    <a:p>
+                      <a:pPr algn="ctr">
+                        <a:defRPr sz="900">
+                          <a:solidFill>
+                            <a:srgbClr val="334155"/>
+                          </a:solidFill>
+                        </a:defRPr>
+                      </a:pPr>
+                      <a:r>
+                        <a:t>v1.0</a:t>
+                      </a:r>
+                    </a:p>
+                  </a:txBody>
+                  <a:tcPr>
+                    <a:solidFill>
+                      <a:srgbClr val="FFFFFF"/>
+                    </a:solidFill>
+                  </a:tcPr>
+                </a:tc>
+                <a:tc>
+                  <a:txBody>
+                    <a:bodyPr/>
+                    <a:lstStyle/>
+                    <a:p>
+                      <a:pPr algn="ctr">
+                        <a:defRPr sz="900" b="1">
+                          <a:solidFill>
+                            <a:srgbClr val="059669"/>
+                          </a:solidFill>
+                        </a:defRPr>
+                      </a:pPr>
+                      <a:r>
+                        <a:t>인계 완결 (100%)</a:t>
+                      </a:r>
+                    </a:p>
+                  </a:txBody>
+                  <a:tcPr>
+                    <a:solidFill>
+                      <a:srgbClr val="FFFFFF"/>
+                    </a:solidFill>
+                  </a:tcPr>
+                </a:tc>
+              </a:tr>
+              <a:tr h="666210">
+                <a:tc>
+                  <a:txBody>
+                    <a:bodyPr/>
+                    <a:lstStyle/>
+                    <a:p>
+                      <a:pPr algn="ctr">
+                        <a:defRPr sz="900" b="1">
+                          <a:solidFill>
+                            <a:srgbClr val="0F172A"/>
+                          </a:solidFill>
+                        </a:defRPr>
+                      </a:pPr>
+                      <a:r>
+                        <a:t>사업 관리 (4종)</a:t>
+                      </a:r>
+                    </a:p>
+                  </a:txBody>
+                  <a:tcPr>
+                    <a:solidFill>
+                      <a:srgbClr val="F1F5F9"/>
+                    </a:solidFill>
+                  </a:tcPr>
+                </a:tc>
+                <a:tc>
+                  <a:txBody>
+                    <a:bodyPr/>
+                    <a:lstStyle/>
+                    <a:p>
+                      <a:pPr algn="ctr">
+                        <a:defRPr sz="900">
+                          <a:solidFill>
+                            <a:srgbClr val="334155"/>
+                          </a:solidFill>
+                        </a:defRPr>
+                      </a:pPr>
+                      <a:r>
+                        <a:t>EMP_MAN_010 / 020</a:t>
+                      </a:r>
+                      <a:br/>
+                      <a:r>
+                        <a:t>EMP_MAN_030 / 040</a:t>
+                      </a:r>
+                      <a:br/>
+                      <a:r>
+                        <a:t>EMP_MAN_060</a:t>
+                      </a:r>
+                    </a:p>
+                  </a:txBody>
+                  <a:tcPr>
+                    <a:solidFill>
+                      <a:srgbClr val="F1F5F9"/>
+                    </a:solidFill>
+                  </a:tcPr>
+                </a:tc>
+                <a:tc>
+                  <a:txBody>
+                    <a:bodyPr/>
+                    <a:lstStyle/>
+                    <a:p>
+                      <a:pPr>
+                        <a:defRPr sz="900">
+                          <a:solidFill>
+                            <a:srgbClr val="334155"/>
+                          </a:solidFill>
+                        </a:defRPr>
+                      </a:pPr>
+                      <a:r>
+                        <a:t>주간업무보고서, 회의록, 이슈관리대장</a:t>
+                      </a:r>
+                      <a:br/>
+                      <a:r>
+                        <a:t>결함관리대장, 변경관리대장</a:t>
+                      </a:r>
+                    </a:p>
+                  </a:txBody>
+                  <a:tcPr>
+                    <a:solidFill>
+                      <a:srgbClr val="F1F5F9"/>
+                    </a:solidFill>
+                  </a:tcPr>
+                </a:tc>
+                <a:tc>
+                  <a:txBody>
+                    <a:bodyPr/>
+                    <a:lstStyle/>
+                    <a:p>
+                      <a:pPr algn="ctr">
+                        <a:defRPr sz="900">
+                          <a:solidFill>
+                            <a:srgbClr val="334155"/>
+                          </a:solidFill>
+                        </a:defRPr>
+                      </a:pPr>
+                      <a:r>
+                        <a:t>v1.0</a:t>
+                      </a:r>
+                    </a:p>
+                  </a:txBody>
+                  <a:tcPr>
+                    <a:solidFill>
+                      <a:srgbClr val="F1F5F9"/>
+                    </a:solidFill>
+                  </a:tcPr>
+                </a:tc>
+                <a:tc>
+                  <a:txBody>
+                    <a:bodyPr/>
+                    <a:lstStyle/>
+                    <a:p>
+                      <a:pPr algn="ctr">
+                        <a:defRPr sz="900" b="1">
+                          <a:solidFill>
+                            <a:srgbClr val="059669"/>
+                          </a:solidFill>
+                        </a:defRPr>
+                      </a:pPr>
+                      <a:r>
+                        <a:t>인계 완결 (100%)</a:t>
+                      </a:r>
+                    </a:p>
+                  </a:txBody>
+                  <a:tcPr>
+                    <a:solidFill>
+                      <a:srgbClr val="F1F5F9"/>
+                    </a:solidFill>
+                  </a:tcPr>
+                </a:tc>
+              </a:tr>
+            </a:tbl>
+          </a:graphicData>
+        </a:graphic>
+      </p:graphicFrame>
+    </p:spTree>
+  </p:cSld>
+  <p:clrMapOvr>
+    <a:masterClrMapping/>
+  </p:clrMapOvr>
+</p:sld>
+</file>
+
+<file path=ppt/slides/slide7.xml><?xml version="1.0" encoding="utf-8"?>
+<p:sld xmlns:a="http://schemas.openxmlformats.org/drawingml/2006/main" xmlns:p="http://schemas.openxmlformats.org/presentationml/2006/main" xmlns:r="http://schemas.openxmlformats.org/officeDocument/2006/relationships">
+  <p:cSld>
+    <p:spTree>
+      <p:nvGrpSpPr>
+        <p:cNvPr id="1" name=""/>
+        <p:cNvGrpSpPr/>
+        <p:nvPr/>
+      </p:nvGrpSpPr>
+      <p:grpSpPr/>
+      <p:sp>
+        <p:nvSpPr>
+          <p:cNvPr id="2" name="Rectangle 1"/>
+          <p:cNvSpPr/>
+          <p:nvPr/>
+        </p:nvSpPr>
+        <p:spPr>
+          <a:xfrm>
+            <a:off x="0" y="0"/>
+            <a:ext cx="12191695" cy="1005840"/>
+          </a:xfrm>
+          <a:prstGeom prst="rect">
+            <a:avLst/>
+          </a:prstGeom>
+          <a:solidFill>
+            <a:srgbClr val="FFFFFF"/>
+          </a:solidFill>
+          <a:ln w="12700">
+            <a:solidFill>
+              <a:srgbClr val="E2E8F0"/>
+            </a:solidFill>
+          </a:ln>
+        </p:spPr>
+        <p:style>
+          <a:lnRef idx="1">
+            <a:schemeClr val="accent1"/>
+          </a:lnRef>
+          <a:fillRef idx="3">
+            <a:schemeClr val="accent1"/>
+          </a:fillRef>
+          <a:effectRef idx="2">
+            <a:schemeClr val="accent1"/>
+          </a:effectRef>
+          <a:fontRef idx="minor">
+            <a:schemeClr val="lt1"/>
+          </a:fontRef>
+        </p:style>
+        <p:txBody>
+          <a:bodyPr rtlCol="0" anchor="ctr"/>
+          <a:lstStyle/>
+          <a:p>
+            <a:pPr algn="ctr"/>
+          </a:p>
+        </p:txBody>
+      </p:sp>
+      <p:sp>
+        <p:nvSpPr>
+          <p:cNvPr id="3" name="TextBox 2"/>
+          <p:cNvSpPr txBox="1"/>
+          <p:nvPr/>
+        </p:nvSpPr>
+        <p:spPr>
+          <a:xfrm>
+            <a:off x="731520" y="164592"/>
+            <a:ext cx="6400800" cy="274320"/>
+          </a:xfrm>
+          <a:prstGeom prst="rect">
+            <a:avLst/>
+          </a:prstGeom>
+          <a:noFill/>
+        </p:spPr>
+        <p:txBody>
+          <a:bodyPr wrap="none">
+            <a:spAutoFit/>
+          </a:bodyPr>
+          <a:lstStyle/>
+          <a:p>
+            <a:pPr>
+              <a:defRPr sz="1000" b="1">
+                <a:solidFill>
+                  <a:srgbClr val="2563EB"/>
+                </a:solidFill>
+              </a:defRPr>
+            </a:pPr>
+            <a:r>
+              <a:t>SyncGuard AI 사업 완료보고서  &gt;  6. 유지보수 및 지원</a:t>
+            </a:r>
+          </a:p>
+        </p:txBody>
+      </p:sp>
+      <p:sp>
+        <p:nvSpPr>
+          <p:cNvPr id="4" name="TextBox 3"/>
+          <p:cNvSpPr txBox="1"/>
+          <p:nvPr/>
+        </p:nvSpPr>
+        <p:spPr>
+          <a:xfrm>
+            <a:off x="731520" y="411480"/>
+            <a:ext cx="7772400" cy="502920"/>
+          </a:xfrm>
+          <a:prstGeom prst="rect">
+            <a:avLst/>
+          </a:prstGeom>
+          <a:noFill/>
+        </p:spPr>
+        <p:txBody>
+          <a:bodyPr wrap="none">
+            <a:spAutoFit/>
+          </a:bodyPr>
+          <a:lstStyle/>
+          <a:p>
+            <a:pPr>
+              <a:defRPr sz="1800" b="1">
+                <a:solidFill>
+                  <a:srgbClr val="0F172A"/>
+                </a:solidFill>
+              </a:defRPr>
+            </a:pPr>
+            <a:r>
+              <a:t>6.1 무상 하자보수 지원 체계 및 장애 대응 SLA 수립</a:t>
+            </a:r>
+          </a:p>
+        </p:txBody>
+      </p:sp>
+      <p:sp>
+        <p:nvSpPr>
+          <p:cNvPr id="5" name="TextBox 4"/>
+          <p:cNvSpPr txBox="1"/>
+          <p:nvPr/>
+        </p:nvSpPr>
+        <p:spPr>
+          <a:xfrm>
+            <a:off x="8229600" y="228600"/>
+            <a:ext cx="3200400" cy="548640"/>
+          </a:xfrm>
+          <a:prstGeom prst="rect">
+            <a:avLst/>
+          </a:prstGeom>
+          <a:noFill/>
+        </p:spPr>
+        <p:txBody>
+          <a:bodyPr wrap="none">
+            <a:spAutoFit/>
+          </a:bodyPr>
+          <a:lstStyle/>
+          <a:p>
+            <a:pPr algn="r">
+              <a:defRPr sz="1000" b="1">
+                <a:solidFill>
+                  <a:srgbClr val="1E293B"/>
+                </a:solidFill>
+              </a:defRPr>
+            </a:pPr>
+            <a:r>
+              <a:t>산출물 ID: EMP_IMP_080 | v1.0</a:t>
+            </a:r>
+          </a:p>
+        </p:txBody>
+      </p:sp>
+      <p:sp>
+        <p:nvSpPr>
+          <p:cNvPr id="6" name="Rectangle 5"/>
+          <p:cNvSpPr/>
+          <p:nvPr/>
+        </p:nvSpPr>
+        <p:spPr>
+          <a:xfrm>
+            <a:off x="0" y="6309360"/>
+            <a:ext cx="12191695" cy="548640"/>
+          </a:xfrm>
+          <a:prstGeom prst="rect">
+            <a:avLst/>
+          </a:prstGeom>
+          <a:solidFill>
+            <a:srgbClr val="F8FAFC"/>
+          </a:solidFill>
+          <a:ln w="12700">
+            <a:solidFill>
+              <a:srgbClr val="E2E8F0"/>
+            </a:solidFill>
+          </a:ln>
+        </p:spPr>
+        <p:style>
+          <a:lnRef idx="1">
+            <a:schemeClr val="accent1"/>
+          </a:lnRef>
+          <a:fillRef idx="3">
+            <a:schemeClr val="accent1"/>
+          </a:fillRef>
+          <a:effectRef idx="2">
+            <a:schemeClr val="accent1"/>
+          </a:effectRef>
+          <a:fontRef idx="minor">
+            <a:schemeClr val="lt1"/>
+          </a:fontRef>
+        </p:style>
+        <p:txBody>
+          <a:bodyPr rtlCol="0" anchor="ctr"/>
+          <a:lstStyle/>
+          <a:p>
+            <a:pPr algn="ctr"/>
+          </a:p>
+        </p:txBody>
+      </p:sp>
+      <p:sp>
+        <p:nvSpPr>
+          <p:cNvPr id="7" name="TextBox 6"/>
+          <p:cNvSpPr txBox="1"/>
+          <p:nvPr/>
+        </p:nvSpPr>
+        <p:spPr>
+          <a:xfrm>
+            <a:off x="731520" y="6355080"/>
+            <a:ext cx="5029200" cy="365760"/>
+          </a:xfrm>
+          <a:prstGeom prst="rect">
+            <a:avLst/>
+          </a:prstGeom>
+          <a:noFill/>
+        </p:spPr>
+        <p:txBody>
+          <a:bodyPr wrap="none">
+            <a:spAutoFit/>
+          </a:bodyPr>
+          <a:lstStyle/>
+          <a:p>
+            <a:pPr>
+              <a:defRPr sz="900">
+                <a:solidFill>
+                  <a:srgbClr val="64748B"/>
+                </a:solidFill>
+              </a:defRPr>
+            </a:pPr>
+            <a:r>
+              <a:t>SyncGuard AI | 프로젝트 최종 완수 및 검수 요청 종료보고서</a:t>
+            </a:r>
+          </a:p>
+        </p:txBody>
+      </p:sp>
+      <p:sp>
+        <p:nvSpPr>
+          <p:cNvPr id="8" name="TextBox 7"/>
+          <p:cNvSpPr txBox="1"/>
+          <p:nvPr/>
+        </p:nvSpPr>
+        <p:spPr>
+          <a:xfrm>
+            <a:off x="5486400" y="6355080"/>
+            <a:ext cx="1371600" cy="365760"/>
+          </a:xfrm>
+          <a:prstGeom prst="rect">
+            <a:avLst/>
+          </a:prstGeom>
+          <a:noFill/>
+        </p:spPr>
+        <p:txBody>
+          <a:bodyPr wrap="none">
+            <a:spAutoFit/>
+          </a:bodyPr>
+          <a:lstStyle/>
+          <a:p>
+            <a:pPr algn="ctr">
+              <a:defRPr sz="1000" b="1"/>
+            </a:pPr>
+            <a:r>
+              <a:t>7 / 8</a:t>
+            </a:r>
+          </a:p>
+        </p:txBody>
+      </p:sp>
+      <p:sp>
+        <p:nvSpPr>
+          <p:cNvPr id="9" name="TextBox 8"/>
+          <p:cNvSpPr txBox="1"/>
+          <p:nvPr/>
+        </p:nvSpPr>
+        <p:spPr>
+          <a:xfrm>
+            <a:off x="7315200" y="6355080"/>
+            <a:ext cx="4114800" cy="365760"/>
+          </a:xfrm>
+          <a:prstGeom prst="rect">
+            <a:avLst/>
+          </a:prstGeom>
+          <a:noFill/>
+        </p:spPr>
+        <p:txBody>
+          <a:bodyPr wrap="none">
+            <a:spAutoFit/>
+          </a:bodyPr>
+          <a:lstStyle/>
+          <a:p>
+            <a:pPr algn="r">
+              <a:defRPr sz="900" b="1">
+                <a:solidFill>
+                  <a:srgbClr val="2563EB"/>
+                </a:solidFill>
+              </a:defRPr>
+            </a:pPr>
+            <a:r>
+              <a:t>발주사: HANBIT GLOBAL   |   수행사: ㈜엠파시 (Empasy Inc.)</a:t>
+            </a:r>
+          </a:p>
+        </p:txBody>
+      </p:sp>
+      <p:sp>
+        <p:nvSpPr>
+          <p:cNvPr id="10" name="Rounded Rectangle 9"/>
+          <p:cNvSpPr/>
+          <p:nvPr/>
+        </p:nvSpPr>
+        <p:spPr>
+          <a:xfrm>
+            <a:off x="731520" y="1371600"/>
+            <a:ext cx="5257800" cy="2194560"/>
+          </a:xfrm>
+          <a:prstGeom prst="roundRect">
+            <a:avLst/>
+          </a:prstGeom>
+          <a:solidFill>
+            <a:srgbClr val="FFFFFF"/>
+          </a:solidFill>
+          <a:ln w="19050">
+            <a:solidFill>
+              <a:srgbClr val="2563EB"/>
+            </a:solidFill>
+          </a:ln>
+        </p:spPr>
+        <p:style>
+          <a:lnRef idx="1">
+            <a:schemeClr val="accent1"/>
+          </a:lnRef>
+          <a:fillRef idx="3">
+            <a:schemeClr val="accent1"/>
+          </a:fillRef>
+          <a:effectRef idx="2">
+            <a:schemeClr val="accent1"/>
+          </a:effectRef>
+          <a:fontRef idx="minor">
+            <a:schemeClr val="lt1"/>
+          </a:fontRef>
+        </p:style>
+        <p:txBody>
+          <a:bodyPr rtlCol="0" anchor="ctr"/>
+          <a:lstStyle/>
+          <a:p>
+            <a:pPr algn="ctr"/>
+          </a:p>
+        </p:txBody>
+      </p:sp>
+      <p:sp>
+        <p:nvSpPr>
+          <p:cNvPr id="11" name="TextBox 10"/>
+          <p:cNvSpPr txBox="1"/>
+          <p:nvPr/>
+        </p:nvSpPr>
+        <p:spPr>
+          <a:xfrm>
+            <a:off x="914400" y="1508760"/>
+            <a:ext cx="4892040" cy="1920240"/>
+          </a:xfrm>
+          <a:prstGeom prst="rect">
+            <a:avLst/>
+          </a:prstGeom>
+          <a:noFill/>
+        </p:spPr>
+        <p:txBody>
+          <a:bodyPr wrap="square">
+            <a:spAutoFit/>
+          </a:bodyPr>
+          <a:lstStyle/>
+          <a:p>
+            <a:pPr>
+              <a:defRPr b="1" sz="1100">
+                <a:solidFill>
+                  <a:srgbClr val="2563EB"/>
+                </a:solidFill>
+              </a:defRPr>
+            </a:pPr>
+            <a:r>
+              <a:t>1. 무상 하자보수 기간 및 범위</a:t>
+            </a:r>
+          </a:p>
+          <a:p>
+            <a:pPr>
+              <a:spcBef>
+                <a:spcPts val="300"/>
+              </a:spcBef>
+              <a:defRPr sz="950">
+                <a:solidFill>
+                  <a:srgbClr val="334155"/>
+                </a:solidFill>
+              </a:defRPr>
+            </a:pPr>
+            <a:r>
+              <a:t>• 기간: 2026.10.17 ~ 2027.01.16 (최종 검수 후 3개월)</a:t>
+            </a:r>
+          </a:p>
+          <a:p>
+            <a:pPr>
+              <a:spcBef>
+                <a:spcPts val="300"/>
+              </a:spcBef>
+              <a:defRPr sz="950">
+                <a:solidFill>
+                  <a:srgbClr val="334155"/>
+                </a:solidFill>
+              </a:defRPr>
+            </a:pPr>
+            <a:r>
+              <a:t>• 범위: 시스템 오류, AI 판정 로직 결함, 연계 장애 전액 무상 조치</a:t>
+            </a:r>
+          </a:p>
+          <a:p>
+            <a:pPr>
+              <a:spcBef>
+                <a:spcPts val="300"/>
+              </a:spcBef>
+              <a:defRPr sz="950">
+                <a:solidFill>
+                  <a:srgbClr val="334155"/>
+                </a:solidFill>
+              </a:defRPr>
+            </a:pPr>
+            <a:r>
+              <a:t>• 전담 엔지니어 및 AI 개발팀 1선/2선 지원 체계 유지</a:t>
+            </a:r>
+          </a:p>
+        </p:txBody>
+      </p:sp>
+      <p:sp>
+        <p:nvSpPr>
+          <p:cNvPr id="12" name="Rounded Rectangle 11"/>
+          <p:cNvSpPr/>
+          <p:nvPr/>
+        </p:nvSpPr>
+        <p:spPr>
+          <a:xfrm>
+            <a:off x="6172200" y="1371600"/>
+            <a:ext cx="5257800" cy="2194560"/>
+          </a:xfrm>
+          <a:prstGeom prst="roundRect">
+            <a:avLst/>
+          </a:prstGeom>
+          <a:solidFill>
+            <a:srgbClr val="FFFFFF"/>
+          </a:solidFill>
+          <a:ln w="19050">
+            <a:solidFill>
+              <a:srgbClr val="0F172A"/>
+            </a:solidFill>
+          </a:ln>
+        </p:spPr>
+        <p:style>
+          <a:lnRef idx="1">
+            <a:schemeClr val="accent1"/>
+          </a:lnRef>
+          <a:fillRef idx="3">
+            <a:schemeClr val="accent1"/>
+          </a:fillRef>
+          <a:effectRef idx="2">
+            <a:schemeClr val="accent1"/>
+          </a:effectRef>
+          <a:fontRef idx="minor">
+            <a:schemeClr val="lt1"/>
+          </a:fontRef>
+        </p:style>
+        <p:txBody>
+          <a:bodyPr rtlCol="0" anchor="ctr"/>
+          <a:lstStyle/>
+          <a:p>
+            <a:pPr algn="ctr"/>
+          </a:p>
+        </p:txBody>
+      </p:sp>
+      <p:sp>
+        <p:nvSpPr>
+          <p:cNvPr id="13" name="TextBox 12"/>
+          <p:cNvSpPr txBox="1"/>
+          <p:nvPr/>
+        </p:nvSpPr>
+        <p:spPr>
+          <a:xfrm>
+            <a:off x="6355080" y="1508760"/>
+            <a:ext cx="4892040" cy="1920240"/>
+          </a:xfrm>
+          <a:prstGeom prst="rect">
+            <a:avLst/>
+          </a:prstGeom>
+          <a:noFill/>
+        </p:spPr>
+        <p:txBody>
+          <a:bodyPr wrap="square">
+            <a:spAutoFit/>
+          </a:bodyPr>
+          <a:lstStyle/>
+          <a:p>
+            <a:pPr>
+              <a:defRPr b="1" sz="1100">
+                <a:solidFill>
+                  <a:srgbClr val="0F172A"/>
+                </a:solidFill>
+              </a:defRPr>
+            </a:pPr>
+            <a:r>
+              <a:t>2. 장애 등급별 대응 SLA 기준</a:t>
+            </a:r>
+          </a:p>
+          <a:p>
+            <a:pPr>
+              <a:spcBef>
+                <a:spcPts val="300"/>
+              </a:spcBef>
+              <a:defRPr sz="950">
+                <a:solidFill>
+                  <a:srgbClr val="334155"/>
+                </a:solidFill>
+              </a:defRPr>
+            </a:pPr>
+            <a:r>
+              <a:t>• 긴급 (P1, 시스템 마비/연계 단절): 접수 30분 내 착수, 2시간 내 해결</a:t>
+            </a:r>
+          </a:p>
+          <a:p>
+            <a:pPr>
+              <a:spcBef>
+                <a:spcPts val="300"/>
+              </a:spcBef>
+              <a:defRPr sz="950">
+                <a:solidFill>
+                  <a:srgbClr val="334155"/>
+                </a:solidFill>
+              </a:defRPr>
+            </a:pPr>
+            <a:r>
+              <a:t>• 중대 (P2, 일부 브랜드 심의 불가): 접수 1시간 내 착수, 4시간 내 해결</a:t>
+            </a:r>
+          </a:p>
+          <a:p>
+            <a:pPr>
+              <a:spcBef>
+                <a:spcPts val="300"/>
+              </a:spcBef>
+              <a:defRPr sz="950">
+                <a:solidFill>
+                  <a:srgbClr val="334155"/>
+                </a:solidFill>
+              </a:defRPr>
+            </a:pPr>
+            <a:r>
+              <a:t>• 일반 (P3, 경미한 UI/출력 오류): 접수 4시간 내 착수, 24시간 내 해결</a:t>
+            </a:r>
+          </a:p>
+        </p:txBody>
+      </p:sp>
+      <p:sp>
+        <p:nvSpPr>
+          <p:cNvPr id="14" name="Rounded Rectangle 13"/>
+          <p:cNvSpPr/>
+          <p:nvPr/>
+        </p:nvSpPr>
+        <p:spPr>
+          <a:xfrm>
+            <a:off x="731520" y="3749039"/>
+            <a:ext cx="5257800" cy="2194560"/>
+          </a:xfrm>
+          <a:prstGeom prst="roundRect">
+            <a:avLst/>
+          </a:prstGeom>
+          <a:solidFill>
+            <a:srgbClr val="FFFFFF"/>
+          </a:solidFill>
+          <a:ln w="19050">
+            <a:solidFill>
+              <a:srgbClr val="059669"/>
+            </a:solidFill>
+          </a:ln>
+        </p:spPr>
+        <p:style>
+          <a:lnRef idx="1">
+            <a:schemeClr val="accent1"/>
+          </a:lnRef>
+          <a:fillRef idx="3">
+            <a:schemeClr val="accent1"/>
+          </a:fillRef>
+          <a:effectRef idx="2">
+            <a:schemeClr val="accent1"/>
+          </a:effectRef>
+          <a:fontRef idx="minor">
+            <a:schemeClr val="lt1"/>
+          </a:fontRef>
+        </p:style>
+        <p:txBody>
+          <a:bodyPr rtlCol="0" anchor="ctr"/>
+          <a:lstStyle/>
+          <a:p>
+            <a:pPr algn="ctr"/>
+          </a:p>
+        </p:txBody>
+      </p:sp>
+      <p:sp>
+        <p:nvSpPr>
+          <p:cNvPr id="15" name="TextBox 14"/>
+          <p:cNvSpPr txBox="1"/>
+          <p:nvPr/>
+        </p:nvSpPr>
+        <p:spPr>
+          <a:xfrm>
+            <a:off x="914400" y="3886199"/>
+            <a:ext cx="4892040" cy="1920240"/>
+          </a:xfrm>
+          <a:prstGeom prst="rect">
+            <a:avLst/>
+          </a:prstGeom>
+          <a:noFill/>
+        </p:spPr>
+        <p:txBody>
+          <a:bodyPr wrap="square">
+            <a:spAutoFit/>
+          </a:bodyPr>
+          <a:lstStyle/>
+          <a:p>
+            <a:pPr>
+              <a:defRPr b="1" sz="1100">
+                <a:solidFill>
+                  <a:srgbClr val="059669"/>
+                </a:solidFill>
+              </a:defRPr>
+            </a:pPr>
+            <a:r>
+              <a:t>3. 정기 예방 점검 및 성능 최적화</a:t>
+            </a:r>
+          </a:p>
+          <a:p>
+            <a:pPr>
+              <a:spcBef>
+                <a:spcPts val="300"/>
+              </a:spcBef>
+              <a:defRPr sz="950">
+                <a:solidFill>
+                  <a:srgbClr val="334155"/>
+                </a:solidFill>
+              </a:defRPr>
+            </a:pPr>
+            <a:r>
+              <a:t>• 월 1회 정기 서버 리소스(CPU, 메모리, GPU, DB) 상태 점검</a:t>
+            </a:r>
+          </a:p>
+          <a:p>
+            <a:pPr>
+              <a:spcBef>
+                <a:spcPts val="300"/>
+              </a:spcBef>
+              <a:defRPr sz="950">
+                <a:solidFill>
+                  <a:srgbClr val="334155"/>
+                </a:solidFill>
+              </a:defRPr>
+            </a:pPr>
+            <a:r>
+              <a:t>• 분기 1회 AI 판정 골든셋 재평가 및 최신 판례 룰셋 업데이트</a:t>
+            </a:r>
+          </a:p>
+          <a:p>
+            <a:pPr>
+              <a:spcBef>
+                <a:spcPts val="300"/>
+              </a:spcBef>
+              <a:defRPr sz="950">
+                <a:solidFill>
+                  <a:srgbClr val="334155"/>
+                </a:solidFill>
+              </a:defRPr>
+            </a:pPr>
+            <a:r>
+              <a:t>• 백업 검증: PostgreSQL 일일 스냅샷 및 DB 백업 무결성 정기 확인</a:t>
+            </a:r>
+          </a:p>
+        </p:txBody>
+      </p:sp>
+      <p:sp>
+        <p:nvSpPr>
+          <p:cNvPr id="16" name="Rounded Rectangle 15"/>
+          <p:cNvSpPr/>
+          <p:nvPr/>
+        </p:nvSpPr>
+        <p:spPr>
+          <a:xfrm>
+            <a:off x="6172200" y="3749039"/>
+            <a:ext cx="5257800" cy="2194560"/>
+          </a:xfrm>
+          <a:prstGeom prst="roundRect">
+            <a:avLst/>
+          </a:prstGeom>
+          <a:solidFill>
+            <a:srgbClr val="FFFFFF"/>
+          </a:solidFill>
+          <a:ln w="19050">
+            <a:solidFill>
+              <a:srgbClr val="7C3AED"/>
+            </a:solidFill>
+          </a:ln>
+        </p:spPr>
+        <p:style>
+          <a:lnRef idx="1">
+            <a:schemeClr val="accent1"/>
+          </a:lnRef>
+          <a:fillRef idx="3">
+            <a:schemeClr val="accent1"/>
+          </a:fillRef>
+          <a:effectRef idx="2">
+            <a:schemeClr val="accent1"/>
+          </a:effectRef>
+          <a:fontRef idx="minor">
+            <a:schemeClr val="lt1"/>
+          </a:fontRef>
+        </p:style>
+        <p:txBody>
+          <a:bodyPr rtlCol="0" anchor="ctr"/>
+          <a:lstStyle/>
+          <a:p>
+            <a:pPr algn="ctr"/>
+          </a:p>
+        </p:txBody>
+      </p:sp>
+      <p:sp>
+        <p:nvSpPr>
+          <p:cNvPr id="17" name="TextBox 16"/>
+          <p:cNvSpPr txBox="1"/>
+          <p:nvPr/>
+        </p:nvSpPr>
+        <p:spPr>
+          <a:xfrm>
+            <a:off x="6355080" y="3886199"/>
+            <a:ext cx="4892040" cy="1920240"/>
+          </a:xfrm>
+          <a:prstGeom prst="rect">
+            <a:avLst/>
+          </a:prstGeom>
+          <a:noFill/>
+        </p:spPr>
+        <p:txBody>
+          <a:bodyPr wrap="square">
+            <a:spAutoFit/>
+          </a:bodyPr>
+          <a:lstStyle/>
+          <a:p>
+            <a:pPr>
+              <a:defRPr b="1" sz="1100">
+                <a:solidFill>
+                  <a:srgbClr val="7C3AED"/>
+                </a:solidFill>
+              </a:defRPr>
+            </a:pPr>
+            <a:r>
+              <a:t>4. 운영 인력 교육 및 기술 이전 완결</a:t>
+            </a:r>
+          </a:p>
+          <a:p>
+            <a:pPr>
+              <a:spcBef>
+                <a:spcPts val="300"/>
+              </a:spcBef>
+              <a:defRPr sz="950">
+                <a:solidFill>
+                  <a:srgbClr val="334155"/>
+                </a:solidFill>
+              </a:defRPr>
+            </a:pPr>
+            <a:r>
+              <a:t>• RA 실무자 대상 화면별 심의 실습 교육 완료 (18명 수료)</a:t>
+            </a:r>
+          </a:p>
+          <a:p>
+            <a:pPr>
+              <a:spcBef>
+                <a:spcPts val="300"/>
+              </a:spcBef>
+              <a:defRPr sz="950">
+                <a:solidFill>
+                  <a:srgbClr val="334155"/>
+                </a:solidFill>
+              </a:defRPr>
+            </a:pPr>
+            <a:r>
+              <a:t>• 시스템 운영자 대상 서버/AI 파이프라인 관리 교육 완료 (4명)</a:t>
+            </a:r>
+          </a:p>
+          <a:p>
+            <a:pPr>
+              <a:spcBef>
+                <a:spcPts val="300"/>
+              </a:spcBef>
+              <a:defRPr sz="950">
+                <a:solidFill>
+                  <a:srgbClr val="334155"/>
+                </a:solidFill>
+              </a:defRPr>
+            </a:pPr>
+            <a:r>
+              <a:t>• 매뉴얼 및 소스코드, 인수인계 문서 100% 전달 완료</a:t>
+            </a:r>
+          </a:p>
+        </p:txBody>
+      </p:sp>
+    </p:spTree>
+  </p:cSld>
+  <p:clrMapOvr>
+    <a:masterClrMapping/>
+  </p:clrMapOvr>
+</p:sld>
+</file>
+
+<file path=ppt/slides/slide8.xml><?xml version="1.0" encoding="utf-8"?>
+<p:sld xmlns:a="http://schemas.openxmlformats.org/drawingml/2006/main" xmlns:p="http://schemas.openxmlformats.org/presentationml/2006/main" xmlns:r="http://schemas.openxmlformats.org/officeDocument/2006/relationships">
+  <p:cSld>
+    <p:spTree>
+      <p:nvGrpSpPr>
+        <p:cNvPr id="1" name=""/>
+        <p:cNvGrpSpPr/>
+        <p:nvPr/>
+      </p:nvGrpSpPr>
+      <p:grpSpPr/>
+      <p:sp>
+        <p:nvSpPr>
+          <p:cNvPr id="2" name="Rectangle 1"/>
+          <p:cNvSpPr/>
+          <p:nvPr/>
+        </p:nvSpPr>
+        <p:spPr>
+          <a:xfrm>
+            <a:off x="0" y="0"/>
+            <a:ext cx="12191695" cy="1005840"/>
+          </a:xfrm>
+          <a:prstGeom prst="rect">
+            <a:avLst/>
+          </a:prstGeom>
+          <a:solidFill>
+            <a:srgbClr val="FFFFFF"/>
+          </a:solidFill>
+          <a:ln w="12700">
+            <a:solidFill>
+              <a:srgbClr val="E2E8F0"/>
+            </a:solidFill>
+          </a:ln>
+        </p:spPr>
+        <p:style>
+          <a:lnRef idx="1">
+            <a:schemeClr val="accent1"/>
+          </a:lnRef>
+          <a:fillRef idx="3">
+            <a:schemeClr val="accent1"/>
+          </a:fillRef>
+          <a:effectRef idx="2">
+            <a:schemeClr val="accent1"/>
+          </a:effectRef>
+          <a:fontRef idx="minor">
+            <a:schemeClr val="lt1"/>
+          </a:fontRef>
+        </p:style>
+        <p:txBody>
+          <a:bodyPr rtlCol="0" anchor="ctr"/>
+          <a:lstStyle/>
+          <a:p>
+            <a:pPr algn="ctr"/>
+          </a:p>
+        </p:txBody>
+      </p:sp>
+      <p:sp>
+        <p:nvSpPr>
+          <p:cNvPr id="3" name="TextBox 2"/>
+          <p:cNvSpPr txBox="1"/>
+          <p:nvPr/>
+        </p:nvSpPr>
+        <p:spPr>
+          <a:xfrm>
+            <a:off x="731520" y="164592"/>
+            <a:ext cx="6400800" cy="274320"/>
+          </a:xfrm>
+          <a:prstGeom prst="rect">
+            <a:avLst/>
+          </a:prstGeom>
+          <a:noFill/>
+        </p:spPr>
+        <p:txBody>
+          <a:bodyPr wrap="none">
+            <a:spAutoFit/>
+          </a:bodyPr>
+          <a:lstStyle/>
+          <a:p>
+            <a:pPr>
+              <a:defRPr sz="1000" b="1">
+                <a:solidFill>
+                  <a:srgbClr val="2563EB"/>
+                </a:solidFill>
+              </a:defRPr>
+            </a:pPr>
+            <a:r>
+              <a:t>SyncGuard AI 사업 완료보고서  &gt;  7. 검수 요청 및 승인</a:t>
+            </a:r>
+          </a:p>
+        </p:txBody>
+      </p:sp>
+      <p:sp>
+        <p:nvSpPr>
+          <p:cNvPr id="4" name="TextBox 3"/>
+          <p:cNvSpPr txBox="1"/>
+          <p:nvPr/>
+        </p:nvSpPr>
+        <p:spPr>
+          <a:xfrm>
+            <a:off x="731520" y="411480"/>
+            <a:ext cx="7772400" cy="502920"/>
+          </a:xfrm>
+          <a:prstGeom prst="rect">
+            <a:avLst/>
+          </a:prstGeom>
+          <a:noFill/>
+        </p:spPr>
+        <p:txBody>
+          <a:bodyPr wrap="none">
+            <a:spAutoFit/>
+          </a:bodyPr>
+          <a:lstStyle/>
+          <a:p>
+            <a:pPr>
+              <a:defRPr sz="1800" b="1">
+                <a:solidFill>
+                  <a:srgbClr val="0F172A"/>
+                </a:solidFill>
+              </a:defRPr>
+            </a:pPr>
+            <a:r>
+              <a:t>7.1 프로젝트 완료 승인 및 최종 검수 확인 서명</a:t>
+            </a:r>
+          </a:p>
+        </p:txBody>
+      </p:sp>
+      <p:sp>
+        <p:nvSpPr>
+          <p:cNvPr id="5" name="TextBox 4"/>
+          <p:cNvSpPr txBox="1"/>
+          <p:nvPr/>
+        </p:nvSpPr>
+        <p:spPr>
+          <a:xfrm>
+            <a:off x="8229600" y="228600"/>
+            <a:ext cx="3200400" cy="548640"/>
+          </a:xfrm>
+          <a:prstGeom prst="rect">
+            <a:avLst/>
+          </a:prstGeom>
+          <a:noFill/>
+        </p:spPr>
+        <p:txBody>
+          <a:bodyPr wrap="none">
+            <a:spAutoFit/>
+          </a:bodyPr>
+          <a:lstStyle/>
+          <a:p>
+            <a:pPr algn="r">
+              <a:defRPr sz="1000" b="1">
+                <a:solidFill>
+                  <a:srgbClr val="1E293B"/>
+                </a:solidFill>
+              </a:defRPr>
+            </a:pPr>
+            <a:r>
+              <a:t>산출물 ID: EMP_IMP_080 | v1.0</a:t>
+            </a:r>
+          </a:p>
+        </p:txBody>
+      </p:sp>
+      <p:sp>
+        <p:nvSpPr>
+          <p:cNvPr id="6" name="Rectangle 5"/>
+          <p:cNvSpPr/>
+          <p:nvPr/>
+        </p:nvSpPr>
+        <p:spPr>
+          <a:xfrm>
+            <a:off x="0" y="6309360"/>
+            <a:ext cx="12191695" cy="548640"/>
+          </a:xfrm>
+          <a:prstGeom prst="rect">
+            <a:avLst/>
+          </a:prstGeom>
+          <a:solidFill>
+            <a:srgbClr val="F8FAFC"/>
+          </a:solidFill>
+          <a:ln w="12700">
+            <a:solidFill>
+              <a:srgbClr val="E2E8F0"/>
+            </a:solidFill>
+          </a:ln>
+        </p:spPr>
+        <p:style>
+          <a:lnRef idx="1">
+            <a:schemeClr val="accent1"/>
+          </a:lnRef>
+          <a:fillRef idx="3">
+            <a:schemeClr val="accent1"/>
+          </a:fillRef>
+          <a:effectRef idx="2">
+            <a:schemeClr val="accent1"/>
+          </a:effectRef>
+          <a:fontRef idx="minor">
+            <a:schemeClr val="lt1"/>
+          </a:fontRef>
+        </p:style>
+        <p:txBody>
+          <a:bodyPr rtlCol="0" anchor="ctr"/>
+          <a:lstStyle/>
+          <a:p>
+            <a:pPr algn="ctr"/>
+          </a:p>
+        </p:txBody>
+      </p:sp>
+      <p:sp>
+        <p:nvSpPr>
+          <p:cNvPr id="7" name="TextBox 6"/>
+          <p:cNvSpPr txBox="1"/>
+          <p:nvPr/>
+        </p:nvSpPr>
+        <p:spPr>
+          <a:xfrm>
+            <a:off x="731520" y="6355080"/>
+            <a:ext cx="5029200" cy="365760"/>
+          </a:xfrm>
+          <a:prstGeom prst="rect">
+            <a:avLst/>
+          </a:prstGeom>
+          <a:noFill/>
+        </p:spPr>
+        <p:txBody>
+          <a:bodyPr wrap="none">
+            <a:spAutoFit/>
+          </a:bodyPr>
+          <a:lstStyle/>
+          <a:p>
+            <a:pPr>
+              <a:defRPr sz="900">
+                <a:solidFill>
+                  <a:srgbClr val="64748B"/>
+                </a:solidFill>
+              </a:defRPr>
+            </a:pPr>
+            <a:r>
+              <a:t>SyncGuard AI | 프로젝트 최종 완수 및 검수 요청 종료보고서</a:t>
+            </a:r>
+          </a:p>
+        </p:txBody>
+      </p:sp>
+      <p:sp>
+        <p:nvSpPr>
+          <p:cNvPr id="8" name="TextBox 7"/>
+          <p:cNvSpPr txBox="1"/>
+          <p:nvPr/>
+        </p:nvSpPr>
+        <p:spPr>
+          <a:xfrm>
+            <a:off x="5486400" y="6355080"/>
+            <a:ext cx="1371600" cy="365760"/>
+          </a:xfrm>
+          <a:prstGeom prst="rect">
+            <a:avLst/>
+          </a:prstGeom>
+          <a:noFill/>
+        </p:spPr>
+        <p:txBody>
+          <a:bodyPr wrap="none">
+            <a:spAutoFit/>
+          </a:bodyPr>
+          <a:lstStyle/>
+          <a:p>
+            <a:pPr algn="ctr">
+              <a:defRPr sz="1000" b="1"/>
+            </a:pPr>
+            <a:r>
+              <a:t>8 / 8</a:t>
+            </a:r>
+          </a:p>
+        </p:txBody>
+      </p:sp>
+      <p:sp>
+        <p:nvSpPr>
+          <p:cNvPr id="9" name="TextBox 8"/>
+          <p:cNvSpPr txBox="1"/>
+          <p:nvPr/>
+        </p:nvSpPr>
+        <p:spPr>
+          <a:xfrm>
+            <a:off x="7315200" y="6355080"/>
+            <a:ext cx="4114800" cy="365760"/>
+          </a:xfrm>
+          <a:prstGeom prst="rect">
+            <a:avLst/>
+          </a:prstGeom>
+          <a:noFill/>
+        </p:spPr>
+        <p:txBody>
+          <a:bodyPr wrap="none">
+            <a:spAutoFit/>
+          </a:bodyPr>
+          <a:lstStyle/>
+          <a:p>
+            <a:pPr algn="r">
+              <a:defRPr sz="900" b="1">
+                <a:solidFill>
+                  <a:srgbClr val="2563EB"/>
+                </a:solidFill>
+              </a:defRPr>
+            </a:pPr>
+            <a:r>
+              <a:t>발주사: HANBIT GLOBAL   |   수행사: ㈜엠파시 (Empasy Inc.)</a:t>
+            </a:r>
+          </a:p>
+        </p:txBody>
+      </p:sp>
+      <p:sp>
+        <p:nvSpPr>
+          <p:cNvPr id="10" name="Rounded Rectangle 9"/>
+          <p:cNvSpPr/>
+          <p:nvPr/>
+        </p:nvSpPr>
+        <p:spPr>
+          <a:xfrm>
+            <a:off x="731520" y="1371600"/>
+            <a:ext cx="10728655" cy="1828800"/>
+          </a:xfrm>
+          <a:prstGeom prst="roundRect">
+            <a:avLst/>
+          </a:prstGeom>
+          <a:solidFill>
+            <a:srgbClr val="F8FAFC"/>
+          </a:solidFill>
+          <a:ln w="12700">
+            <a:solidFill>
+              <a:srgbClr val="E2E8F0"/>
+            </a:solidFill>
+          </a:ln>
+        </p:spPr>
+        <p:style>
+          <a:lnRef idx="1">
+            <a:schemeClr val="accent1"/>
+          </a:lnRef>
+          <a:fillRef idx="3">
+            <a:schemeClr val="accent1"/>
+          </a:fillRef>
+          <a:effectRef idx="2">
+            <a:schemeClr val="accent1"/>
+          </a:effectRef>
+          <a:fontRef idx="minor">
+            <a:schemeClr val="lt1"/>
+          </a:fontRef>
+        </p:style>
+        <p:txBody>
+          <a:bodyPr rtlCol="0" anchor="ctr"/>
+          <a:lstStyle/>
+          <a:p>
+            <a:pPr algn="ctr"/>
+          </a:p>
+        </p:txBody>
+      </p:sp>
+      <p:sp>
+        <p:nvSpPr>
+          <p:cNvPr id="11" name="TextBox 10"/>
+          <p:cNvSpPr txBox="1"/>
+          <p:nvPr/>
+        </p:nvSpPr>
+        <p:spPr>
+          <a:xfrm>
+            <a:off x="1005840" y="1508760"/>
+            <a:ext cx="10149840" cy="1554480"/>
+          </a:xfrm>
+          <a:prstGeom prst="rect">
+            <a:avLst/>
+          </a:prstGeom>
+          <a:noFill/>
+        </p:spPr>
+        <p:txBody>
+          <a:bodyPr wrap="square">
+            <a:spAutoFit/>
+          </a:bodyPr>
+          <a:lstStyle/>
+          <a:p>
+            <a:pPr>
+              <a:defRPr b="1" sz="1200">
+                <a:solidFill>
+                  <a:srgbClr val="0F172A"/>
+                </a:solidFill>
+              </a:defRPr>
+            </a:pPr>
+            <a:r>
+              <a:t>■ 최종 검수 요청의 건</a:t>
+            </a:r>
+          </a:p>
+          <a:p>
+            <a:pPr>
+              <a:spcBef>
+                <a:spcPts val="600"/>
+              </a:spcBef>
+              <a:defRPr sz="1000">
+                <a:solidFill>
+                  <a:srgbClr val="334155"/>
+                </a:solidFill>
+              </a:defRPr>
+            </a:pPr>
+            <a:r>
+              <a:t>주식회사 한빛글로벌과 주식회사 엠파시 간 체결한 「SyncGuard AI 시스템 구축 용역 계약」에 의거하여, 제안요청서(RFP) 및 사업수행계획서에 명시된 기능 요구사항 42개 항목 및 비기능 요구사항을 100% 완수하였으며, 시범운영 및 최종 산출물 28종의 인계를 완료하였기에 본 사업의 최종 완료를 보고하고 검수를 정식으로 요청합니다.</a:t>
+            </a:r>
+          </a:p>
+          <a:p>
+            <a:pPr algn="ctr">
+              <a:spcBef>
+                <a:spcPts val="1000"/>
+              </a:spcBef>
+              <a:defRPr b="1" sz="1100">
+                <a:solidFill>
+                  <a:srgbClr val="0F172A"/>
+                </a:solidFill>
+              </a:defRPr>
+            </a:pPr>
+            <a:r>
+              <a:t>2026년 10월 16일</a:t>
+            </a:r>
+          </a:p>
+        </p:txBody>
+      </p:sp>
+      <p:sp>
+        <p:nvSpPr>
+          <p:cNvPr id="12" name="Rounded Rectangle 11"/>
+          <p:cNvSpPr/>
+          <p:nvPr/>
+        </p:nvSpPr>
+        <p:spPr>
+          <a:xfrm>
+            <a:off x="731520" y="3474720"/>
+            <a:ext cx="3413455" cy="2468880"/>
+          </a:xfrm>
+          <a:prstGeom prst="roundRect">
+            <a:avLst/>
+          </a:prstGeom>
+          <a:solidFill>
+            <a:srgbClr val="FFFFFF"/>
+          </a:solidFill>
+          <a:ln w="12700">
+            <a:solidFill>
+              <a:srgbClr val="E2E8F0"/>
+            </a:solidFill>
+          </a:ln>
+        </p:spPr>
+        <p:style>
+          <a:lnRef idx="1">
+            <a:schemeClr val="accent1"/>
+          </a:lnRef>
+          <a:fillRef idx="3">
+            <a:schemeClr val="accent1"/>
+          </a:fillRef>
+          <a:effectRef idx="2">
+            <a:schemeClr val="accent1"/>
+          </a:effectRef>
+          <a:fontRef idx="minor">
+            <a:schemeClr val="lt1"/>
+          </a:fontRef>
+        </p:style>
+        <p:txBody>
+          <a:bodyPr rtlCol="0" anchor="ctr"/>
+          <a:lstStyle/>
+          <a:p>
+            <a:pPr algn="ctr"/>
+          </a:p>
+        </p:txBody>
+      </p:sp>
+      <p:sp>
+        <p:nvSpPr>
+          <p:cNvPr id="13" name="TextBox 12"/>
+          <p:cNvSpPr txBox="1"/>
+          <p:nvPr/>
+        </p:nvSpPr>
+        <p:spPr>
+          <a:xfrm>
+            <a:off x="914400" y="3657600"/>
+            <a:ext cx="3047695" cy="2103120"/>
+          </a:xfrm>
+          <a:prstGeom prst="rect">
+            <a:avLst/>
+          </a:prstGeom>
+          <a:noFill/>
+        </p:spPr>
+        <p:txBody>
+          <a:bodyPr wrap="square">
+            <a:spAutoFit/>
+          </a:bodyPr>
+          <a:lstStyle/>
+          <a:p>
+            <a:pPr algn="ctr">
+              <a:defRPr b="1" sz="1200">
+                <a:solidFill>
+                  <a:srgbClr val="2563EB"/>
+                </a:solidFill>
+              </a:defRPr>
+            </a:pPr>
+            <a:r>
+              <a:t>발주사 (검수 확인)</a:t>
+            </a:r>
+          </a:p>
+          <a:p>
+            <a:pPr algn="ctr">
+              <a:spcBef>
+                <a:spcPts val="1600"/>
+              </a:spcBef>
+              <a:defRPr sz="1000">
+                <a:solidFill>
+                  <a:srgbClr val="334155"/>
+                </a:solidFill>
+              </a:defRPr>
+            </a:pPr>
+            <a:r>
+              <a:t>주식회사 한빛글로벌</a:t>
+            </a:r>
+            <a:br/>
+            <a:r>
+              <a:t>RA팀 검수책임관</a:t>
+            </a:r>
+            <a:br/>
+            <a:br/>
+            <a:r>
+              <a:t>성명:               (인 / 서명)</a:t>
+            </a:r>
+          </a:p>
+        </p:txBody>
+      </p:sp>
+      <p:sp>
+        <p:nvSpPr>
+          <p:cNvPr id="14" name="Rounded Rectangle 13"/>
+          <p:cNvSpPr/>
+          <p:nvPr/>
+        </p:nvSpPr>
+        <p:spPr>
+          <a:xfrm>
+            <a:off x="4389120" y="3474720"/>
+            <a:ext cx="3413455" cy="2468880"/>
+          </a:xfrm>
+          <a:prstGeom prst="roundRect">
+            <a:avLst/>
+          </a:prstGeom>
+          <a:solidFill>
+            <a:srgbClr val="FFFFFF"/>
+          </a:solidFill>
+          <a:ln w="12700">
+            <a:solidFill>
+              <a:srgbClr val="E2E8F0"/>
+            </a:solidFill>
+          </a:ln>
+        </p:spPr>
+        <p:style>
+          <a:lnRef idx="1">
+            <a:schemeClr val="accent1"/>
+          </a:lnRef>
+          <a:fillRef idx="3">
+            <a:schemeClr val="accent1"/>
+          </a:fillRef>
+          <a:effectRef idx="2">
+            <a:schemeClr val="accent1"/>
+          </a:effectRef>
+          <a:fontRef idx="minor">
+            <a:schemeClr val="lt1"/>
+          </a:fontRef>
+        </p:style>
+        <p:txBody>
+          <a:bodyPr rtlCol="0" anchor="ctr"/>
+          <a:lstStyle/>
+          <a:p>
+            <a:pPr algn="ctr"/>
+          </a:p>
+        </p:txBody>
+      </p:sp>
+      <p:sp>
+        <p:nvSpPr>
+          <p:cNvPr id="15" name="TextBox 14"/>
+          <p:cNvSpPr txBox="1"/>
+          <p:nvPr/>
+        </p:nvSpPr>
+        <p:spPr>
+          <a:xfrm>
+            <a:off x="4572000" y="3657600"/>
+            <a:ext cx="3047695" cy="2103120"/>
+          </a:xfrm>
+          <a:prstGeom prst="rect">
+            <a:avLst/>
+          </a:prstGeom>
+          <a:noFill/>
+        </p:spPr>
+        <p:txBody>
+          <a:bodyPr wrap="square">
+            <a:spAutoFit/>
+          </a:bodyPr>
+          <a:lstStyle/>
+          <a:p>
+            <a:pPr algn="ctr">
+              <a:defRPr b="1" sz="1200">
+                <a:solidFill>
+                  <a:srgbClr val="2563EB"/>
+                </a:solidFill>
+              </a:defRPr>
+            </a:pPr>
+            <a:r>
+              <a:t>수행사 (총괄 주관)</a:t>
+            </a:r>
+          </a:p>
+          <a:p>
+            <a:pPr algn="ctr">
+              <a:spcBef>
+                <a:spcPts val="1600"/>
+              </a:spcBef>
+              <a:defRPr sz="1000">
+                <a:solidFill>
+                  <a:srgbClr val="334155"/>
+                </a:solidFill>
+              </a:defRPr>
+            </a:pPr>
+            <a:r>
+              <a:t>주식회사 엠파시 (EMPASY)</a:t>
+            </a:r>
+            <a:br/>
+            <a:r>
+              <a:t>사업총괄 PM</a:t>
+            </a:r>
+            <a:br/>
+            <a:br/>
+            <a:r>
+              <a:t>성명:               (인 / 서명)</a:t>
+            </a:r>
+          </a:p>
+        </p:txBody>
+      </p:sp>
+      <p:sp>
+        <p:nvSpPr>
+          <p:cNvPr id="16" name="Rounded Rectangle 15"/>
+          <p:cNvSpPr/>
+          <p:nvPr/>
+        </p:nvSpPr>
+        <p:spPr>
+          <a:xfrm>
+            <a:off x="8046720" y="3474720"/>
+            <a:ext cx="3413455" cy="2468880"/>
+          </a:xfrm>
+          <a:prstGeom prst="roundRect">
+            <a:avLst/>
+          </a:prstGeom>
+          <a:solidFill>
+            <a:srgbClr val="FFFFFF"/>
+          </a:solidFill>
+          <a:ln w="12700">
+            <a:solidFill>
+              <a:srgbClr val="E2E8F0"/>
+            </a:solidFill>
+          </a:ln>
+        </p:spPr>
+        <p:style>
+          <a:lnRef idx="1">
+            <a:schemeClr val="accent1"/>
+          </a:lnRef>
+          <a:fillRef idx="3">
+            <a:schemeClr val="accent1"/>
+          </a:fillRef>
+          <a:effectRef idx="2">
+            <a:schemeClr val="accent1"/>
+          </a:effectRef>
+          <a:fontRef idx="minor">
+            <a:schemeClr val="lt1"/>
+          </a:fontRef>
+        </p:style>
+        <p:txBody>
+          <a:bodyPr rtlCol="0" anchor="ctr"/>
+          <a:lstStyle/>
+          <a:p>
+            <a:pPr algn="ctr"/>
+          </a:p>
+        </p:txBody>
+      </p:sp>
+      <p:sp>
+        <p:nvSpPr>
+          <p:cNvPr id="17" name="TextBox 16"/>
+          <p:cNvSpPr txBox="1"/>
+          <p:nvPr/>
+        </p:nvSpPr>
+        <p:spPr>
+          <a:xfrm>
+            <a:off x="8229600" y="3657600"/>
+            <a:ext cx="3047695" cy="2103120"/>
+          </a:xfrm>
+          <a:prstGeom prst="rect">
+            <a:avLst/>
+          </a:prstGeom>
+          <a:noFill/>
+        </p:spPr>
+        <p:txBody>
+          <a:bodyPr wrap="square">
+            <a:spAutoFit/>
+          </a:bodyPr>
+          <a:lstStyle/>
+          <a:p>
+            <a:pPr algn="ctr">
+              <a:defRPr b="1" sz="1200">
+                <a:solidFill>
+                  <a:srgbClr val="2563EB"/>
+                </a:solidFill>
+              </a:defRPr>
+            </a:pPr>
+            <a:r>
+              <a:t>공동수행사 (AI 구축)</a:t>
+            </a:r>
+          </a:p>
+          <a:p>
+            <a:pPr algn="ctr">
+              <a:spcBef>
+                <a:spcPts val="1600"/>
+              </a:spcBef>
+              <a:defRPr sz="1000">
+                <a:solidFill>
+                  <a:srgbClr val="334155"/>
+                </a:solidFill>
+              </a:defRPr>
+            </a:pPr>
+            <a:r>
+              <a:t>㈜엠파시 (Empasy Inc.)AI 테크니컬 리드성명:               (인 / 서명)</a:t>
+            </a:r>
+            <a:br/>
+            <a:r>
+              <a:t/>
+            </a:r>
+            <a:br/>
+            <a:br/>
+            <a:r>
+              <a:t/>
+            </a:r>
+          </a:p>
+        </p:txBody>
+      </p:sp>
     </p:spTree>
   </p:cSld>
   <p:clrMapOvr>

--- a/templates/office/Phase5_사업완료보고서_준공보고.pptx
+++ b/templates/office/Phase5_사업완료보고서_준공보고.pptx
@@ -3168,7 +3168,7 @@
               </a:defRPr>
             </a:pPr>
             <a:r>
-              <a:t>HANBIT GLOBAL SyncGuard AI</a:t>
+              <a:t>HANBIT GLOBAL SyncFlow AI</a:t>
             </a:r>
           </a:p>
           <a:p>
@@ -3198,7 +3198,7 @@
               </a:defRPr>
             </a:pPr>
             <a:r>
-              <a:t>한빛글로벌 엔터프라이즈 AI 콘텐츠·규제 심의 자동화 시스템(SyncGuard AI) 구축 완수 보고</a:t>
+              <a:t>한빛글로벌 지능형 공급망 구매·조달 계약 및 부품 품질규격 AI 검증 플랫폼(SyncFlow AI) 구축 완수 보고</a:t>
             </a:r>
           </a:p>
         </p:txBody>
@@ -3218,11 +3218,11 @@
             <a:avLst/>
           </a:prstGeom>
           <a:solidFill>
-            <a:srgbClr val="1E293B"/>
+            <a:srgbClr val="0F2942"/>
           </a:solidFill>
           <a:ln>
             <a:solidFill>
-              <a:srgbClr val="334155"/>
+              <a:srgbClr val="1E3A5F"/>
             </a:solidFill>
           </a:ln>
         </p:spPr>
@@ -3400,7 +3400,7 @@
               </a:defRPr>
             </a:pPr>
             <a:r>
-              <a:t>SyncGuard AI 사업 완료보고서  &gt;  1. 사업 완수 개요</a:t>
+              <a:t>SyncFlow AI 사업 완료보고서  &gt;  1. 사업 완수 개요</a:t>
             </a:r>
           </a:p>
         </p:txBody>
@@ -3465,7 +3465,7 @@
             <a:pPr algn="r">
               <a:defRPr sz="1000" b="1">
                 <a:solidFill>
-                  <a:srgbClr val="1E293B"/>
+                  <a:srgbClr val="0F2942"/>
                 </a:solidFill>
               </a:defRPr>
             </a:pPr>
@@ -3550,7 +3550,7 @@
               </a:defRPr>
             </a:pPr>
             <a:r>
-              <a:t>SyncGuard AI | 프로젝트 최종 완수 및 검수 요청 종료보고서</a:t>
+              <a:t>SyncFlow AI | 프로젝트 최종 완수 및 검수 요청 종료보고서</a:t>
             </a:r>
           </a:p>
         </p:txBody>
@@ -3721,7 +3721,7 @@
               </a:spcBef>
               <a:defRPr sz="950">
                 <a:solidFill>
-                  <a:srgbClr val="334155"/>
+                  <a:srgbClr val="1E3A5F"/>
                 </a:solidFill>
               </a:defRPr>
             </a:pPr>
@@ -3814,7 +3814,7 @@
               </a:defRPr>
             </a:pPr>
             <a:r>
-              <a:t>AI 심의 정확도</a:t>
+              <a:t>AI 검증 정확도</a:t>
             </a:r>
           </a:p>
           <a:p>
@@ -3839,7 +3839,7 @@
               </a:spcBef>
               <a:defRPr sz="950">
                 <a:solidFill>
-                  <a:srgbClr val="334155"/>
+                  <a:srgbClr val="1E3A5F"/>
                 </a:solidFill>
               </a:defRPr>
             </a:pPr>
@@ -3932,7 +3932,7 @@
               </a:defRPr>
             </a:pPr>
             <a:r>
-              <a:t>심의 리드타임 감축</a:t>
+              <a:t>검증 리드타임 감축</a:t>
             </a:r>
           </a:p>
           <a:p>
@@ -3957,16 +3957,16 @@
               </a:spcBef>
               <a:defRPr sz="950">
                 <a:solidFill>
-                  <a:srgbClr val="334155"/>
-                </a:solidFill>
-              </a:defRPr>
-            </a:pPr>
-            <a:r>
-              <a:t>평균 심의 소요시간 85% 대폭 감축</a:t>
+                  <a:srgbClr val="1E3A5F"/>
+                </a:solidFill>
+              </a:defRPr>
+            </a:pPr>
+            <a:r>
+              <a:t>평균 검증 소요시간 85% 대폭 감축</a:t>
             </a:r>
             <a:br/>
             <a:r>
-              <a:t>긴급 마케팅 심의 15분 내 처리</a:t>
+              <a:t>긴급 구매조달 검증 15분 내 처리</a:t>
             </a:r>
             <a:br/>
             <a:r>
@@ -4075,7 +4075,7 @@
               </a:spcBef>
               <a:defRPr sz="950">
                 <a:solidFill>
-                  <a:srgbClr val="334155"/>
+                  <a:srgbClr val="1E3A5F"/>
                 </a:solidFill>
               </a:defRPr>
             </a:pPr>
@@ -4178,7 +4178,7 @@
               </a:spcBef>
               <a:defRPr sz="1000">
                 <a:solidFill>
-                  <a:srgbClr val="334155"/>
+                  <a:srgbClr val="1E3A5F"/>
                 </a:solidFill>
               </a:defRPr>
             </a:pPr>
@@ -4193,12 +4193,12 @@
               </a:spcBef>
               <a:defRPr sz="1000">
                 <a:solidFill>
-                  <a:srgbClr val="334155"/>
-                </a:solidFill>
-              </a:defRPr>
-            </a:pPr>
-            <a:r>
-              <a:t>• 실무 적용성 검증: 한빛글로벌 루미에르, 아쿠아퓨어, 그린네이처, 더마쉴드 등 주요 11개 브랜드 142건 실데이터 시범운영을 통해 업무 안정성 입증.</a:t>
+                  <a:srgbClr val="1E3A5F"/>
+                </a:solidFill>
+              </a:defRPr>
+            </a:pPr>
+            <a:r>
+              <a:t>• 실무 적용성 검증: 한빛글로벌 전장시스템본부, 배터리모듈본부, 글로벌조달본부, 스마트팩토리본부 등 주요 11개 사업본부 142건 실데이터 시범운영을 통해 업무 안정성 입증.</a:t>
             </a:r>
           </a:p>
           <a:p>
@@ -4208,12 +4208,12 @@
               </a:spcBef>
               <a:defRPr sz="1000">
                 <a:solidFill>
-                  <a:srgbClr val="334155"/>
-                </a:solidFill>
-              </a:defRPr>
-            </a:pPr>
-            <a:r>
-              <a:t>• 외부 시스템 연계 무결성: 사내 ProductLab(배합·원료 규격), MarketingHub(결재 포털), 전사 통합 SSO 로그인 및 KT 문자 알림망 연계 100% 정상 가동.</a:t>
+                  <a:srgbClr val="1E3A5F"/>
+                </a:solidFill>
+              </a:defRPr>
+            </a:pPr>
+            <a:r>
+              <a:t>• 외부 시스템 연계 무결성: 사내 PLM-Nexus(조성·원소재 규격), SRM-Portal(결재 포털), 전사 통합 SSO 로그인 및 KT 문자 알림망 연계 100% 정상 가동.</a:t>
             </a:r>
           </a:p>
           <a:p>
@@ -4223,7 +4223,7 @@
               </a:spcBef>
               <a:defRPr sz="1000">
                 <a:solidFill>
-                  <a:srgbClr val="334155"/>
+                  <a:srgbClr val="1E3A5F"/>
                 </a:solidFill>
               </a:defRPr>
             </a:pPr>
@@ -4326,7 +4326,7 @@
               </a:defRPr>
             </a:pPr>
             <a:r>
-              <a:t>SyncGuard AI 사업 완료보고서  &gt;  2. 시스템 구축 범위</a:t>
+              <a:t>SyncFlow AI 사업 완료보고서  &gt;  2. 시스템 구축 범위</a:t>
             </a:r>
           </a:p>
         </p:txBody>
@@ -4391,7 +4391,7 @@
             <a:pPr algn="r">
               <a:defRPr sz="1000" b="1">
                 <a:solidFill>
-                  <a:srgbClr val="1E293B"/>
+                  <a:srgbClr val="0F2942"/>
                 </a:solidFill>
               </a:defRPr>
             </a:pPr>
@@ -4476,7 +4476,7 @@
               </a:defRPr>
             </a:pPr>
             <a:r>
-              <a:t>SyncGuard AI | 프로젝트 최종 완수 및 검수 요청 종료보고서</a:t>
+              <a:t>SyncFlow AI | 프로젝트 최종 완수 및 검수 요청 종료보고서</a:t>
             </a:r>
           </a:p>
         </p:txBody>
@@ -4622,7 +4622,7 @@
               </a:defRPr>
             </a:pPr>
             <a:r>
-              <a:t>1. 통합 심의 포털 (Front-End)</a:t>
+              <a:t>1. 통합 검증 포털 (Front-End)</a:t>
             </a:r>
           </a:p>
           <a:p>
@@ -4632,7 +4632,7 @@
               </a:spcBef>
               <a:defRPr sz="950">
                 <a:solidFill>
-                  <a:srgbClr val="334155"/>
+                  <a:srgbClr val="1E3A5F"/>
                 </a:solidFill>
               </a:defRPr>
             </a:pPr>
@@ -4647,12 +4647,12 @@
               </a:spcBef>
               <a:defRPr sz="950">
                 <a:solidFill>
-                  <a:srgbClr val="334155"/>
-                </a:solidFill>
-              </a:defRPr>
-            </a:pPr>
-            <a:r>
-              <a:t>• 클레임 심의 접수 / 실시간 모니터링 / 이력 조회</a:t>
+                  <a:srgbClr val="1E3A5F"/>
+                </a:solidFill>
+              </a:defRPr>
+            </a:pPr>
+            <a:r>
+              <a:t>• 규격·계약 검증 접수 / 실시간 모니터링 / 이력 조회</a:t>
             </a:r>
           </a:p>
           <a:p>
@@ -4662,12 +4662,12 @@
               </a:spcBef>
               <a:defRPr sz="950">
                 <a:solidFill>
-                  <a:srgbClr val="334155"/>
-                </a:solidFill>
-              </a:defRPr>
-            </a:pPr>
-            <a:r>
-              <a:t>• 다양한 형식(텍스트, 이미지 PDP, Word, PDF) 심의 지원</a:t>
+                  <a:srgbClr val="1E3A5F"/>
+                </a:solidFill>
+              </a:defRPr>
+            </a:pPr>
+            <a:r>
+              <a:t>• 다양한 형식(텍스트, 이미지 PDP, Word, PDF) 검증 지원</a:t>
             </a:r>
           </a:p>
           <a:p>
@@ -4677,12 +4677,12 @@
               </a:spcBef>
               <a:defRPr sz="950">
                 <a:solidFill>
-                  <a:srgbClr val="334155"/>
-                </a:solidFill>
-              </a:defRPr>
-            </a:pPr>
-            <a:r>
-              <a:t>• 마케팅-RA 담당자 간 양방향 피드백 및 결재 연동</a:t>
+                  <a:srgbClr val="1E3A5F"/>
+                </a:solidFill>
+              </a:defRPr>
+            </a:pPr>
+            <a:r>
+              <a:t>• 구매조달-법무·QA 담당자 간 양방향 피드백 및 결재 연동</a:t>
             </a:r>
           </a:p>
         </p:txBody>
@@ -4772,7 +4772,7 @@
               </a:spcBef>
               <a:defRPr sz="950">
                 <a:solidFill>
-                  <a:srgbClr val="334155"/>
+                  <a:srgbClr val="1E3A5F"/>
                 </a:solidFill>
               </a:defRPr>
             </a:pPr>
@@ -4787,7 +4787,7 @@
               </a:spcBef>
               <a:defRPr sz="950">
                 <a:solidFill>
-                  <a:srgbClr val="334155"/>
+                  <a:srgbClr val="1E3A5F"/>
                 </a:solidFill>
               </a:defRPr>
             </a:pPr>
@@ -4802,7 +4802,7 @@
               </a:spcBef>
               <a:defRPr sz="950">
                 <a:solidFill>
-                  <a:srgbClr val="334155"/>
+                  <a:srgbClr val="1E3A5F"/>
                 </a:solidFill>
               </a:defRPr>
             </a:pPr>
@@ -4817,12 +4817,12 @@
               </a:spcBef>
               <a:defRPr sz="950">
                 <a:solidFill>
-                  <a:srgbClr val="334155"/>
-                </a:solidFill>
-              </a:defRPr>
-            </a:pPr>
-            <a:r>
-              <a:t>• Vision OCR 기반 이미지 상세페이지 텍스트 자동 추출</a:t>
+                  <a:srgbClr val="1E3A5F"/>
+                </a:solidFill>
+              </a:defRPr>
+            </a:pPr>
+            <a:r>
+              <a:t>• Vision OCR 기반 이미지 기술시방서 텍스트 자동 추출</a:t>
             </a:r>
           </a:p>
         </p:txBody>
@@ -4912,12 +4912,12 @@
               </a:spcBef>
               <a:defRPr sz="950">
                 <a:solidFill>
-                  <a:srgbClr val="334155"/>
-                </a:solidFill>
-              </a:defRPr>
-            </a:pPr>
-            <a:r>
-              <a:t>• ProductLab 원료/배합 규격 REST API 실시간 연동</a:t>
+                  <a:srgbClr val="1E3A5F"/>
+                </a:solidFill>
+              </a:defRPr>
+            </a:pPr>
+            <a:r>
+              <a:t>• PLM-Nexus 원소재/조성 규격 REST API 실시간 연동</a:t>
             </a:r>
           </a:p>
           <a:p>
@@ -4927,12 +4927,12 @@
               </a:spcBef>
               <a:defRPr sz="950">
                 <a:solidFill>
-                  <a:srgbClr val="334155"/>
-                </a:solidFill>
-              </a:defRPr>
-            </a:pPr>
-            <a:r>
-              <a:t>• MarketingHub 전사 결재 및 심의 이력 동기화</a:t>
+                  <a:srgbClr val="1E3A5F"/>
+                </a:solidFill>
+              </a:defRPr>
+            </a:pPr>
+            <a:r>
+              <a:t>• SRM-Portal 전사 결재 및 검증 이력 동기화</a:t>
             </a:r>
           </a:p>
           <a:p>
@@ -4942,7 +4942,7 @@
               </a:spcBef>
               <a:defRPr sz="950">
                 <a:solidFill>
-                  <a:srgbClr val="334155"/>
+                  <a:srgbClr val="1E3A5F"/>
                 </a:solidFill>
               </a:defRPr>
             </a:pPr>
@@ -4957,12 +4957,12 @@
               </a:spcBef>
               <a:defRPr sz="950">
                 <a:solidFill>
-                  <a:srgbClr val="334155"/>
-                </a:solidFill>
-              </a:defRPr>
-            </a:pPr>
-            <a:r>
-              <a:t>• KT 비즈 알림톡/SMS 심의 결과 즉시 통보</a:t>
+                  <a:srgbClr val="1E3A5F"/>
+                </a:solidFill>
+              </a:defRPr>
+            </a:pPr>
+            <a:r>
+              <a:t>• KT 비즈 알림톡/SMS 검증 결과 즉시 통보</a:t>
             </a:r>
           </a:p>
         </p:txBody>
@@ -5052,12 +5052,12 @@
               </a:spcBef>
               <a:defRPr sz="950">
                 <a:solidFill>
-                  <a:srgbClr val="334155"/>
-                </a:solidFill>
-              </a:defRPr>
-            </a:pPr>
-            <a:r>
-              <a:t>• 식약처 제품 표시·광고 관리지침 DB화</a:t>
+                  <a:srgbClr val="1E3A5F"/>
+                </a:solidFill>
+              </a:defRPr>
+            </a:pPr>
+            <a:r>
+              <a:t>• 공정위·표준원 구매계약·기술규격 관리지침 DB화</a:t>
             </a:r>
           </a:p>
           <a:p>
@@ -5067,12 +5067,12 @@
               </a:spcBef>
               <a:defRPr sz="950">
                 <a:solidFill>
-                  <a:srgbClr val="334155"/>
-                </a:solidFill>
-              </a:defRPr>
-            </a:pPr>
-            <a:r>
-              <a:t>• 자주 적발되는 허위·과대광고 사례 사전 탑재</a:t>
+                  <a:srgbClr val="1E3A5F"/>
+                </a:solidFill>
+              </a:defRPr>
+            </a:pPr>
+            <a:r>
+              <a:t>• 자주 적발되는 허위·과대구매계약 사례 사전 탑재</a:t>
             </a:r>
           </a:p>
           <a:p>
@@ -5082,12 +5082,12 @@
               </a:spcBef>
               <a:defRPr sz="950">
                 <a:solidFill>
-                  <a:srgbClr val="334155"/>
-                </a:solidFill>
-              </a:defRPr>
-            </a:pPr>
-            <a:r>
-              <a:t>• 대체 추천 문구 100종 데이터베이스 탑재</a:t>
+                  <a:srgbClr val="1E3A5F"/>
+                </a:solidFill>
+              </a:defRPr>
+            </a:pPr>
+            <a:r>
+              <a:t>• 대체 추천 조항 100종 데이터베이스 탑재</a:t>
             </a:r>
           </a:p>
           <a:p>
@@ -5097,7 +5097,7 @@
               </a:spcBef>
               <a:defRPr sz="950">
                 <a:solidFill>
-                  <a:srgbClr val="334155"/>
+                  <a:srgbClr val="1E3A5F"/>
                 </a:solidFill>
               </a:defRPr>
             </a:pPr>
@@ -5200,7 +5200,7 @@
               </a:defRPr>
             </a:pPr>
             <a:r>
-              <a:t>SyncGuard AI 사업 완료보고서  &gt;  3. AI 모델 검증</a:t>
+              <a:t>SyncFlow AI 사업 완료보고서  &gt;  3. AI 모델 검증</a:t>
             </a:r>
           </a:p>
         </p:txBody>
@@ -5265,7 +5265,7 @@
             <a:pPr algn="r">
               <a:defRPr sz="1000" b="1">
                 <a:solidFill>
-                  <a:srgbClr val="1E293B"/>
+                  <a:srgbClr val="0F2942"/>
                 </a:solidFill>
               </a:defRPr>
             </a:pPr>
@@ -5350,7 +5350,7 @@
               </a:defRPr>
             </a:pPr>
             <a:r>
-              <a:t>SyncGuard AI | 프로젝트 최종 완수 및 검수 요청 종료보고서</a:t>
+              <a:t>SyncFlow AI | 프로젝트 최종 완수 및 검수 요청 종료보고서</a:t>
             </a:r>
           </a:p>
         </p:txBody>
@@ -5572,7 +5572,7 @@
                       <a:pPr>
                         <a:defRPr sz="950">
                           <a:solidFill>
-                            <a:srgbClr val="334155"/>
+                            <a:srgbClr val="1E3A5F"/>
                           </a:solidFill>
                         </a:defRPr>
                       </a:pPr>
@@ -5595,7 +5595,7 @@
                       <a:pPr algn="ctr">
                         <a:defRPr sz="950">
                           <a:solidFill>
-                            <a:srgbClr val="334155"/>
+                            <a:srgbClr val="1E3A5F"/>
                           </a:solidFill>
                         </a:defRPr>
                       </a:pPr>
@@ -5641,7 +5641,7 @@
                       <a:pPr algn="ctr">
                         <a:defRPr sz="950">
                           <a:solidFill>
-                            <a:srgbClr val="334155"/>
+                            <a:srgbClr val="1E3A5F"/>
                           </a:solidFill>
                         </a:defRPr>
                       </a:pPr>
@@ -5689,7 +5689,7 @@
                       <a:pPr>
                         <a:defRPr sz="950">
                           <a:solidFill>
-                            <a:srgbClr val="334155"/>
+                            <a:srgbClr val="1E3A5F"/>
                           </a:solidFill>
                         </a:defRPr>
                       </a:pPr>
@@ -5712,7 +5712,7 @@
                       <a:pPr algn="ctr">
                         <a:defRPr sz="950">
                           <a:solidFill>
-                            <a:srgbClr val="334155"/>
+                            <a:srgbClr val="1E3A5F"/>
                           </a:solidFill>
                         </a:defRPr>
                       </a:pPr>
@@ -5758,7 +5758,7 @@
                       <a:pPr algn="ctr">
                         <a:defRPr sz="950">
                           <a:solidFill>
-                            <a:srgbClr val="334155"/>
+                            <a:srgbClr val="1E3A5F"/>
                           </a:solidFill>
                         </a:defRPr>
                       </a:pPr>
@@ -5806,7 +5806,7 @@
                       <a:pPr>
                         <a:defRPr sz="950">
                           <a:solidFill>
-                            <a:srgbClr val="334155"/>
+                            <a:srgbClr val="1E3A5F"/>
                           </a:solidFill>
                         </a:defRPr>
                       </a:pPr>
@@ -5829,7 +5829,7 @@
                       <a:pPr algn="ctr">
                         <a:defRPr sz="950">
                           <a:solidFill>
-                            <a:srgbClr val="334155"/>
+                            <a:srgbClr val="1E3A5F"/>
                           </a:solidFill>
                         </a:defRPr>
                       </a:pPr>
@@ -5875,7 +5875,7 @@
                       <a:pPr algn="ctr">
                         <a:defRPr sz="950">
                           <a:solidFill>
-                            <a:srgbClr val="334155"/>
+                            <a:srgbClr val="1E3A5F"/>
                           </a:solidFill>
                         </a:defRPr>
                       </a:pPr>
@@ -5923,12 +5923,12 @@
                       <a:pPr>
                         <a:defRPr sz="950">
                           <a:solidFill>
-                            <a:srgbClr val="334155"/>
+                            <a:srgbClr val="1E3A5F"/>
                           </a:solidFill>
                         </a:defRPr>
                       </a:pPr>
                       <a:r>
-                        <a:t>단건 심의 응답속도</a:t>
+                        <a:t>단건 검증 응답속도</a:t>
                       </a:r>
                     </a:p>
                   </a:txBody>
@@ -5946,7 +5946,7 @@
                       <a:pPr algn="ctr">
                         <a:defRPr sz="950">
                           <a:solidFill>
-                            <a:srgbClr val="334155"/>
+                            <a:srgbClr val="1E3A5F"/>
                           </a:solidFill>
                         </a:defRPr>
                       </a:pPr>
@@ -5992,7 +5992,7 @@
                       <a:pPr algn="ctr">
                         <a:defRPr sz="950">
                           <a:solidFill>
-                            <a:srgbClr val="334155"/>
+                            <a:srgbClr val="1E3A5F"/>
                           </a:solidFill>
                         </a:defRPr>
                       </a:pPr>
@@ -6040,7 +6040,7 @@
                       <a:pPr>
                         <a:defRPr sz="950">
                           <a:solidFill>
-                            <a:srgbClr val="334155"/>
+                            <a:srgbClr val="1E3A5F"/>
                           </a:solidFill>
                         </a:defRPr>
                       </a:pPr>
@@ -6063,7 +6063,7 @@
                       <a:pPr algn="ctr">
                         <a:defRPr sz="950">
                           <a:solidFill>
-                            <a:srgbClr val="334155"/>
+                            <a:srgbClr val="1E3A5F"/>
                           </a:solidFill>
                         </a:defRPr>
                       </a:pPr>
@@ -6109,7 +6109,7 @@
                       <a:pPr algn="ctr">
                         <a:defRPr sz="950">
                           <a:solidFill>
-                            <a:srgbClr val="334155"/>
+                            <a:srgbClr val="1E3A5F"/>
                           </a:solidFill>
                         </a:defRPr>
                       </a:pPr>
@@ -6237,12 +6237,12 @@
               </a:spcBef>
               <a:defRPr sz="950">
                 <a:solidFill>
-                  <a:srgbClr val="334155"/>
-                </a:solidFill>
-              </a:defRPr>
-            </a:pPr>
-            <a:r>
-              <a:t>• 의약품 오인 표현 탐지율 100%: '치료', '재생', '염증 완화', '세포 증식' 등 식약처 고위험 표현 전수 탐지 및 대체어 즉시 추천 완결.</a:t>
+                  <a:srgbClr val="1E3A5F"/>
+                </a:solidFill>
+              </a:defRPr>
+            </a:pPr>
+            <a:r>
+              <a:t>• 불공정 독소조항 표현 탐지율 100%: '면책', '재생', '부식 완화', '배상한도 증식' 등 공정위·표준원 고위험 표현 전수 탐지 및 표준대안 즉시 추천 완결.</a:t>
             </a:r>
           </a:p>
           <a:p>
@@ -6252,12 +6252,12 @@
               </a:spcBef>
               <a:defRPr sz="950">
                 <a:solidFill>
-                  <a:srgbClr val="334155"/>
-                </a:solidFill>
-              </a:defRPr>
-            </a:pPr>
-            <a:r>
-              <a:t>• 기능성 화장품 범위 검증: 미백, 주름개선, 자외선 차단 3대 고시 성분과 비고시 성분의 과대 주장 문맥을 완벽히 분리 판정.</a:t>
+                  <a:srgbClr val="1E3A5F"/>
+                </a:solidFill>
+              </a:defRPr>
+            </a:pPr>
+            <a:r>
+              <a:t>• 핵심규격 전장부품 범위 검증: 절연성, 내진동성, 전자파 차단 3대 고시 성분과 비고시 성분의 과대 주장 문맥을 완벽히 분리 판정.</a:t>
             </a:r>
           </a:p>
           <a:p>
@@ -6267,12 +6267,12 @@
               </a:spcBef>
               <a:defRPr sz="950">
                 <a:solidFill>
-                  <a:srgbClr val="334155"/>
-                </a:solidFill>
-              </a:defRPr>
-            </a:pPr>
-            <a:r>
-              <a:t>• 부정어 및 문맥 왜곡 방지: '트러블을 치료하지 않고 예방에 도움'과 같은 복합 문맥에서 오경보 없이 정상 판정(청색) 도출 확인.</a:t>
+                  <a:srgbClr val="1E3A5F"/>
+                </a:solidFill>
+              </a:defRPr>
+            </a:pPr>
+            <a:r>
+              <a:t>• 부정어 및 문맥 왜곡 방지: '지체상금을 일방 전가하지 않고 상호 귀책비율에 따라 분담'과 같은 복합 문맥에서 오경보 없이 정상 판정(청색) 도출 확인.</a:t>
             </a:r>
           </a:p>
           <a:p>
@@ -6282,12 +6282,12 @@
               </a:spcBef>
               <a:defRPr sz="950">
                 <a:solidFill>
-                  <a:srgbClr val="334155"/>
-                </a:solidFill>
-              </a:defRPr>
-            </a:pPr>
-            <a:r>
-              <a:t>• 근거 규격 자동 매칭: 판정 결과마다 식약처 표시·광고 공정화법 제3조 및 관리지침 근거 조항을 100% 매핑하여 심의관의 검토 설득력 확보.</a:t>
+                  <a:srgbClr val="1E3A5F"/>
+                </a:solidFill>
+              </a:defRPr>
+            </a:pPr>
+            <a:r>
+              <a:t>• 근거 규격 자동 매칭: 판정 결과마다 공정위·표준원 하도급법 제3조의4 및 관리지침 근거 조항을 100% 매핑하여 검토위원의 검토 설득력 확보.</a:t>
             </a:r>
           </a:p>
         </p:txBody>
@@ -6385,7 +6385,7 @@
               </a:defRPr>
             </a:pPr>
             <a:r>
-              <a:t>SyncGuard AI 사업 완료보고서  &gt;  4. 시범운영 및 ROI</a:t>
+              <a:t>SyncFlow AI 사업 완료보고서  &gt;  4. 시범운영 및 ROI</a:t>
             </a:r>
           </a:p>
         </p:txBody>
@@ -6450,7 +6450,7 @@
             <a:pPr algn="r">
               <a:defRPr sz="1000" b="1">
                 <a:solidFill>
-                  <a:srgbClr val="1E293B"/>
+                  <a:srgbClr val="0F2942"/>
                 </a:solidFill>
               </a:defRPr>
             </a:pPr>
@@ -6535,7 +6535,7 @@
               </a:defRPr>
             </a:pPr>
             <a:r>
-              <a:t>SyncGuard AI | 프로젝트 최종 완수 및 검수 요청 종료보고서</a:t>
+              <a:t>SyncFlow AI | 프로젝트 최종 완수 및 검수 요청 종료보고서</a:t>
             </a:r>
           </a:p>
         </p:txBody>
@@ -6681,7 +6681,7 @@
               </a:defRPr>
             </a:pPr>
             <a:r>
-              <a:t>시범운영 총 심의 건수</a:t>
+              <a:t>시범운영 총 검증 건수</a:t>
             </a:r>
           </a:p>
           <a:p>
@@ -6706,16 +6706,16 @@
               </a:spcBef>
               <a:defRPr sz="900">
                 <a:solidFill>
-                  <a:srgbClr val="334155"/>
-                </a:solidFill>
-              </a:defRPr>
-            </a:pPr>
-            <a:r>
-              <a:t>루미에르, 아쿠아퓨어, 그린네이처 등</a:t>
+                  <a:srgbClr val="1E3A5F"/>
+                </a:solidFill>
+              </a:defRPr>
+            </a:pPr>
+            <a:r>
+              <a:t>전장시스템본부, 배터리모듈본부, 글로벌조달본부 등</a:t>
             </a:r>
             <a:br/>
             <a:r>
-              <a:t>11개 브랜드 실무 적용 완료</a:t>
+              <a:t>11개 사업본부 실무 적용 완료</a:t>
             </a:r>
           </a:p>
         </p:txBody>
@@ -6795,7 +6795,7 @@
               </a:defRPr>
             </a:pPr>
             <a:r>
-              <a:t>RA 담당자 판정 일치율</a:t>
+              <a:t>법무·QA 담당자 판정 일치율</a:t>
             </a:r>
           </a:p>
           <a:p>
@@ -6820,7 +6820,7 @@
               </a:spcBef>
               <a:defRPr sz="900">
                 <a:solidFill>
-                  <a:srgbClr val="334155"/>
+                  <a:srgbClr val="1E3A5F"/>
                 </a:solidFill>
               </a:defRPr>
             </a:pPr>
@@ -6909,7 +6909,7 @@
               </a:defRPr>
             </a:pPr>
             <a:r>
-              <a:t>심의 리드타임 단축</a:t>
+              <a:t>검증 리드타임 단축</a:t>
             </a:r>
           </a:p>
           <a:p>
@@ -6934,7 +6934,7 @@
               </a:spcBef>
               <a:defRPr sz="900">
                 <a:solidFill>
-                  <a:srgbClr val="334155"/>
+                  <a:srgbClr val="1E3A5F"/>
                 </a:solidFill>
               </a:defRPr>
             </a:pPr>
@@ -7048,12 +7048,12 @@
               </a:spcBef>
               <a:defRPr sz="900">
                 <a:solidFill>
-                  <a:srgbClr val="334155"/>
-                </a:solidFill>
-              </a:defRPr>
-            </a:pPr>
-            <a:r>
-              <a:t>RA 검토 인력 연간 환산</a:t>
+                  <a:srgbClr val="1E3A5F"/>
+                </a:solidFill>
+              </a:defRPr>
+            </a:pPr>
+            <a:r>
+              <a:t>법무·QA 검토 인력 연간 환산</a:t>
             </a:r>
             <a:br/>
             <a:r>
@@ -7147,12 +7147,12 @@
               </a:spcBef>
               <a:defRPr sz="950">
                 <a:solidFill>
-                  <a:srgbClr val="334155"/>
-                </a:solidFill>
-              </a:defRPr>
-            </a:pPr>
-            <a:r>
-              <a:t>• 규제 리스크 사전 원천 차단: 식약처 모니터링 적발 및 광고업무정지 행정처분 위험 0건화 달성.</a:t>
+                  <a:srgbClr val="1E3A5F"/>
+                </a:solidFill>
+              </a:defRPr>
+            </a:pPr>
+            <a:r>
+              <a:t>• 규제 리스크 사전 원천 차단: 공정위·표준원 모니터링 적발 및 구매계약업무정지 시정명령·심결 위험 0건화 달성.</a:t>
             </a:r>
           </a:p>
           <a:p>
@@ -7162,12 +7162,12 @@
               </a:spcBef>
               <a:defRPr sz="950">
                 <a:solidFill>
-                  <a:srgbClr val="334155"/>
-                </a:solidFill>
-              </a:defRPr>
-            </a:pPr>
-            <a:r>
-              <a:t>• 마케팅 캠페인 타임-투-마켓 가속화: 신제품 출시 및 긴급 프로모션 기획 시 심의 대기 시간을 즉시 단축하여 시장 선점 지원.</a:t>
+                  <a:srgbClr val="1E3A5F"/>
+                </a:solidFill>
+              </a:defRPr>
+            </a:pPr>
+            <a:r>
+              <a:t>• 구매조달 조달프로젝트 타임-투-마켓 가속화: 신규 차종 양산발주 및 긴급 단가계약 기획 시 검토 대기 시간을 즉시 단축하여 시장 선점 지원.</a:t>
             </a:r>
           </a:p>
           <a:p>
@@ -7177,12 +7177,12 @@
               </a:spcBef>
               <a:defRPr sz="950">
                 <a:solidFill>
-                  <a:srgbClr val="334155"/>
-                </a:solidFill>
-              </a:defRPr>
-            </a:pPr>
-            <a:r>
-              <a:t>• RA 심의 기준의 전사 표준화: 심의 담당자별 주관적 판단 편차를 배제하고 AI 룰셋 기반의 객관적·일관된 기준 수립.</a:t>
+                  <a:srgbClr val="1E3A5F"/>
+                </a:solidFill>
+              </a:defRPr>
+            </a:pPr>
+            <a:r>
+              <a:t>• QA 검증 기준의 전사 표준화: 검증 담당자별 주관적 판단 편차를 배제하고 AI 룰셋 기반의 객관적·일관된 기준 수립.</a:t>
             </a:r>
           </a:p>
           <a:p>
@@ -7192,7 +7192,7 @@
               </a:spcBef>
               <a:defRPr sz="950">
                 <a:solidFill>
-                  <a:srgbClr val="334155"/>
+                  <a:srgbClr val="1E3A5F"/>
                 </a:solidFill>
               </a:defRPr>
             </a:pPr>
@@ -7295,7 +7295,7 @@
               </a:defRPr>
             </a:pPr>
             <a:r>
-              <a:t>SyncGuard AI 사업 완료보고서  &gt;  5. 산출물 인계</a:t>
+              <a:t>SyncFlow AI 사업 완료보고서  &gt;  5. 산출물 인계</a:t>
             </a:r>
           </a:p>
         </p:txBody>
@@ -7360,7 +7360,7 @@
             <a:pPr algn="r">
               <a:defRPr sz="1000" b="1">
                 <a:solidFill>
-                  <a:srgbClr val="1E293B"/>
+                  <a:srgbClr val="0F2942"/>
                 </a:solidFill>
               </a:defRPr>
             </a:pPr>
@@ -7445,7 +7445,7 @@
               </a:defRPr>
             </a:pPr>
             <a:r>
-              <a:t>SyncGuard AI | 프로젝트 최종 완수 및 검수 요청 종료보고서</a:t>
+              <a:t>SyncFlow AI | 프로젝트 최종 완수 및 검수 요청 종료보고서</a:t>
             </a:r>
           </a:p>
         </p:txBody>
@@ -7690,7 +7690,7 @@
                       <a:pPr algn="ctr">
                         <a:defRPr sz="900">
                           <a:solidFill>
-                            <a:srgbClr val="334155"/>
+                            <a:srgbClr val="1E3A5F"/>
                           </a:solidFill>
                         </a:defRPr>
                       </a:pPr>
@@ -7717,7 +7717,7 @@
                       <a:pPr>
                         <a:defRPr sz="900">
                           <a:solidFill>
-                            <a:srgbClr val="334155"/>
+                            <a:srgbClr val="1E3A5F"/>
                           </a:solidFill>
                         </a:defRPr>
                       </a:pPr>
@@ -7744,7 +7744,7 @@
                       <a:pPr algn="ctr">
                         <a:defRPr sz="900">
                           <a:solidFill>
-                            <a:srgbClr val="334155"/>
+                            <a:srgbClr val="1E3A5F"/>
                           </a:solidFill>
                         </a:defRPr>
                       </a:pPr>
@@ -7815,7 +7815,7 @@
                       <a:pPr algn="ctr">
                         <a:defRPr sz="900">
                           <a:solidFill>
-                            <a:srgbClr val="334155"/>
+                            <a:srgbClr val="1E3A5F"/>
                           </a:solidFill>
                         </a:defRPr>
                       </a:pPr>
@@ -7846,7 +7846,7 @@
                       <a:pPr>
                         <a:defRPr sz="900">
                           <a:solidFill>
-                            <a:srgbClr val="334155"/>
+                            <a:srgbClr val="1E3A5F"/>
                           </a:solidFill>
                         </a:defRPr>
                       </a:pPr>
@@ -7873,7 +7873,7 @@
                       <a:pPr algn="ctr">
                         <a:defRPr sz="900">
                           <a:solidFill>
-                            <a:srgbClr val="334155"/>
+                            <a:srgbClr val="1E3A5F"/>
                           </a:solidFill>
                         </a:defRPr>
                       </a:pPr>
@@ -7944,7 +7944,7 @@
                       <a:pPr algn="ctr">
                         <a:defRPr sz="900">
                           <a:solidFill>
-                            <a:srgbClr val="334155"/>
+                            <a:srgbClr val="1E3A5F"/>
                           </a:solidFill>
                         </a:defRPr>
                       </a:pPr>
@@ -7975,12 +7975,12 @@
                       <a:pPr>
                         <a:defRPr sz="900">
                           <a:solidFill>
-                            <a:srgbClr val="334155"/>
+                            <a:srgbClr val="1E3A5F"/>
                           </a:solidFill>
                         </a:defRPr>
                       </a:pPr>
                       <a:r>
-                        <a:t>규칙사전정의서, 프롬프트명세서, ProductLab연계명세서</a:t>
+                        <a:t>규칙사전정의서, 프롬프트명세서, PLM-Nexus연계명세서</a:t>
                       </a:r>
                       <a:br/>
                       <a:r>
@@ -8002,7 +8002,7 @@
                       <a:pPr algn="ctr">
                         <a:defRPr sz="900">
                           <a:solidFill>
-                            <a:srgbClr val="334155"/>
+                            <a:srgbClr val="1E3A5F"/>
                           </a:solidFill>
                         </a:defRPr>
                       </a:pPr>
@@ -8073,7 +8073,7 @@
                       <a:pPr algn="ctr">
                         <a:defRPr sz="900">
                           <a:solidFill>
-                            <a:srgbClr val="334155"/>
+                            <a:srgbClr val="1E3A5F"/>
                           </a:solidFill>
                         </a:defRPr>
                       </a:pPr>
@@ -8100,7 +8100,7 @@
                       <a:pPr>
                         <a:defRPr sz="900">
                           <a:solidFill>
-                            <a:srgbClr val="334155"/>
+                            <a:srgbClr val="1E3A5F"/>
                           </a:solidFill>
                         </a:defRPr>
                       </a:pPr>
@@ -8127,7 +8127,7 @@
                       <a:pPr algn="ctr">
                         <a:defRPr sz="900">
                           <a:solidFill>
-                            <a:srgbClr val="334155"/>
+                            <a:srgbClr val="1E3A5F"/>
                           </a:solidFill>
                         </a:defRPr>
                       </a:pPr>
@@ -8198,7 +8198,7 @@
                       <a:pPr algn="ctr">
                         <a:defRPr sz="900">
                           <a:solidFill>
-                            <a:srgbClr val="334155"/>
+                            <a:srgbClr val="1E3A5F"/>
                           </a:solidFill>
                         </a:defRPr>
                       </a:pPr>
@@ -8229,7 +8229,7 @@
                       <a:pPr>
                         <a:defRPr sz="900">
                           <a:solidFill>
-                            <a:srgbClr val="334155"/>
+                            <a:srgbClr val="1E3A5F"/>
                           </a:solidFill>
                         </a:defRPr>
                       </a:pPr>
@@ -8256,7 +8256,7 @@
                       <a:pPr algn="ctr">
                         <a:defRPr sz="900">
                           <a:solidFill>
-                            <a:srgbClr val="334155"/>
+                            <a:srgbClr val="1E3A5F"/>
                           </a:solidFill>
                         </a:defRPr>
                       </a:pPr>
@@ -8327,7 +8327,7 @@
                       <a:pPr algn="ctr">
                         <a:defRPr sz="900">
                           <a:solidFill>
-                            <a:srgbClr val="334155"/>
+                            <a:srgbClr val="1E3A5F"/>
                           </a:solidFill>
                         </a:defRPr>
                       </a:pPr>
@@ -8358,7 +8358,7 @@
                       <a:pPr>
                         <a:defRPr sz="900">
                           <a:solidFill>
-                            <a:srgbClr val="334155"/>
+                            <a:srgbClr val="1E3A5F"/>
                           </a:solidFill>
                         </a:defRPr>
                       </a:pPr>
@@ -8385,7 +8385,7 @@
                       <a:pPr algn="ctr">
                         <a:defRPr sz="900">
                           <a:solidFill>
-                            <a:srgbClr val="334155"/>
+                            <a:srgbClr val="1E3A5F"/>
                           </a:solidFill>
                         </a:defRPr>
                       </a:pPr>
@@ -8521,7 +8521,7 @@
               </a:defRPr>
             </a:pPr>
             <a:r>
-              <a:t>SyncGuard AI 사업 완료보고서  &gt;  6. 유지보수 및 지원</a:t>
+              <a:t>SyncFlow AI 사업 완료보고서  &gt;  6. 유지보수 및 지원</a:t>
             </a:r>
           </a:p>
         </p:txBody>
@@ -8586,7 +8586,7 @@
             <a:pPr algn="r">
               <a:defRPr sz="1000" b="1">
                 <a:solidFill>
-                  <a:srgbClr val="1E293B"/>
+                  <a:srgbClr val="0F2942"/>
                 </a:solidFill>
               </a:defRPr>
             </a:pPr>
@@ -8671,7 +8671,7 @@
               </a:defRPr>
             </a:pPr>
             <a:r>
-              <a:t>SyncGuard AI | 프로젝트 최종 완수 및 검수 요청 종료보고서</a:t>
+              <a:t>SyncFlow AI | 프로젝트 최종 완수 및 검수 요청 종료보고서</a:t>
             </a:r>
           </a:p>
         </p:txBody>
@@ -8827,7 +8827,7 @@
               </a:spcBef>
               <a:defRPr sz="950">
                 <a:solidFill>
-                  <a:srgbClr val="334155"/>
+                  <a:srgbClr val="1E3A5F"/>
                 </a:solidFill>
               </a:defRPr>
             </a:pPr>
@@ -8842,7 +8842,7 @@
               </a:spcBef>
               <a:defRPr sz="950">
                 <a:solidFill>
-                  <a:srgbClr val="334155"/>
+                  <a:srgbClr val="1E3A5F"/>
                 </a:solidFill>
               </a:defRPr>
             </a:pPr>
@@ -8857,7 +8857,7 @@
               </a:spcBef>
               <a:defRPr sz="950">
                 <a:solidFill>
-                  <a:srgbClr val="334155"/>
+                  <a:srgbClr val="1E3A5F"/>
                 </a:solidFill>
               </a:defRPr>
             </a:pPr>
@@ -8952,7 +8952,7 @@
               </a:spcBef>
               <a:defRPr sz="950">
                 <a:solidFill>
-                  <a:srgbClr val="334155"/>
+                  <a:srgbClr val="1E3A5F"/>
                 </a:solidFill>
               </a:defRPr>
             </a:pPr>
@@ -8967,12 +8967,12 @@
               </a:spcBef>
               <a:defRPr sz="950">
                 <a:solidFill>
-                  <a:srgbClr val="334155"/>
-                </a:solidFill>
-              </a:defRPr>
-            </a:pPr>
-            <a:r>
-              <a:t>• 중대 (P2, 일부 브랜드 심의 불가): 접수 1시간 내 착수, 4시간 내 해결</a:t>
+                  <a:srgbClr val="1E3A5F"/>
+                </a:solidFill>
+              </a:defRPr>
+            </a:pPr>
+            <a:r>
+              <a:t>• 중대 (P2, 일부 사업본부 검증 불가): 접수 1시간 내 착수, 4시간 내 해결</a:t>
             </a:r>
           </a:p>
           <a:p>
@@ -8982,7 +8982,7 @@
               </a:spcBef>
               <a:defRPr sz="950">
                 <a:solidFill>
-                  <a:srgbClr val="334155"/>
+                  <a:srgbClr val="1E3A5F"/>
                 </a:solidFill>
               </a:defRPr>
             </a:pPr>
@@ -9077,7 +9077,7 @@
               </a:spcBef>
               <a:defRPr sz="950">
                 <a:solidFill>
-                  <a:srgbClr val="334155"/>
+                  <a:srgbClr val="1E3A5F"/>
                 </a:solidFill>
               </a:defRPr>
             </a:pPr>
@@ -9092,7 +9092,7 @@
               </a:spcBef>
               <a:defRPr sz="950">
                 <a:solidFill>
-                  <a:srgbClr val="334155"/>
+                  <a:srgbClr val="1E3A5F"/>
                 </a:solidFill>
               </a:defRPr>
             </a:pPr>
@@ -9107,7 +9107,7 @@
               </a:spcBef>
               <a:defRPr sz="950">
                 <a:solidFill>
-                  <a:srgbClr val="334155"/>
+                  <a:srgbClr val="1E3A5F"/>
                 </a:solidFill>
               </a:defRPr>
             </a:pPr>
@@ -9202,12 +9202,12 @@
               </a:spcBef>
               <a:defRPr sz="950">
                 <a:solidFill>
-                  <a:srgbClr val="334155"/>
-                </a:solidFill>
-              </a:defRPr>
-            </a:pPr>
-            <a:r>
-              <a:t>• RA 실무자 대상 화면별 심의 실습 교육 완료 (18명 수료)</a:t>
+                  <a:srgbClr val="1E3A5F"/>
+                </a:solidFill>
+              </a:defRPr>
+            </a:pPr>
+            <a:r>
+              <a:t>• QA 실무자 대상 화면별 검증 실습 교육 완료 (18명 수료)</a:t>
             </a:r>
           </a:p>
           <a:p>
@@ -9217,7 +9217,7 @@
               </a:spcBef>
               <a:defRPr sz="950">
                 <a:solidFill>
-                  <a:srgbClr val="334155"/>
+                  <a:srgbClr val="1E3A5F"/>
                 </a:solidFill>
               </a:defRPr>
             </a:pPr>
@@ -9232,7 +9232,7 @@
               </a:spcBef>
               <a:defRPr sz="950">
                 <a:solidFill>
-                  <a:srgbClr val="334155"/>
+                  <a:srgbClr val="1E3A5F"/>
                 </a:solidFill>
               </a:defRPr>
             </a:pPr>
@@ -9335,7 +9335,7 @@
               </a:defRPr>
             </a:pPr>
             <a:r>
-              <a:t>SyncGuard AI 사업 완료보고서  &gt;  7. 검수 요청 및 승인</a:t>
+              <a:t>SyncFlow AI 사업 완료보고서  &gt;  7. 검수 요청 및 승인</a:t>
             </a:r>
           </a:p>
         </p:txBody>
@@ -9400,7 +9400,7 @@
             <a:pPr algn="r">
               <a:defRPr sz="1000" b="1">
                 <a:solidFill>
-                  <a:srgbClr val="1E293B"/>
+                  <a:srgbClr val="0F2942"/>
                 </a:solidFill>
               </a:defRPr>
             </a:pPr>
@@ -9485,7 +9485,7 @@
               </a:defRPr>
             </a:pPr>
             <a:r>
-              <a:t>SyncGuard AI | 프로젝트 최종 완수 및 검수 요청 종료보고서</a:t>
+              <a:t>SyncFlow AI | 프로젝트 최종 완수 및 검수 요청 종료보고서</a:t>
             </a:r>
           </a:p>
         </p:txBody>
@@ -9641,12 +9641,12 @@
               </a:spcBef>
               <a:defRPr sz="1000">
                 <a:solidFill>
-                  <a:srgbClr val="334155"/>
-                </a:solidFill>
-              </a:defRPr>
-            </a:pPr>
-            <a:r>
-              <a:t>주식회사 한빛글로벌과 주식회사 엠파시 간 체결한 「SyncGuard AI 시스템 구축 용역 계약」에 의거하여, 제안요청서(RFP) 및 사업수행계획서에 명시된 기능 요구사항 42개 항목 및 비기능 요구사항을 100% 완수하였으며, 시범운영 및 최종 산출물 28종의 인계를 완료하였기에 본 사업의 최종 완료를 보고하고 검수를 정식으로 요청합니다.</a:t>
+                  <a:srgbClr val="1E3A5F"/>
+                </a:solidFill>
+              </a:defRPr>
+            </a:pPr>
+            <a:r>
+              <a:t>주식회사 한빛글로벌과 주식회사 엠파시 간 체결한 「SyncFlow AI 시스템 구축 용역 계약」에 의거하여, 제안요청서(RFP) 및 사업수행계획서에 명시된 기능 요구사항 42개 항목 및 비기능 요구사항을 100% 완수하였으며, 시범운영 및 최종 산출물 28종의 인계를 완료하였기에 본 사업의 최종 완료를 보고하고 검수를 정식으로 요청합니다.</a:t>
             </a:r>
           </a:p>
           <a:p>
@@ -9751,7 +9751,7 @@
               </a:spcBef>
               <a:defRPr sz="1000">
                 <a:solidFill>
-                  <a:srgbClr val="334155"/>
+                  <a:srgbClr val="1E3A5F"/>
                 </a:solidFill>
               </a:defRPr>
             </a:pPr>
@@ -9760,7 +9760,7 @@
             </a:r>
             <a:br/>
             <a:r>
-              <a:t>RA팀 검수책임관</a:t>
+              <a:t>QA팀 검수책임관</a:t>
             </a:r>
             <a:br/>
             <a:br/>
@@ -9855,7 +9855,7 @@
               </a:spcBef>
               <a:defRPr sz="1000">
                 <a:solidFill>
-                  <a:srgbClr val="334155"/>
+                  <a:srgbClr val="1E3A5F"/>
                 </a:solidFill>
               </a:defRPr>
             </a:pPr>
@@ -9959,7 +9959,7 @@
               </a:spcBef>
               <a:defRPr sz="1000">
                 <a:solidFill>
-                  <a:srgbClr val="334155"/>
+                  <a:srgbClr val="1E3A5F"/>
                 </a:solidFill>
               </a:defRPr>
             </a:pPr>
